--- a/events/vip-ceremony/내빈행사_식순.pptx
+++ b/events/vip-ceremony/내빈행사_식순.pptx
@@ -120,13 +120,13 @@
   <p:extLst>
     <p:ext uri="{521415D9-36F7-43E2-AB2F-B90AF26B5E84}">
       <p14:sectionLst xmlns:p14="http://schemas.microsoft.com/office/powerpoint/2010/main">
-        <p14:section name="오프닝" id="{ea52f828-bd7d-0026-7263-976e43dd4256}">
+        <p14:section name="오프닝" id="{771ead97-3db1-fd1b-f732-9030d39d39ea}">
           <p14:sldIdLst>
             <p14:sldId id="256"/>
             <p14:sldId id="257"/>
           </p14:sldIdLst>
         </p14:section>
-        <p14:section name="식순" id="{f1da03ad-d652-aca6-446c-975d9eba16ef}">
+        <p14:section name="식순" id="{5a897297-b4c3-fd23-93cc-0cb26dc69cc5}">
           <p14:sldIdLst>
             <p14:sldId id="258"/>
             <p14:sldId id="259"/>
@@ -140,12 +140,12 @@
             <p14:sldId id="267"/>
           </p14:sldIdLst>
         </p14:section>
-        <p14:section name="내빈" id="{65403c95-edc6-bc65-a8b1-17ea2b1ac738}">
+        <p14:section name="내빈" id="{10bf5fa6-2fb2-a306-ceaa-a0cc3c94c862}">
           <p14:sldIdLst>
             <p14:sldId id="268"/>
           </p14:sldIdLst>
         </p14:section>
-        <p14:section name="클로징" id="{63b3fe58-7243-b241-c9a9-a1f556441587}">
+        <p14:section name="클로징" id="{70547373-ae71-6881-f256-981405d9a611}">
           <p14:sldIdLst>
             <p14:sldId id="269"/>
           </p14:sldIdLst>
@@ -554,7 +554,7 @@
           <a:p>
             <a:r>
               <a:rPr lang="en-US" dirty="0"/>
-              <a:t>행사 시작 전 대기 화면 및 개회 시 타이틀 화면으로 사용합니다. 행사명·일시·장소는 텍스트만 교체하면 됩니다.</a:t>
+              <a:t>개회 타이틀 화면. 행사명·일시·장소·주최는 텍스트만 교체하세요.</a:t>
             </a:r>
             <a:endParaRPr lang="en-US" dirty="0"/>
           </a:p>
@@ -642,7 +642,7 @@
           <a:p>
             <a:r>
               <a:rPr lang="en-US" dirty="0"/>
-              <a:t>7. 감사패 수여 - 회장. 설명 문구는 행사에 맞게 수정하세요.</a:t>
+              <a:t>7. 감사패 수여 - 회장</a:t>
             </a:r>
             <a:endParaRPr lang="en-US" dirty="0"/>
           </a:p>
@@ -730,7 +730,7 @@
           <a:p>
             <a:r>
               <a:rPr lang="en-US" dirty="0"/>
-              <a:t>8. 기념 촬영 - 참석자 전원. 설명 문구는 행사에 맞게 수정하세요.</a:t>
+              <a:t>8. 기념 촬영 - 참석자 전원</a:t>
             </a:r>
             <a:endParaRPr lang="en-US" dirty="0"/>
           </a:p>
@@ -818,7 +818,7 @@
           <a:p>
             <a:r>
               <a:rPr lang="en-US" dirty="0"/>
-              <a:t>9. 폐회 - 사회자. 설명 문구는 행사에 맞게 수정하세요.</a:t>
+              <a:t>9. 폐회 - 사회자</a:t>
             </a:r>
             <a:endParaRPr lang="en-US" dirty="0"/>
           </a:p>
@@ -906,7 +906,7 @@
           <a:p>
             <a:r>
               <a:rPr lang="en-US" dirty="0"/>
-              <a:t>내빈 명단 카드입니다. 카드 수가 다르면 카드를 복사/삭제해 사용하세요. 좌석 순서 또는 소개 순서대로 배치합니다.</a:t>
+              <a:t>내빈 명단 카드. 카드 수는 복사/삭제로 조정하세요.</a:t>
             </a:r>
             <a:endParaRPr lang="en-US" dirty="0"/>
           </a:p>
@@ -994,7 +994,7 @@
           <a:p>
             <a:r>
               <a:rPr lang="en-US" dirty="0"/>
-              <a:t>폐회 후 퇴장 안내 화면입니다.</a:t>
+              <a:t>폐회 후 퇴장 안내 화면.</a:t>
             </a:r>
             <a:endParaRPr lang="en-US" dirty="0"/>
           </a:p>
@@ -1082,7 +1082,7 @@
           <a:p>
             <a:r>
               <a:rPr lang="en-US" dirty="0"/>
-              <a:t>착석 안내용 대기 화면입니다. 휴대전화 진동 전환 안내 문구를 추가해도 좋습니다.</a:t>
+              <a:t>착석 안내 대기 화면.</a:t>
             </a:r>
             <a:endParaRPr lang="en-US" dirty="0"/>
           </a:p>
@@ -1170,7 +1170,7 @@
           <a:p>
             <a:r>
               <a:rPr lang="en-US" dirty="0"/>
-              <a:t>전체 식순을 한눈에 보여 주는 화면입니다. 담당자명(회장, 사무총장 등)은 실제 직함·성함으로 바꿔 주세요.</a:t>
+              <a:t>전체 식순 화면. 담당자 직함은 실제 직함·성함으로 교체하세요.</a:t>
             </a:r>
             <a:endParaRPr lang="en-US" dirty="0"/>
           </a:p>
@@ -1258,7 +1258,7 @@
           <a:p>
             <a:r>
               <a:rPr lang="en-US" dirty="0"/>
-              <a:t>1. 개회 선언 - 사회자. 설명 문구는 행사에 맞게 수정하세요.</a:t>
+              <a:t>1. 개회 선언 - 사회자</a:t>
             </a:r>
             <a:endParaRPr lang="en-US" dirty="0"/>
           </a:p>
@@ -1346,7 +1346,7 @@
           <a:p>
             <a:r>
               <a:rPr lang="en-US" dirty="0"/>
-              <a:t>2. 국민의례 - 참석자 전원. 설명 문구는 행사에 맞게 수정하세요.</a:t>
+              <a:t>2. 국민의례 - 참석자 전원</a:t>
             </a:r>
             <a:endParaRPr lang="en-US" dirty="0"/>
           </a:p>
@@ -1434,7 +1434,7 @@
           <a:p>
             <a:r>
               <a:rPr lang="en-US" dirty="0"/>
-              <a:t>3. 내빈 소개 - 사회자. 설명 문구는 행사에 맞게 수정하세요.</a:t>
+              <a:t>3. 내빈 소개 - 사회자</a:t>
             </a:r>
             <a:endParaRPr lang="en-US" dirty="0"/>
           </a:p>
@@ -1522,7 +1522,7 @@
           <a:p>
             <a:r>
               <a:rPr lang="en-US" dirty="0"/>
-              <a:t>4. 경과보고 - 사무총장. 설명 문구는 행사에 맞게 수정하세요.</a:t>
+              <a:t>4. 경과보고 - 사무총장</a:t>
             </a:r>
             <a:endParaRPr lang="en-US" dirty="0"/>
           </a:p>
@@ -1610,7 +1610,7 @@
           <a:p>
             <a:r>
               <a:rPr lang="en-US" dirty="0"/>
-              <a:t>5. 기념사 - 회장. 설명 문구는 행사에 맞게 수정하세요.</a:t>
+              <a:t>5. 기념사 - 회장</a:t>
             </a:r>
             <a:endParaRPr lang="en-US" dirty="0"/>
           </a:p>
@@ -1698,7 +1698,7 @@
           <a:p>
             <a:r>
               <a:rPr lang="en-US" dirty="0"/>
-              <a:t>6. 축사 - 내빈 대표. 설명 문구는 행사에 맞게 수정하세요.</a:t>
+              <a:t>6. 축사 - 내빈 대표</a:t>
             </a:r>
             <a:endParaRPr lang="en-US" dirty="0"/>
           </a:p>
@@ -1811,8 +1811,8 @@
         </p:nvSpPr>
         <p:spPr>
           <a:xfrm>
-            <a:off x="1371600" y="1417320"/>
-            <a:ext cx="9448495" cy="457200"/>
+            <a:off x="1371600" y="1965960"/>
+            <a:ext cx="9448495" cy="411480"/>
           </a:xfrm>
           <a:prstGeom prst="rect">
             <a:avLst/>
@@ -1825,9 +1825,9 @@
           <a:lstStyle>
             <a:lvl1pPr algn="ctr" indent="0" marL="0">
               <a:buNone/>
-              <a:defRPr lang="en-US" sz="1800" spc="800" kern="0" dirty="0">
-                <a:solidFill>
-                  <a:schemeClr val="accent1"/>
+              <a:defRPr lang="en-US" sz="1700" spc="1000" kern="0" dirty="0">
+                <a:solidFill>
+                  <a:schemeClr val="accent2"/>
                 </a:solidFill>
               </a:defRPr>
             </a:lvl1pPr>
@@ -1837,14 +1837,14 @@
               <a:buNone/>
             </a:pPr>
             <a:r>
-              <a:rPr lang="en-US" sz="1800" spc="800" kern="0" dirty="0">
-                <a:solidFill>
-                  <a:schemeClr val="accent1"/>
-                </a:solidFill>
-              </a:rPr>
-              <a:t>행사 부제</a:t>
-            </a:r>
-            <a:endParaRPr lang="en-US" sz="1800" dirty="0"/>
+              <a:rPr lang="en-US" sz="1700" spc="1000" kern="0" dirty="0">
+                <a:solidFill>
+                  <a:schemeClr val="accent2"/>
+                </a:solidFill>
+              </a:rPr>
+              <a:t>부제</a:t>
+            </a:r>
+            <a:endParaRPr lang="en-US" sz="1700" dirty="0"/>
           </a:p>
         </p:txBody>
       </p:sp>
@@ -1858,8 +1858,8 @@
         </p:nvSpPr>
         <p:spPr>
           <a:xfrm>
-            <a:off x="914400" y="2240280"/>
-            <a:ext cx="10362895" cy="1463040"/>
+            <a:off x="731520" y="2514600"/>
+            <a:ext cx="10728655" cy="1417320"/>
           </a:xfrm>
           <a:prstGeom prst="rect">
             <a:avLst/>
@@ -1872,10 +1872,17 @@
           <a:lstStyle>
             <a:lvl1pPr algn="ctr" indent="0" marL="0">
               <a:buNone/>
-              <a:defRPr lang="en-US" sz="5400" b="1" dirty="0">
-                <a:solidFill>
-                  <a:schemeClr val="bg1"/>
-                </a:solidFill>
+              <a:defRPr lang="en-US" sz="5800" b="1" spc="400" kern="0" dirty="0">
+                <a:solidFill>
+                  <a:schemeClr val="accent2"/>
+                </a:solidFill>
+                <a:effectLst>
+                  <a:glow rad="63500">
+                    <a:srgbClr val="D4AF5F">
+                      <a:alpha val="35000"/>
+                    </a:srgbClr>
+                  </a:glow>
+                </a:effectLst>
               </a:defRPr>
             </a:lvl1pPr>
           </a:lstStyle>
@@ -1884,14 +1891,21 @@
               <a:buNone/>
             </a:pPr>
             <a:r>
-              <a:rPr lang="en-US" sz="5400" b="1" dirty="0">
-                <a:solidFill>
-                  <a:schemeClr val="bg1"/>
-                </a:solidFill>
+              <a:rPr lang="en-US" sz="5800" b="1" spc="400" kern="0" dirty="0">
+                <a:solidFill>
+                  <a:schemeClr val="accent2"/>
+                </a:solidFill>
+                <a:effectLst>
+                  <a:glow rad="63500">
+                    <a:srgbClr val="D4AF5F">
+                      <a:alpha val="35000"/>
+                    </a:srgbClr>
+                  </a:glow>
+                </a:effectLst>
               </a:rPr>
               <a:t>행사명</a:t>
             </a:r>
-            <a:endParaRPr lang="en-US" sz="5400" dirty="0"/>
+            <a:endParaRPr lang="en-US" sz="5800" dirty="0"/>
           </a:p>
         </p:txBody>
       </p:sp>
@@ -1906,7 +1920,7 @@
         <p:spPr>
           <a:xfrm>
             <a:off x="1371600" y="4160520"/>
-            <a:ext cx="9448495" cy="502920"/>
+            <a:ext cx="9448495" cy="457200"/>
           </a:xfrm>
           <a:prstGeom prst="rect">
             <a:avLst/>
@@ -1919,9 +1933,9 @@
           <a:lstStyle>
             <a:lvl1pPr algn="ctr" indent="0" marL="0">
               <a:buNone/>
-              <a:defRPr lang="en-US" sz="2000" dirty="0">
-                <a:solidFill>
-                  <a:schemeClr val="accent2"/>
+              <a:defRPr lang="en-US" sz="1900" dirty="0">
+                <a:solidFill>
+                  <a:schemeClr val="bg1"/>
                 </a:solidFill>
               </a:defRPr>
             </a:lvl1pPr>
@@ -1931,14 +1945,61 @@
               <a:buNone/>
             </a:pPr>
             <a:r>
-              <a:rPr lang="en-US" sz="2000" dirty="0">
-                <a:solidFill>
-                  <a:schemeClr val="accent2"/>
+              <a:rPr lang="en-US" sz="1900" dirty="0">
+                <a:solidFill>
+                  <a:schemeClr val="bg1"/>
                 </a:solidFill>
               </a:rPr>
               <a:t>일시 · 장소</a:t>
             </a:r>
-            <a:endParaRPr lang="en-US" sz="2000" dirty="0"/>
+            <a:endParaRPr lang="en-US" sz="1900" dirty="0"/>
+          </a:p>
+        </p:txBody>
+      </p:sp>
+      <p:sp>
+        <p:nvSpPr>
+          <p:cNvPr id="5" name="Text 0"/>
+          <p:cNvSpPr/>
+          <p:nvPr>
+            <p:ph idx="103" type="body" hasCustomPrompt="1"/>
+          </p:nvPr>
+        </p:nvSpPr>
+        <p:spPr>
+          <a:xfrm>
+            <a:off x="1371600" y="4617720"/>
+            <a:ext cx="9448495" cy="365760"/>
+          </a:xfrm>
+          <a:prstGeom prst="rect">
+            <a:avLst/>
+          </a:prstGeom>
+          <a:noFill/>
+          <a:ln/>
+        </p:spPr>
+        <p:txBody>
+          <a:bodyPr wrap="square" rtlCol="0"/>
+          <a:lstStyle>
+            <a:lvl1pPr algn="ctr" indent="0" marL="0">
+              <a:buNone/>
+              <a:defRPr lang="en-US" sz="1400" spc="300" kern="0" dirty="0">
+                <a:solidFill>
+                  <a:schemeClr val="accent3"/>
+                </a:solidFill>
+              </a:defRPr>
+            </a:lvl1pPr>
+          </a:lstStyle>
+          <a:p>
+            <a:pPr algn="ctr" indent="0" marL="0">
+              <a:buNone/>
+            </a:pPr>
+            <a:r>
+              <a:rPr lang="en-US" sz="1400" spc="300" kern="0" dirty="0">
+                <a:solidFill>
+                  <a:schemeClr val="accent3"/>
+                </a:solidFill>
+              </a:rPr>
+              <a:t>주최</a:t>
+            </a:r>
+            <a:endParaRPr lang="en-US" sz="1400" dirty="0"/>
           </a:p>
         </p:txBody>
       </p:sp>
@@ -1951,6 +2012,206 @@
 </file>
 
 <file path=ppt/slideLayouts/slideLayout3.xml><?xml version="1.0" encoding="utf-8"?>
+<p:sldLayout xmlns:a="http://schemas.openxmlformats.org/drawingml/2006/main" xmlns:r="http://schemas.openxmlformats.org/officeDocument/2006/relationships" xmlns:p="http://schemas.openxmlformats.org/presentationml/2006/main" preserve="1">
+  <p:cSld name="FOCUS">
+    <p:bg>
+      <p:bgPr>
+        <a:blipFill dpi="0" rotWithShape="1">
+          <a:blip r:embed="rId1">
+            <a:lum/>
+          </a:blip>
+          <a:srcRect/>
+          <a:stretch>
+            <a:fillRect/>
+          </a:stretch>
+        </a:blipFill>
+        <a:effectLst/>
+      </p:bgPr>
+    </p:bg>
+    <p:spTree>
+      <p:nvGrpSpPr>
+        <p:cNvPr id="1" name=""/>
+        <p:cNvGrpSpPr/>
+        <p:nvPr/>
+      </p:nvGrpSpPr>
+      <p:grpSpPr>
+        <a:xfrm>
+          <a:off x="0" y="0"/>
+          <a:ext cx="0" cy="0"/>
+          <a:chOff x="0" y="0"/>
+          <a:chExt cx="0" cy="0"/>
+        </a:xfrm>
+      </p:grpSpPr>
+      <p:sp>
+        <p:nvSpPr>
+          <p:cNvPr id="2" name="Text 0"/>
+          <p:cNvSpPr/>
+          <p:nvPr>
+            <p:ph idx="100" type="body" hasCustomPrompt="1"/>
+          </p:nvPr>
+        </p:nvSpPr>
+        <p:spPr>
+          <a:xfrm>
+            <a:off x="1371600" y="1938528"/>
+            <a:ext cx="9448495" cy="457200"/>
+          </a:xfrm>
+          <a:prstGeom prst="rect">
+            <a:avLst/>
+          </a:prstGeom>
+          <a:noFill/>
+          <a:ln/>
+        </p:spPr>
+        <p:txBody>
+          <a:bodyPr wrap="square" rtlCol="0"/>
+          <a:lstStyle>
+            <a:lvl1pPr algn="ctr" indent="0" marL="0">
+              <a:buNone/>
+              <a:defRPr lang="en-US" sz="1800" spc="1200" kern="0" dirty="0">
+                <a:solidFill>
+                  <a:schemeClr val="accent2"/>
+                </a:solidFill>
+              </a:defRPr>
+            </a:lvl1pPr>
+          </a:lstStyle>
+          <a:p>
+            <a:pPr algn="ctr" indent="0" marL="0">
+              <a:buNone/>
+            </a:pPr>
+            <a:r>
+              <a:rPr lang="en-US" sz="1800" spc="1200" kern="0" dirty="0">
+                <a:solidFill>
+                  <a:schemeClr val="accent2"/>
+                </a:solidFill>
+              </a:rPr>
+              <a:t>순서</a:t>
+            </a:r>
+            <a:endParaRPr lang="en-US" sz="1800" dirty="0"/>
+          </a:p>
+        </p:txBody>
+      </p:sp>
+      <p:sp>
+        <p:nvSpPr>
+          <p:cNvPr id="3" name="Text 0"/>
+          <p:cNvSpPr/>
+          <p:nvPr>
+            <p:ph idx="101" type="title" hasCustomPrompt="1"/>
+          </p:nvPr>
+        </p:nvSpPr>
+        <p:spPr>
+          <a:xfrm>
+            <a:off x="731520" y="2468880"/>
+            <a:ext cx="10728655" cy="1463040"/>
+          </a:xfrm>
+          <a:prstGeom prst="rect">
+            <a:avLst/>
+          </a:prstGeom>
+          <a:noFill/>
+          <a:ln/>
+        </p:spPr>
+        <p:txBody>
+          <a:bodyPr wrap="square" rtlCol="0"/>
+          <a:lstStyle>
+            <a:lvl1pPr algn="ctr" indent="0" marL="0">
+              <a:buNone/>
+              <a:defRPr lang="en-US" sz="6600" b="1" spc="1000" kern="0" dirty="0">
+                <a:solidFill>
+                  <a:schemeClr val="accent2"/>
+                </a:solidFill>
+                <a:effectLst>
+                  <a:glow rad="63500">
+                    <a:srgbClr val="D4AF5F">
+                      <a:alpha val="35000"/>
+                    </a:srgbClr>
+                  </a:glow>
+                </a:effectLst>
+              </a:defRPr>
+            </a:lvl1pPr>
+          </a:lstStyle>
+          <a:p>
+            <a:pPr algn="ctr" indent="0" marL="0">
+              <a:buNone/>
+            </a:pPr>
+            <a:r>
+              <a:rPr lang="en-US" sz="6600" b="1" spc="1000" kern="0" dirty="0">
+                <a:solidFill>
+                  <a:schemeClr val="accent2"/>
+                </a:solidFill>
+                <a:effectLst>
+                  <a:glow rad="63500">
+                    <a:srgbClr val="D4AF5F">
+                      <a:alpha val="35000"/>
+                    </a:srgbClr>
+                  </a:glow>
+                </a:effectLst>
+              </a:rPr>
+              <a:t>순서명</a:t>
+            </a:r>
+            <a:endParaRPr lang="en-US" sz="6600" dirty="0"/>
+          </a:p>
+        </p:txBody>
+      </p:sp>
+      <p:sp>
+        <p:nvSpPr>
+          <p:cNvPr id="4" name="Text 0"/>
+          <p:cNvSpPr/>
+          <p:nvPr>
+            <p:ph idx="102" type="body" hasCustomPrompt="1"/>
+          </p:nvPr>
+        </p:nvSpPr>
+        <p:spPr>
+          <a:xfrm>
+            <a:off x="1645920" y="4114800"/>
+            <a:ext cx="8899855" cy="1097280"/>
+          </a:xfrm>
+          <a:prstGeom prst="rect">
+            <a:avLst/>
+          </a:prstGeom>
+          <a:noFill/>
+          <a:ln/>
+        </p:spPr>
+        <p:txBody>
+          <a:bodyPr wrap="square" rtlCol="0"/>
+          <a:lstStyle>
+            <a:lvl1pPr algn="ctr" indent="0" marL="0">
+              <a:lnSpc>
+                <a:spcPct val="130000"/>
+              </a:lnSpc>
+              <a:buNone/>
+              <a:defRPr lang="en-US" sz="2000" dirty="0">
+                <a:solidFill>
+                  <a:schemeClr val="bg1"/>
+                </a:solidFill>
+              </a:defRPr>
+            </a:lvl1pPr>
+          </a:lstStyle>
+          <a:p>
+            <a:pPr algn="ctr" indent="0" marL="0">
+              <a:lnSpc>
+                <a:spcPct val="130000"/>
+              </a:lnSpc>
+              <a:buNone/>
+            </a:pPr>
+            <a:r>
+              <a:rPr lang="en-US" sz="2000" dirty="0">
+                <a:solidFill>
+                  <a:schemeClr val="bg1"/>
+                </a:solidFill>
+              </a:rPr>
+              <a:t>설명</a:t>
+            </a:r>
+            <a:endParaRPr lang="en-US" sz="2000" dirty="0"/>
+          </a:p>
+        </p:txBody>
+      </p:sp>
+    </p:spTree>
+  </p:cSld>
+  <p:clrMapOvr>
+    <a:masterClrMapping/>
+  </p:clrMapOvr>
+</p:sldLayout>
+</file>
+
+<file path=ppt/slideLayouts/slideLayout4.xml><?xml version="1.0" encoding="utf-8"?>
 <p:sldLayout xmlns:a="http://schemas.openxmlformats.org/drawingml/2006/main" xmlns:r="http://schemas.openxmlformats.org/officeDocument/2006/relationships" xmlns:p="http://schemas.openxmlformats.org/presentationml/2006/main" preserve="1">
   <p:cSld name="CONTENT">
     <p:bg>
@@ -1991,8 +2252,8 @@
         </p:nvSpPr>
         <p:spPr>
           <a:xfrm>
-            <a:off x="822960" y="685800"/>
-            <a:ext cx="10545775" cy="822960"/>
+            <a:off x="868680" y="731520"/>
+            <a:ext cx="8686800" cy="868680"/>
           </a:xfrm>
           <a:prstGeom prst="rect">
             <a:avLst/>
@@ -2005,10 +2266,17 @@
           <a:lstStyle>
             <a:lvl1pPr algn="l" indent="0" marL="0">
               <a:buNone/>
-              <a:defRPr lang="en-US" sz="3600" b="1" dirty="0">
-                <a:solidFill>
-                  <a:schemeClr val="bg1"/>
-                </a:solidFill>
+              <a:defRPr lang="en-US" sz="4000" b="1" spc="600" kern="0" dirty="0">
+                <a:solidFill>
+                  <a:schemeClr val="accent2"/>
+                </a:solidFill>
+                <a:effectLst>
+                  <a:glow rad="63500">
+                    <a:srgbClr val="D4AF5F">
+                      <a:alpha val="30000"/>
+                    </a:srgbClr>
+                  </a:glow>
+                </a:effectLst>
               </a:defRPr>
             </a:lvl1pPr>
           </a:lstStyle>
@@ -2017,107 +2285,36 @@
               <a:buNone/>
             </a:pPr>
             <a:r>
-              <a:rPr lang="en-US" sz="3600" b="1" dirty="0">
-                <a:solidFill>
-                  <a:schemeClr val="bg1"/>
-                </a:solidFill>
+              <a:rPr lang="en-US" sz="4000" b="1" spc="600" kern="0" dirty="0">
+                <a:solidFill>
+                  <a:schemeClr val="accent2"/>
+                </a:solidFill>
+                <a:effectLst>
+                  <a:glow rad="63500">
+                    <a:srgbClr val="D4AF5F">
+                      <a:alpha val="30000"/>
+                    </a:srgbClr>
+                  </a:glow>
+                </a:effectLst>
               </a:rPr>
               <a:t>제목</a:t>
             </a:r>
-            <a:endParaRPr lang="en-US" sz="3600" dirty="0"/>
-          </a:p>
-        </p:txBody>
-      </p:sp>
-      <p:sp>
-        <p:nvSpPr>
-          <p:cNvPr id="3" name="Corner label"/>
-          <p:cNvSpPr txBox="1"/>
-          <p:nvPr/>
-        </p:nvSpPr>
-        <p:spPr>
-          <a:xfrm>
-            <a:off x="6766560" y="731520"/>
-            <a:ext cx="4572000" cy="365760"/>
-          </a:xfrm>
-          <a:prstGeom prst="rect">
-            <a:avLst/>
-          </a:prstGeom>
-          <a:noFill/>
-          <a:ln/>
-        </p:spPr>
-        <p:txBody>
-          <a:bodyPr wrap="square" lIns="0" tIns="0" rIns="0" bIns="0" rtlCol="0" anchor="ctr"/>
-          <a:lstStyle/>
-          <a:p>
-            <a:pPr algn="r" indent="0" marL="0">
-              <a:buNone/>
-            </a:pPr>
-            <a:r>
-              <a:rPr lang="en-US" sz="1200" spc="600" kern="0" dirty="0">
-                <a:solidFill>
-                  <a:schemeClr val="accent1"/>
-                </a:solidFill>
-                <a:latin typeface="나눔명조" pitchFamily="34" charset="0"/>
-                <a:ea typeface="나눔명조" pitchFamily="34" charset="-122"/>
-                <a:cs typeface="나눔명조" pitchFamily="34" charset="-120"/>
-              </a:rPr>
-              <a:t>2026 창립 30주년 기념식</a:t>
-            </a:r>
-            <a:endParaRPr lang="en-US" sz="1200" dirty="0"/>
-          </a:p>
-        </p:txBody>
-      </p:sp>
-    </p:spTree>
-  </p:cSld>
-  <p:clrMapOvr>
-    <a:masterClrMapping/>
-  </p:clrMapOvr>
-</p:sldLayout>
-</file>
-
-<file path=ppt/slideLayouts/slideLayout4.xml><?xml version="1.0" encoding="utf-8"?>
-<p:sldLayout xmlns:a="http://schemas.openxmlformats.org/drawingml/2006/main" xmlns:r="http://schemas.openxmlformats.org/officeDocument/2006/relationships" xmlns:p="http://schemas.openxmlformats.org/presentationml/2006/main" preserve="1">
-  <p:cSld name="FOCUS">
-    <p:bg>
-      <p:bgPr>
-        <a:blipFill dpi="0" rotWithShape="1">
-          <a:blip r:embed="rId1">
-            <a:lum/>
-          </a:blip>
-          <a:srcRect/>
-          <a:stretch>
-            <a:fillRect/>
-          </a:stretch>
-        </a:blipFill>
-        <a:effectLst/>
-      </p:bgPr>
-    </p:bg>
-    <p:spTree>
-      <p:nvGrpSpPr>
-        <p:cNvPr id="1" name=""/>
-        <p:cNvGrpSpPr/>
-        <p:nvPr/>
-      </p:nvGrpSpPr>
-      <p:grpSpPr>
-        <a:xfrm>
-          <a:off x="0" y="0"/>
-          <a:ext cx="0" cy="0"/>
-          <a:chOff x="0" y="0"/>
-          <a:chExt cx="0" cy="0"/>
-        </a:xfrm>
-      </p:grpSpPr>
-      <p:sp>
-        <p:nvSpPr>
-          <p:cNvPr id="2" name="Text 0"/>
-          <p:cNvSpPr/>
-          <p:nvPr>
-            <p:ph idx="100" type="body" hasCustomPrompt="1"/>
-          </p:nvPr>
-        </p:nvSpPr>
-        <p:spPr>
-          <a:xfrm>
-            <a:off x="914400" y="1600200"/>
-            <a:ext cx="10362895" cy="640080"/>
+            <a:endParaRPr lang="en-US" sz="4000" dirty="0"/>
+          </a:p>
+        </p:txBody>
+      </p:sp>
+      <p:sp>
+        <p:nvSpPr>
+          <p:cNvPr id="3" name="Text 0"/>
+          <p:cNvSpPr/>
+          <p:nvPr>
+            <p:ph idx="101" type="body" hasCustomPrompt="1"/>
+          </p:nvPr>
+        </p:nvSpPr>
+        <p:spPr>
+          <a:xfrm>
+            <a:off x="868680" y="1572768"/>
+            <a:ext cx="8686800" cy="320040"/>
           </a:xfrm>
           <a:prstGeom prst="rect">
             <a:avLst/>
@@ -2128,9 +2325,9 @@
         <p:txBody>
           <a:bodyPr wrap="square" rtlCol="0"/>
           <a:lstStyle>
-            <a:lvl1pPr algn="ctr" indent="0" marL="0">
-              <a:buNone/>
-              <a:defRPr lang="en-US" sz="2200" spc="1000" kern="0" dirty="0">
+            <a:lvl1pPr algn="l" indent="0" marL="0">
+              <a:buNone/>
+              <a:defRPr lang="en-US" sz="1100" spc="700" kern="0" dirty="0">
                 <a:solidFill>
                   <a:schemeClr val="accent1"/>
                 </a:solidFill>
@@ -2138,118 +2335,18 @@
             </a:lvl1pPr>
           </a:lstStyle>
           <a:p>
-            <a:pPr algn="ctr" indent="0" marL="0">
-              <a:buNone/>
-            </a:pPr>
-            <a:r>
-              <a:rPr lang="en-US" sz="2200" spc="1000" kern="0" dirty="0">
+            <a:pPr algn="l" indent="0" marL="0">
+              <a:buNone/>
+            </a:pPr>
+            <a:r>
+              <a:rPr lang="en-US" sz="1100" spc="700" kern="0" dirty="0">
                 <a:solidFill>
                   <a:schemeClr val="accent1"/>
                 </a:solidFill>
               </a:rPr>
-              <a:t>순서</a:t>
-            </a:r>
-            <a:endParaRPr lang="en-US" sz="2200" dirty="0"/>
-          </a:p>
-        </p:txBody>
-      </p:sp>
-      <p:sp>
-        <p:nvSpPr>
-          <p:cNvPr id="3" name="Text 0"/>
-          <p:cNvSpPr/>
-          <p:nvPr>
-            <p:ph idx="101" type="title" hasCustomPrompt="1"/>
-          </p:nvPr>
-        </p:nvSpPr>
-        <p:spPr>
-          <a:xfrm>
-            <a:off x="914400" y="2377440"/>
-            <a:ext cx="10362895" cy="1280160"/>
-          </a:xfrm>
-          <a:prstGeom prst="rect">
-            <a:avLst/>
-          </a:prstGeom>
-          <a:noFill/>
-          <a:ln/>
-        </p:spPr>
-        <p:txBody>
-          <a:bodyPr wrap="square" rtlCol="0"/>
-          <a:lstStyle>
-            <a:lvl1pPr algn="ctr" indent="0" marL="0">
-              <a:buNone/>
-              <a:defRPr lang="en-US" sz="6000" b="1" spc="600" kern="0" dirty="0">
-                <a:solidFill>
-                  <a:schemeClr val="bg1"/>
-                </a:solidFill>
-              </a:defRPr>
-            </a:lvl1pPr>
-          </a:lstStyle>
-          <a:p>
-            <a:pPr algn="ctr" indent="0" marL="0">
-              <a:buNone/>
-            </a:pPr>
-            <a:r>
-              <a:rPr lang="en-US" sz="6000" b="1" spc="600" kern="0" dirty="0">
-                <a:solidFill>
-                  <a:schemeClr val="bg1"/>
-                </a:solidFill>
-              </a:rPr>
-              <a:t>순서명</a:t>
-            </a:r>
-            <a:endParaRPr lang="en-US" sz="6000" dirty="0"/>
-          </a:p>
-        </p:txBody>
-      </p:sp>
-      <p:sp>
-        <p:nvSpPr>
-          <p:cNvPr id="4" name="Text 0"/>
-          <p:cNvSpPr/>
-          <p:nvPr>
-            <p:ph idx="102" type="body" hasCustomPrompt="1"/>
-          </p:nvPr>
-        </p:nvSpPr>
-        <p:spPr>
-          <a:xfrm>
-            <a:off x="1645920" y="4160520"/>
-            <a:ext cx="8899855" cy="1005840"/>
-          </a:xfrm>
-          <a:prstGeom prst="rect">
-            <a:avLst/>
-          </a:prstGeom>
-          <a:noFill/>
-          <a:ln/>
-        </p:spPr>
-        <p:txBody>
-          <a:bodyPr wrap="square" rtlCol="0"/>
-          <a:lstStyle>
-            <a:lvl1pPr algn="ctr" indent="0" marL="0">
-              <a:lnSpc>
-                <a:spcPct val="130000"/>
-              </a:lnSpc>
-              <a:buNone/>
-              <a:defRPr lang="en-US" sz="2000" dirty="0">
-                <a:solidFill>
-                  <a:schemeClr val="accent2"/>
-                </a:solidFill>
-              </a:defRPr>
-            </a:lvl1pPr>
-          </a:lstStyle>
-          <a:p>
-            <a:pPr algn="ctr" indent="0" marL="0">
-              <a:lnSpc>
-                <a:spcPct val="130000"/>
-              </a:lnSpc>
-              <a:buNone/>
-            </a:pPr>
-            <a:r>
-              <a:rPr lang="en-US" sz="2000" dirty="0">
-                <a:solidFill>
-                  <a:schemeClr val="accent2"/>
-                </a:solidFill>
-              </a:rPr>
-              <a:t>설명</a:t>
-            </a:r>
-            <a:endParaRPr lang="en-US" sz="2000" dirty="0"/>
+              <a:t>CAPTION</a:t>
+            </a:r>
+            <a:endParaRPr lang="en-US" sz="1100" dirty="0"/>
           </a:p>
         </p:txBody>
       </p:sp>
@@ -2568,7 +2665,90 @@
         </p:nvSpPr>
         <p:spPr>
           <a:xfrm>
-            <a:off x="1371600" y="1417320"/>
+            <a:off x="1371600" y="1965960"/>
+            <a:ext cx="9448495" cy="411480"/>
+          </a:xfrm>
+          <a:prstGeom prst="rect">
+            <a:avLst/>
+          </a:prstGeom>
+          <a:noFill/>
+          <a:ln/>
+        </p:spPr>
+        <p:txBody>
+          <a:bodyPr wrap="square" lIns="0" tIns="0" rIns="0" bIns="0" rtlCol="0"/>
+          <a:lstStyle/>
+          <a:p>
+            <a:pPr algn="ctr" indent="0" marL="0">
+              <a:buNone/>
+            </a:pPr>
+            <a:r>
+              <a:rPr lang="en-US" sz="1700" spc="1000" kern="0" dirty="0">
+                <a:solidFill>
+                  <a:schemeClr val="accent2"/>
+                </a:solidFill>
+              </a:rPr>
+              <a:t>내빈 초청 행사</a:t>
+            </a:r>
+            <a:endParaRPr lang="en-US" sz="1700" dirty="0"/>
+          </a:p>
+        </p:txBody>
+      </p:sp>
+      <p:sp>
+        <p:nvSpPr>
+          <p:cNvPr id="3" name="Text 0"/>
+          <p:cNvSpPr/>
+          <p:nvPr>
+            <p:ph idx="101" type="title" hasCustomPrompt="1"/>
+          </p:nvPr>
+        </p:nvSpPr>
+        <p:spPr>
+          <a:xfrm>
+            <a:off x="731520" y="2514600"/>
+            <a:ext cx="10728655" cy="1417320"/>
+          </a:xfrm>
+          <a:prstGeom prst="rect">
+            <a:avLst/>
+          </a:prstGeom>
+          <a:noFill/>
+          <a:ln/>
+        </p:spPr>
+        <p:txBody>
+          <a:bodyPr wrap="square" lIns="0" tIns="0" rIns="0" bIns="0" rtlCol="0"/>
+          <a:lstStyle/>
+          <a:p>
+            <a:pPr algn="ctr" indent="0" marL="0">
+              <a:buNone/>
+            </a:pPr>
+            <a:r>
+              <a:rPr lang="en-US" sz="5800" b="1" spc="400" kern="0" dirty="0">
+                <a:solidFill>
+                  <a:schemeClr val="accent2"/>
+                </a:solidFill>
+                <a:effectLst>
+                  <a:glow rad="63500">
+                    <a:srgbClr val="D4AF5F">
+                      <a:alpha val="35000"/>
+                    </a:srgbClr>
+                  </a:glow>
+                </a:effectLst>
+              </a:rPr>
+              <a:t>2026 창립 30주년 기념식</a:t>
+            </a:r>
+            <a:endParaRPr lang="en-US" sz="5800" dirty="0"/>
+          </a:p>
+        </p:txBody>
+      </p:sp>
+      <p:sp>
+        <p:nvSpPr>
+          <p:cNvPr id="4" name="Text 0"/>
+          <p:cNvSpPr/>
+          <p:nvPr>
+            <p:ph idx="102" type="body" hasCustomPrompt="1"/>
+          </p:nvPr>
+        </p:nvSpPr>
+        <p:spPr>
+          <a:xfrm>
+            <a:off x="1371600" y="4160520"/>
             <a:ext cx="9448495" cy="457200"/>
           </a:xfrm>
           <a:prstGeom prst="rect">
@@ -2585,29 +2765,29 @@
               <a:buNone/>
             </a:pPr>
             <a:r>
-              <a:rPr lang="en-US" sz="1800" spc="800" kern="0" dirty="0">
-                <a:solidFill>
-                  <a:schemeClr val="accent1"/>
-                </a:solidFill>
-              </a:rPr>
-              <a:t>내빈 초청 행사</a:t>
-            </a:r>
-            <a:endParaRPr lang="en-US" sz="1800" dirty="0"/>
-          </a:p>
-        </p:txBody>
-      </p:sp>
-      <p:sp>
-        <p:nvSpPr>
-          <p:cNvPr id="3" name="Text 0"/>
-          <p:cNvSpPr/>
-          <p:nvPr>
-            <p:ph idx="101" type="title" hasCustomPrompt="1"/>
-          </p:nvPr>
-        </p:nvSpPr>
-        <p:spPr>
-          <a:xfrm>
-            <a:off x="914400" y="2240280"/>
-            <a:ext cx="10362895" cy="1463040"/>
+              <a:rPr lang="en-US" sz="1900" dirty="0">
+                <a:solidFill>
+                  <a:schemeClr val="bg1"/>
+                </a:solidFill>
+              </a:rPr>
+              <a:t>2026. 11. 20. (금)  14:00   |   그랜드볼룸 (본관 3층)</a:t>
+            </a:r>
+            <a:endParaRPr lang="en-US" sz="1900" dirty="0"/>
+          </a:p>
+        </p:txBody>
+      </p:sp>
+      <p:sp>
+        <p:nvSpPr>
+          <p:cNvPr id="5" name="Text 0"/>
+          <p:cNvSpPr/>
+          <p:nvPr>
+            <p:ph idx="103" type="body" hasCustomPrompt="1"/>
+          </p:nvPr>
+        </p:nvSpPr>
+        <p:spPr>
+          <a:xfrm>
+            <a:off x="1371600" y="4617720"/>
+            <a:ext cx="9448495" cy="365760"/>
           </a:xfrm>
           <a:prstGeom prst="rect">
             <a:avLst/>
@@ -2623,111 +2803,27 @@
               <a:buNone/>
             </a:pPr>
             <a:r>
-              <a:rPr lang="en-US" sz="5400" b="1" dirty="0">
-                <a:solidFill>
-                  <a:schemeClr val="bg1"/>
-                </a:solidFill>
-              </a:rPr>
-              <a:t>2026 창립 30주년 기념식</a:t>
-            </a:r>
-            <a:endParaRPr lang="en-US" sz="5400" dirty="0"/>
-          </a:p>
-        </p:txBody>
-      </p:sp>
-      <p:sp>
-        <p:nvSpPr>
-          <p:cNvPr id="4" name="Text 0"/>
-          <p:cNvSpPr/>
-          <p:nvPr>
-            <p:ph idx="102" type="body" hasCustomPrompt="1"/>
-          </p:nvPr>
-        </p:nvSpPr>
-        <p:spPr>
-          <a:xfrm>
-            <a:off x="1371600" y="4160520"/>
-            <a:ext cx="9448495" cy="502920"/>
-          </a:xfrm>
-          <a:prstGeom prst="rect">
-            <a:avLst/>
-          </a:prstGeom>
-          <a:noFill/>
-          <a:ln/>
-        </p:spPr>
-        <p:txBody>
-          <a:bodyPr wrap="square" lIns="0" tIns="0" rIns="0" bIns="0" rtlCol="0"/>
-          <a:lstStyle/>
-          <a:p>
-            <a:pPr algn="ctr" indent="0" marL="0">
-              <a:buNone/>
-            </a:pPr>
-            <a:r>
-              <a:rPr lang="en-US" sz="2000" dirty="0">
-                <a:solidFill>
-                  <a:schemeClr val="accent2"/>
-                </a:solidFill>
-              </a:rPr>
-              <a:t>2026. 11. 20. (금)  14:00   |   그랜드볼룸 (본관 3층)</a:t>
-            </a:r>
-            <a:endParaRPr lang="en-US" sz="2000" dirty="0"/>
-          </a:p>
-        </p:txBody>
-      </p:sp>
-      <p:sp>
-        <p:nvSpPr>
-          <p:cNvPr id="5" name="Top line L"/>
-          <p:cNvSpPr/>
-          <p:nvPr/>
-        </p:nvSpPr>
-        <p:spPr>
-          <a:xfrm>
-            <a:off x="4632808" y="2057400"/>
-            <a:ext cx="1316736" cy="0"/>
-          </a:xfrm>
-          <a:prstGeom prst="line">
-            <a:avLst/>
-          </a:prstGeom>
-          <a:noFill/>
-          <a:ln w="12700">
-            <a:solidFill>
-              <a:schemeClr val="accent1"/>
-            </a:solidFill>
-            <a:prstDash val="solid"/>
-          </a:ln>
-        </p:spPr>
-      </p:sp>
-      <p:sp>
-        <p:nvSpPr>
-          <p:cNvPr id="6" name="Top line R"/>
-          <p:cNvSpPr/>
-          <p:nvPr/>
-        </p:nvSpPr>
-        <p:spPr>
-          <a:xfrm>
-            <a:off x="6242152" y="2057400"/>
-            <a:ext cx="1316736" cy="0"/>
-          </a:xfrm>
-          <a:prstGeom prst="line">
-            <a:avLst/>
-          </a:prstGeom>
-          <a:noFill/>
-          <a:ln w="12700">
-            <a:solidFill>
-              <a:schemeClr val="accent1"/>
-            </a:solidFill>
-            <a:prstDash val="solid"/>
-          </a:ln>
-        </p:spPr>
-      </p:sp>
-      <p:sp>
-        <p:nvSpPr>
-          <p:cNvPr id="7" name="Top diamond"/>
-          <p:cNvSpPr/>
-          <p:nvPr/>
-        </p:nvSpPr>
-        <p:spPr>
-          <a:xfrm>
-            <a:off x="6040984" y="2002536"/>
-            <a:ext cx="109728" cy="109728"/>
+              <a:rPr lang="en-US" sz="1400" spc="300" kern="0" dirty="0">
+                <a:solidFill>
+                  <a:schemeClr val="accent3"/>
+                </a:solidFill>
+              </a:rPr>
+              <a:t>주최  ○○○○협회   |   주관  창립30주년기념사업추진위원회</a:t>
+            </a:r>
+            <a:endParaRPr lang="en-US" sz="1400" dirty="0"/>
+          </a:p>
+        </p:txBody>
+      </p:sp>
+      <p:sp>
+        <p:nvSpPr>
+          <p:cNvPr id="6" name="Eyebrow diamond -1"/>
+          <p:cNvSpPr/>
+          <p:nvPr/>
+        </p:nvSpPr>
+        <p:spPr>
+          <a:xfrm>
+            <a:off x="3197200" y="2103120"/>
+            <a:ext cx="128016" cy="128016"/>
           </a:xfrm>
           <a:prstGeom prst="diamond">
             <a:avLst/>
@@ -2745,20 +2841,20 @@
       </p:sp>
       <p:sp>
         <p:nvSpPr>
-          <p:cNvPr id="8" name="Bottom line L"/>
-          <p:cNvSpPr/>
-          <p:nvPr/>
-        </p:nvSpPr>
-        <p:spPr>
-          <a:xfrm>
-            <a:off x="4632808" y="4937760"/>
-            <a:ext cx="1316736" cy="0"/>
+          <p:cNvPr id="7" name="Eyebrow line -1"/>
+          <p:cNvSpPr/>
+          <p:nvPr/>
+        </p:nvSpPr>
+        <p:spPr>
+          <a:xfrm>
+            <a:off x="3352648" y="2167128"/>
+            <a:ext cx="731520" cy="0"/>
           </a:xfrm>
           <a:prstGeom prst="line">
             <a:avLst/>
           </a:prstGeom>
           <a:noFill/>
-          <a:ln w="12700">
+          <a:ln w="9525">
             <a:solidFill>
               <a:schemeClr val="accent1"/>
             </a:solidFill>
@@ -2768,37 +2864,14 @@
       </p:sp>
       <p:sp>
         <p:nvSpPr>
-          <p:cNvPr id="9" name="Bottom line R"/>
-          <p:cNvSpPr/>
-          <p:nvPr/>
-        </p:nvSpPr>
-        <p:spPr>
-          <a:xfrm>
-            <a:off x="6242152" y="4937760"/>
-            <a:ext cx="1316736" cy="0"/>
-          </a:xfrm>
-          <a:prstGeom prst="line">
-            <a:avLst/>
-          </a:prstGeom>
-          <a:noFill/>
-          <a:ln w="12700">
-            <a:solidFill>
-              <a:schemeClr val="accent1"/>
-            </a:solidFill>
-            <a:prstDash val="solid"/>
-          </a:ln>
-        </p:spPr>
-      </p:sp>
-      <p:sp>
-        <p:nvSpPr>
-          <p:cNvPr id="10" name="Bottom diamond"/>
-          <p:cNvSpPr/>
-          <p:nvPr/>
-        </p:nvSpPr>
-        <p:spPr>
-          <a:xfrm>
-            <a:off x="6040984" y="4882896"/>
-            <a:ext cx="109728" cy="109728"/>
+          <p:cNvPr id="8" name="Eyebrow diamond 1"/>
+          <p:cNvSpPr/>
+          <p:nvPr/>
+        </p:nvSpPr>
+        <p:spPr>
+          <a:xfrm>
+            <a:off x="8866480" y="2103120"/>
+            <a:ext cx="128016" cy="128016"/>
           </a:xfrm>
           <a:prstGeom prst="diamond">
             <a:avLst/>
@@ -2807,6 +2880,29 @@
             <a:schemeClr val="accent1"/>
           </a:solidFill>
           <a:ln w="12700">
+            <a:solidFill>
+              <a:schemeClr val="accent1"/>
+            </a:solidFill>
+            <a:prstDash val="solid"/>
+          </a:ln>
+        </p:spPr>
+      </p:sp>
+      <p:sp>
+        <p:nvSpPr>
+          <p:cNvPr id="9" name="Eyebrow line 1"/>
+          <p:cNvSpPr/>
+          <p:nvPr/>
+        </p:nvSpPr>
+        <p:spPr>
+          <a:xfrm>
+            <a:off x="8107528" y="2167128"/>
+            <a:ext cx="731520" cy="0"/>
+          </a:xfrm>
+          <a:prstGeom prst="line">
+            <a:avLst/>
+          </a:prstGeom>
+          <a:noFill/>
+          <a:ln w="9525">
             <a:solidFill>
               <a:schemeClr val="accent1"/>
             </a:solidFill>
@@ -2849,8 +2945,8 @@
         </p:nvSpPr>
         <p:spPr>
           <a:xfrm>
-            <a:off x="914400" y="1600200"/>
-            <a:ext cx="10362895" cy="640080"/>
+            <a:off x="1371600" y="1938528"/>
+            <a:ext cx="9448495" cy="457200"/>
           </a:xfrm>
           <a:prstGeom prst="rect">
             <a:avLst/>
@@ -2866,14 +2962,14 @@
               <a:buNone/>
             </a:pPr>
             <a:r>
-              <a:rPr lang="en-US" sz="2200" spc="1000" kern="0" dirty="0">
-                <a:solidFill>
-                  <a:schemeClr val="accent1"/>
+              <a:rPr lang="en-US" sz="1800" spc="1200" kern="0" dirty="0">
+                <a:solidFill>
+                  <a:schemeClr val="accent2"/>
                 </a:solidFill>
               </a:rPr>
               <a:t>제 7 순서</a:t>
             </a:r>
-            <a:endParaRPr lang="en-US" sz="2200" dirty="0"/>
+            <a:endParaRPr lang="en-US" sz="1800" dirty="0"/>
           </a:p>
         </p:txBody>
       </p:sp>
@@ -2887,8 +2983,8 @@
         </p:nvSpPr>
         <p:spPr>
           <a:xfrm>
-            <a:off x="914400" y="2377440"/>
-            <a:ext cx="10362895" cy="1280160"/>
+            <a:off x="731520" y="2468880"/>
+            <a:ext cx="10728655" cy="1463040"/>
           </a:xfrm>
           <a:prstGeom prst="rect">
             <a:avLst/>
@@ -2904,14 +3000,21 @@
               <a:buNone/>
             </a:pPr>
             <a:r>
-              <a:rPr lang="en-US" sz="6000" b="1" spc="600" kern="0" dirty="0">
-                <a:solidFill>
-                  <a:schemeClr val="bg1"/>
-                </a:solidFill>
+              <a:rPr lang="en-US" sz="6600" b="1" spc="1000" kern="0" dirty="0">
+                <a:solidFill>
+                  <a:schemeClr val="accent2"/>
+                </a:solidFill>
+                <a:effectLst>
+                  <a:glow rad="63500">
+                    <a:srgbClr val="D4AF5F">
+                      <a:alpha val="35000"/>
+                    </a:srgbClr>
+                  </a:glow>
+                </a:effectLst>
               </a:rPr>
               <a:t>감사패 수여</a:t>
             </a:r>
-            <a:endParaRPr lang="en-US" sz="6000" dirty="0"/>
+            <a:endParaRPr lang="en-US" sz="6600" dirty="0"/>
           </a:p>
         </p:txBody>
       </p:sp>
@@ -2925,8 +3028,8 @@
         </p:nvSpPr>
         <p:spPr>
           <a:xfrm>
-            <a:off x="1645920" y="4160520"/>
-            <a:ext cx="8899855" cy="1005840"/>
+            <a:off x="1645920" y="4114800"/>
+            <a:ext cx="8899855" cy="1097280"/>
           </a:xfrm>
           <a:prstGeom prst="rect">
             <a:avLst/>
@@ -2945,9 +3048,9 @@
               <a:buNone/>
             </a:pPr>
             <a:r>
-              <a:rPr lang="en-US" sz="2000" b="1" dirty="0">
-                <a:solidFill>
-                  <a:schemeClr val="accent1"/>
+              <a:rPr lang="en-US" sz="2000" b="1" spc="300" kern="0" dirty="0">
+                <a:solidFill>
+                  <a:schemeClr val="accent2"/>
                 </a:solidFill>
               </a:rPr>
               <a:t>회장</a:t>
@@ -2964,7 +3067,7 @@
             <a:r>
               <a:rPr lang="en-US" sz="2000" dirty="0">
                 <a:solidFill>
-                  <a:schemeClr val="accent2"/>
+                  <a:schemeClr val="bg1"/>
                 </a:solidFill>
               </a:rPr>
               <a:t>공로자 및 유공 단체에 감사의 뜻을 전합니다.</a:t>
@@ -2975,60 +3078,14 @@
       </p:sp>
       <p:sp>
         <p:nvSpPr>
-          <p:cNvPr id="5" name="Top line L"/>
-          <p:cNvSpPr/>
-          <p:nvPr/>
-        </p:nvSpPr>
-        <p:spPr>
-          <a:xfrm>
-            <a:off x="4907128" y="2194560"/>
-            <a:ext cx="1042416" cy="0"/>
-          </a:xfrm>
-          <a:prstGeom prst="line">
-            <a:avLst/>
-          </a:prstGeom>
-          <a:noFill/>
-          <a:ln w="12700">
-            <a:solidFill>
-              <a:schemeClr val="accent1"/>
-            </a:solidFill>
-            <a:prstDash val="solid"/>
-          </a:ln>
-        </p:spPr>
-      </p:sp>
-      <p:sp>
-        <p:nvSpPr>
-          <p:cNvPr id="6" name="Top line R"/>
-          <p:cNvSpPr/>
-          <p:nvPr/>
-        </p:nvSpPr>
-        <p:spPr>
-          <a:xfrm>
-            <a:off x="6242152" y="2194560"/>
-            <a:ext cx="1042416" cy="0"/>
-          </a:xfrm>
-          <a:prstGeom prst="line">
-            <a:avLst/>
-          </a:prstGeom>
-          <a:noFill/>
-          <a:ln w="12700">
-            <a:solidFill>
-              <a:schemeClr val="accent1"/>
-            </a:solidFill>
-            <a:prstDash val="solid"/>
-          </a:ln>
-        </p:spPr>
-      </p:sp>
-      <p:sp>
-        <p:nvSpPr>
-          <p:cNvPr id="7" name="Top diamond"/>
-          <p:cNvSpPr/>
-          <p:nvPr/>
-        </p:nvSpPr>
-        <p:spPr>
-          <a:xfrm>
-            <a:off x="6040984" y="2139696"/>
-            <a:ext cx="109728" cy="109728"/>
+          <p:cNvPr id="5" name="Eyebrow diamond -1"/>
+          <p:cNvSpPr/>
+          <p:nvPr/>
+        </p:nvSpPr>
+        <p:spPr>
+          <a:xfrm>
+            <a:off x="3928720" y="2103120"/>
+            <a:ext cx="128016" cy="128016"/>
           </a:xfrm>
           <a:prstGeom prst="diamond">
             <a:avLst/>
@@ -3046,20 +3103,20 @@
       </p:sp>
       <p:sp>
         <p:nvSpPr>
-          <p:cNvPr id="8" name="Bottom line L"/>
-          <p:cNvSpPr/>
-          <p:nvPr/>
-        </p:nvSpPr>
-        <p:spPr>
-          <a:xfrm>
-            <a:off x="4907128" y="3931920"/>
-            <a:ext cx="1042416" cy="0"/>
+          <p:cNvPr id="6" name="Eyebrow line -1"/>
+          <p:cNvSpPr/>
+          <p:nvPr/>
+        </p:nvSpPr>
+        <p:spPr>
+          <a:xfrm>
+            <a:off x="4084168" y="2167128"/>
+            <a:ext cx="731520" cy="0"/>
           </a:xfrm>
           <a:prstGeom prst="line">
             <a:avLst/>
           </a:prstGeom>
           <a:noFill/>
-          <a:ln w="12700">
+          <a:ln w="9525">
             <a:solidFill>
               <a:schemeClr val="accent1"/>
             </a:solidFill>
@@ -3069,37 +3126,14 @@
       </p:sp>
       <p:sp>
         <p:nvSpPr>
-          <p:cNvPr id="9" name="Bottom line R"/>
-          <p:cNvSpPr/>
-          <p:nvPr/>
-        </p:nvSpPr>
-        <p:spPr>
-          <a:xfrm>
-            <a:off x="6242152" y="3931920"/>
-            <a:ext cx="1042416" cy="0"/>
-          </a:xfrm>
-          <a:prstGeom prst="line">
-            <a:avLst/>
-          </a:prstGeom>
-          <a:noFill/>
-          <a:ln w="12700">
-            <a:solidFill>
-              <a:schemeClr val="accent1"/>
-            </a:solidFill>
-            <a:prstDash val="solid"/>
-          </a:ln>
-        </p:spPr>
-      </p:sp>
-      <p:sp>
-        <p:nvSpPr>
-          <p:cNvPr id="10" name="Bottom diamond"/>
-          <p:cNvSpPr/>
-          <p:nvPr/>
-        </p:nvSpPr>
-        <p:spPr>
-          <a:xfrm>
-            <a:off x="6040984" y="3877056"/>
-            <a:ext cx="109728" cy="109728"/>
+          <p:cNvPr id="7" name="Eyebrow diamond 1"/>
+          <p:cNvSpPr/>
+          <p:nvPr/>
+        </p:nvSpPr>
+        <p:spPr>
+          <a:xfrm>
+            <a:off x="8134960" y="2103120"/>
+            <a:ext cx="128016" cy="128016"/>
           </a:xfrm>
           <a:prstGeom prst="diamond">
             <a:avLst/>
@@ -3108,6 +3142,29 @@
             <a:schemeClr val="accent1"/>
           </a:solidFill>
           <a:ln w="12700">
+            <a:solidFill>
+              <a:schemeClr val="accent1"/>
+            </a:solidFill>
+            <a:prstDash val="solid"/>
+          </a:ln>
+        </p:spPr>
+      </p:sp>
+      <p:sp>
+        <p:nvSpPr>
+          <p:cNvPr id="8" name="Eyebrow line 1"/>
+          <p:cNvSpPr/>
+          <p:nvPr/>
+        </p:nvSpPr>
+        <p:spPr>
+          <a:xfrm>
+            <a:off x="7376008" y="2167128"/>
+            <a:ext cx="731520" cy="0"/>
+          </a:xfrm>
+          <a:prstGeom prst="line">
+            <a:avLst/>
+          </a:prstGeom>
+          <a:noFill/>
+          <a:ln w="9525">
             <a:solidFill>
               <a:schemeClr val="accent1"/>
             </a:solidFill>
@@ -3150,8 +3207,8 @@
         </p:nvSpPr>
         <p:spPr>
           <a:xfrm>
-            <a:off x="914400" y="1600200"/>
-            <a:ext cx="10362895" cy="640080"/>
+            <a:off x="1371600" y="1938528"/>
+            <a:ext cx="9448495" cy="457200"/>
           </a:xfrm>
           <a:prstGeom prst="rect">
             <a:avLst/>
@@ -3167,14 +3224,14 @@
               <a:buNone/>
             </a:pPr>
             <a:r>
-              <a:rPr lang="en-US" sz="2200" spc="1000" kern="0" dirty="0">
-                <a:solidFill>
-                  <a:schemeClr val="accent1"/>
+              <a:rPr lang="en-US" sz="1800" spc="1200" kern="0" dirty="0">
+                <a:solidFill>
+                  <a:schemeClr val="accent2"/>
                 </a:solidFill>
               </a:rPr>
               <a:t>제 8 순서</a:t>
             </a:r>
-            <a:endParaRPr lang="en-US" sz="2200" dirty="0"/>
+            <a:endParaRPr lang="en-US" sz="1800" dirty="0"/>
           </a:p>
         </p:txBody>
       </p:sp>
@@ -3188,8 +3245,8 @@
         </p:nvSpPr>
         <p:spPr>
           <a:xfrm>
-            <a:off x="914400" y="2377440"/>
-            <a:ext cx="10362895" cy="1280160"/>
+            <a:off x="731520" y="2468880"/>
+            <a:ext cx="10728655" cy="1463040"/>
           </a:xfrm>
           <a:prstGeom prst="rect">
             <a:avLst/>
@@ -3205,14 +3262,21 @@
               <a:buNone/>
             </a:pPr>
             <a:r>
-              <a:rPr lang="en-US" sz="6000" b="1" spc="600" kern="0" dirty="0">
-                <a:solidFill>
-                  <a:schemeClr val="bg1"/>
-                </a:solidFill>
+              <a:rPr lang="en-US" sz="6600" b="1" spc="1000" kern="0" dirty="0">
+                <a:solidFill>
+                  <a:schemeClr val="accent2"/>
+                </a:solidFill>
+                <a:effectLst>
+                  <a:glow rad="63500">
+                    <a:srgbClr val="D4AF5F">
+                      <a:alpha val="35000"/>
+                    </a:srgbClr>
+                  </a:glow>
+                </a:effectLst>
               </a:rPr>
               <a:t>기념 촬영</a:t>
             </a:r>
-            <a:endParaRPr lang="en-US" sz="6000" dirty="0"/>
+            <a:endParaRPr lang="en-US" sz="6600" dirty="0"/>
           </a:p>
         </p:txBody>
       </p:sp>
@@ -3226,8 +3290,8 @@
         </p:nvSpPr>
         <p:spPr>
           <a:xfrm>
-            <a:off x="1645920" y="4160520"/>
-            <a:ext cx="8899855" cy="1005840"/>
+            <a:off x="1645920" y="4114800"/>
+            <a:ext cx="8899855" cy="1097280"/>
           </a:xfrm>
           <a:prstGeom prst="rect">
             <a:avLst/>
@@ -3246,9 +3310,9 @@
               <a:buNone/>
             </a:pPr>
             <a:r>
-              <a:rPr lang="en-US" sz="2000" b="1" dirty="0">
-                <a:solidFill>
-                  <a:schemeClr val="accent1"/>
+              <a:rPr lang="en-US" sz="2000" b="1" spc="300" kern="0" dirty="0">
+                <a:solidFill>
+                  <a:schemeClr val="accent2"/>
                 </a:solidFill>
               </a:rPr>
               <a:t>참석자 전원</a:t>
@@ -3265,7 +3329,7 @@
             <a:r>
               <a:rPr lang="en-US" sz="2000" dirty="0">
                 <a:solidFill>
-                  <a:schemeClr val="accent2"/>
+                  <a:schemeClr val="bg1"/>
                 </a:solidFill>
               </a:rPr>
               <a:t>무대 앞으로 모여 주시기 바랍니다.</a:t>
@@ -3276,60 +3340,14 @@
       </p:sp>
       <p:sp>
         <p:nvSpPr>
-          <p:cNvPr id="5" name="Top line L"/>
-          <p:cNvSpPr/>
-          <p:nvPr/>
-        </p:nvSpPr>
-        <p:spPr>
-          <a:xfrm>
-            <a:off x="4907128" y="2194560"/>
-            <a:ext cx="1042416" cy="0"/>
-          </a:xfrm>
-          <a:prstGeom prst="line">
-            <a:avLst/>
-          </a:prstGeom>
-          <a:noFill/>
-          <a:ln w="12700">
-            <a:solidFill>
-              <a:schemeClr val="accent1"/>
-            </a:solidFill>
-            <a:prstDash val="solid"/>
-          </a:ln>
-        </p:spPr>
-      </p:sp>
-      <p:sp>
-        <p:nvSpPr>
-          <p:cNvPr id="6" name="Top line R"/>
-          <p:cNvSpPr/>
-          <p:nvPr/>
-        </p:nvSpPr>
-        <p:spPr>
-          <a:xfrm>
-            <a:off x="6242152" y="2194560"/>
-            <a:ext cx="1042416" cy="0"/>
-          </a:xfrm>
-          <a:prstGeom prst="line">
-            <a:avLst/>
-          </a:prstGeom>
-          <a:noFill/>
-          <a:ln w="12700">
-            <a:solidFill>
-              <a:schemeClr val="accent1"/>
-            </a:solidFill>
-            <a:prstDash val="solid"/>
-          </a:ln>
-        </p:spPr>
-      </p:sp>
-      <p:sp>
-        <p:nvSpPr>
-          <p:cNvPr id="7" name="Top diamond"/>
-          <p:cNvSpPr/>
-          <p:nvPr/>
-        </p:nvSpPr>
-        <p:spPr>
-          <a:xfrm>
-            <a:off x="6040984" y="2139696"/>
-            <a:ext cx="109728" cy="109728"/>
+          <p:cNvPr id="5" name="Eyebrow diamond -1"/>
+          <p:cNvSpPr/>
+          <p:nvPr/>
+        </p:nvSpPr>
+        <p:spPr>
+          <a:xfrm>
+            <a:off x="3928720" y="2103120"/>
+            <a:ext cx="128016" cy="128016"/>
           </a:xfrm>
           <a:prstGeom prst="diamond">
             <a:avLst/>
@@ -3347,20 +3365,20 @@
       </p:sp>
       <p:sp>
         <p:nvSpPr>
-          <p:cNvPr id="8" name="Bottom line L"/>
-          <p:cNvSpPr/>
-          <p:nvPr/>
-        </p:nvSpPr>
-        <p:spPr>
-          <a:xfrm>
-            <a:off x="4907128" y="3931920"/>
-            <a:ext cx="1042416" cy="0"/>
+          <p:cNvPr id="6" name="Eyebrow line -1"/>
+          <p:cNvSpPr/>
+          <p:nvPr/>
+        </p:nvSpPr>
+        <p:spPr>
+          <a:xfrm>
+            <a:off x="4084168" y="2167128"/>
+            <a:ext cx="731520" cy="0"/>
           </a:xfrm>
           <a:prstGeom prst="line">
             <a:avLst/>
           </a:prstGeom>
           <a:noFill/>
-          <a:ln w="12700">
+          <a:ln w="9525">
             <a:solidFill>
               <a:schemeClr val="accent1"/>
             </a:solidFill>
@@ -3370,37 +3388,14 @@
       </p:sp>
       <p:sp>
         <p:nvSpPr>
-          <p:cNvPr id="9" name="Bottom line R"/>
-          <p:cNvSpPr/>
-          <p:nvPr/>
-        </p:nvSpPr>
-        <p:spPr>
-          <a:xfrm>
-            <a:off x="6242152" y="3931920"/>
-            <a:ext cx="1042416" cy="0"/>
-          </a:xfrm>
-          <a:prstGeom prst="line">
-            <a:avLst/>
-          </a:prstGeom>
-          <a:noFill/>
-          <a:ln w="12700">
-            <a:solidFill>
-              <a:schemeClr val="accent1"/>
-            </a:solidFill>
-            <a:prstDash val="solid"/>
-          </a:ln>
-        </p:spPr>
-      </p:sp>
-      <p:sp>
-        <p:nvSpPr>
-          <p:cNvPr id="10" name="Bottom diamond"/>
-          <p:cNvSpPr/>
-          <p:nvPr/>
-        </p:nvSpPr>
-        <p:spPr>
-          <a:xfrm>
-            <a:off x="6040984" y="3877056"/>
-            <a:ext cx="109728" cy="109728"/>
+          <p:cNvPr id="7" name="Eyebrow diamond 1"/>
+          <p:cNvSpPr/>
+          <p:nvPr/>
+        </p:nvSpPr>
+        <p:spPr>
+          <a:xfrm>
+            <a:off x="8134960" y="2103120"/>
+            <a:ext cx="128016" cy="128016"/>
           </a:xfrm>
           <a:prstGeom prst="diamond">
             <a:avLst/>
@@ -3409,6 +3404,29 @@
             <a:schemeClr val="accent1"/>
           </a:solidFill>
           <a:ln w="12700">
+            <a:solidFill>
+              <a:schemeClr val="accent1"/>
+            </a:solidFill>
+            <a:prstDash val="solid"/>
+          </a:ln>
+        </p:spPr>
+      </p:sp>
+      <p:sp>
+        <p:nvSpPr>
+          <p:cNvPr id="8" name="Eyebrow line 1"/>
+          <p:cNvSpPr/>
+          <p:nvPr/>
+        </p:nvSpPr>
+        <p:spPr>
+          <a:xfrm>
+            <a:off x="7376008" y="2167128"/>
+            <a:ext cx="731520" cy="0"/>
+          </a:xfrm>
+          <a:prstGeom prst="line">
+            <a:avLst/>
+          </a:prstGeom>
+          <a:noFill/>
+          <a:ln w="9525">
             <a:solidFill>
               <a:schemeClr val="accent1"/>
             </a:solidFill>
@@ -3451,8 +3469,8 @@
         </p:nvSpPr>
         <p:spPr>
           <a:xfrm>
-            <a:off x="914400" y="1600200"/>
-            <a:ext cx="10362895" cy="640080"/>
+            <a:off x="1371600" y="1938528"/>
+            <a:ext cx="9448495" cy="457200"/>
           </a:xfrm>
           <a:prstGeom prst="rect">
             <a:avLst/>
@@ -3468,14 +3486,14 @@
               <a:buNone/>
             </a:pPr>
             <a:r>
-              <a:rPr lang="en-US" sz="2200" spc="1000" kern="0" dirty="0">
-                <a:solidFill>
-                  <a:schemeClr val="accent1"/>
+              <a:rPr lang="en-US" sz="1800" spc="1200" kern="0" dirty="0">
+                <a:solidFill>
+                  <a:schemeClr val="accent2"/>
                 </a:solidFill>
               </a:rPr>
               <a:t>제 9 순서</a:t>
             </a:r>
-            <a:endParaRPr lang="en-US" sz="2200" dirty="0"/>
+            <a:endParaRPr lang="en-US" sz="1800" dirty="0"/>
           </a:p>
         </p:txBody>
       </p:sp>
@@ -3489,8 +3507,8 @@
         </p:nvSpPr>
         <p:spPr>
           <a:xfrm>
-            <a:off x="914400" y="2377440"/>
-            <a:ext cx="10362895" cy="1280160"/>
+            <a:off x="731520" y="2468880"/>
+            <a:ext cx="10728655" cy="1463040"/>
           </a:xfrm>
           <a:prstGeom prst="rect">
             <a:avLst/>
@@ -3506,14 +3524,21 @@
               <a:buNone/>
             </a:pPr>
             <a:r>
-              <a:rPr lang="en-US" sz="6000" b="1" spc="600" kern="0" dirty="0">
-                <a:solidFill>
-                  <a:schemeClr val="bg1"/>
-                </a:solidFill>
+              <a:rPr lang="en-US" sz="6600" b="1" spc="1000" kern="0" dirty="0">
+                <a:solidFill>
+                  <a:schemeClr val="accent2"/>
+                </a:solidFill>
+                <a:effectLst>
+                  <a:glow rad="63500">
+                    <a:srgbClr val="D4AF5F">
+                      <a:alpha val="35000"/>
+                    </a:srgbClr>
+                  </a:glow>
+                </a:effectLst>
               </a:rPr>
               <a:t>폐회</a:t>
             </a:r>
-            <a:endParaRPr lang="en-US" sz="6000" dirty="0"/>
+            <a:endParaRPr lang="en-US" sz="6600" dirty="0"/>
           </a:p>
         </p:txBody>
       </p:sp>
@@ -3527,8 +3552,8 @@
         </p:nvSpPr>
         <p:spPr>
           <a:xfrm>
-            <a:off x="1645920" y="4160520"/>
-            <a:ext cx="8899855" cy="1005840"/>
+            <a:off x="1645920" y="4114800"/>
+            <a:ext cx="8899855" cy="1097280"/>
           </a:xfrm>
           <a:prstGeom prst="rect">
             <a:avLst/>
@@ -3547,9 +3572,9 @@
               <a:buNone/>
             </a:pPr>
             <a:r>
-              <a:rPr lang="en-US" sz="2000" b="1" dirty="0">
-                <a:solidFill>
-                  <a:schemeClr val="accent1"/>
+              <a:rPr lang="en-US" sz="2000" b="1" spc="300" kern="0" dirty="0">
+                <a:solidFill>
+                  <a:schemeClr val="accent2"/>
                 </a:solidFill>
               </a:rPr>
               <a:t>사회자</a:t>
@@ -3566,7 +3591,7 @@
             <a:r>
               <a:rPr lang="en-US" sz="2000" dirty="0">
                 <a:solidFill>
-                  <a:schemeClr val="accent2"/>
+                  <a:schemeClr val="bg1"/>
                 </a:solidFill>
               </a:rPr>
               <a:t>만찬은 2층 연회장에서 이어집니다.</a:t>
@@ -3577,60 +3602,14 @@
       </p:sp>
       <p:sp>
         <p:nvSpPr>
-          <p:cNvPr id="5" name="Top line L"/>
-          <p:cNvSpPr/>
-          <p:nvPr/>
-        </p:nvSpPr>
-        <p:spPr>
-          <a:xfrm>
-            <a:off x="4907128" y="2194560"/>
-            <a:ext cx="1042416" cy="0"/>
-          </a:xfrm>
-          <a:prstGeom prst="line">
-            <a:avLst/>
-          </a:prstGeom>
-          <a:noFill/>
-          <a:ln w="12700">
-            <a:solidFill>
-              <a:schemeClr val="accent1"/>
-            </a:solidFill>
-            <a:prstDash val="solid"/>
-          </a:ln>
-        </p:spPr>
-      </p:sp>
-      <p:sp>
-        <p:nvSpPr>
-          <p:cNvPr id="6" name="Top line R"/>
-          <p:cNvSpPr/>
-          <p:nvPr/>
-        </p:nvSpPr>
-        <p:spPr>
-          <a:xfrm>
-            <a:off x="6242152" y="2194560"/>
-            <a:ext cx="1042416" cy="0"/>
-          </a:xfrm>
-          <a:prstGeom prst="line">
-            <a:avLst/>
-          </a:prstGeom>
-          <a:noFill/>
-          <a:ln w="12700">
-            <a:solidFill>
-              <a:schemeClr val="accent1"/>
-            </a:solidFill>
-            <a:prstDash val="solid"/>
-          </a:ln>
-        </p:spPr>
-      </p:sp>
-      <p:sp>
-        <p:nvSpPr>
-          <p:cNvPr id="7" name="Top diamond"/>
-          <p:cNvSpPr/>
-          <p:nvPr/>
-        </p:nvSpPr>
-        <p:spPr>
-          <a:xfrm>
-            <a:off x="6040984" y="2139696"/>
-            <a:ext cx="109728" cy="109728"/>
+          <p:cNvPr id="5" name="Eyebrow diamond -1"/>
+          <p:cNvSpPr/>
+          <p:nvPr/>
+        </p:nvSpPr>
+        <p:spPr>
+          <a:xfrm>
+            <a:off x="3928720" y="2103120"/>
+            <a:ext cx="128016" cy="128016"/>
           </a:xfrm>
           <a:prstGeom prst="diamond">
             <a:avLst/>
@@ -3648,20 +3627,20 @@
       </p:sp>
       <p:sp>
         <p:nvSpPr>
-          <p:cNvPr id="8" name="Bottom line L"/>
-          <p:cNvSpPr/>
-          <p:nvPr/>
-        </p:nvSpPr>
-        <p:spPr>
-          <a:xfrm>
-            <a:off x="4907128" y="3931920"/>
-            <a:ext cx="1042416" cy="0"/>
+          <p:cNvPr id="6" name="Eyebrow line -1"/>
+          <p:cNvSpPr/>
+          <p:nvPr/>
+        </p:nvSpPr>
+        <p:spPr>
+          <a:xfrm>
+            <a:off x="4084168" y="2167128"/>
+            <a:ext cx="731520" cy="0"/>
           </a:xfrm>
           <a:prstGeom prst="line">
             <a:avLst/>
           </a:prstGeom>
           <a:noFill/>
-          <a:ln w="12700">
+          <a:ln w="9525">
             <a:solidFill>
               <a:schemeClr val="accent1"/>
             </a:solidFill>
@@ -3671,37 +3650,14 @@
       </p:sp>
       <p:sp>
         <p:nvSpPr>
-          <p:cNvPr id="9" name="Bottom line R"/>
-          <p:cNvSpPr/>
-          <p:nvPr/>
-        </p:nvSpPr>
-        <p:spPr>
-          <a:xfrm>
-            <a:off x="6242152" y="3931920"/>
-            <a:ext cx="1042416" cy="0"/>
-          </a:xfrm>
-          <a:prstGeom prst="line">
-            <a:avLst/>
-          </a:prstGeom>
-          <a:noFill/>
-          <a:ln w="12700">
-            <a:solidFill>
-              <a:schemeClr val="accent1"/>
-            </a:solidFill>
-            <a:prstDash val="solid"/>
-          </a:ln>
-        </p:spPr>
-      </p:sp>
-      <p:sp>
-        <p:nvSpPr>
-          <p:cNvPr id="10" name="Bottom diamond"/>
-          <p:cNvSpPr/>
-          <p:nvPr/>
-        </p:nvSpPr>
-        <p:spPr>
-          <a:xfrm>
-            <a:off x="6040984" y="3877056"/>
-            <a:ext cx="109728" cy="109728"/>
+          <p:cNvPr id="7" name="Eyebrow diamond 1"/>
+          <p:cNvSpPr/>
+          <p:nvPr/>
+        </p:nvSpPr>
+        <p:spPr>
+          <a:xfrm>
+            <a:off x="8134960" y="2103120"/>
+            <a:ext cx="128016" cy="128016"/>
           </a:xfrm>
           <a:prstGeom prst="diamond">
             <a:avLst/>
@@ -3710,6 +3666,29 @@
             <a:schemeClr val="accent1"/>
           </a:solidFill>
           <a:ln w="12700">
+            <a:solidFill>
+              <a:schemeClr val="accent1"/>
+            </a:solidFill>
+            <a:prstDash val="solid"/>
+          </a:ln>
+        </p:spPr>
+      </p:sp>
+      <p:sp>
+        <p:nvSpPr>
+          <p:cNvPr id="8" name="Eyebrow line 1"/>
+          <p:cNvSpPr/>
+          <p:nvPr/>
+        </p:nvSpPr>
+        <p:spPr>
+          <a:xfrm>
+            <a:off x="7376008" y="2167128"/>
+            <a:ext cx="731520" cy="0"/>
+          </a:xfrm>
+          <a:prstGeom prst="line">
+            <a:avLst/>
+          </a:prstGeom>
+          <a:noFill/>
+          <a:ln w="9525">
             <a:solidFill>
               <a:schemeClr val="accent1"/>
             </a:solidFill>
@@ -3752,8 +3731,8 @@
         </p:nvSpPr>
         <p:spPr>
           <a:xfrm>
-            <a:off x="822960" y="685800"/>
-            <a:ext cx="10545775" cy="822960"/>
+            <a:off x="868680" y="731520"/>
+            <a:ext cx="8686800" cy="868680"/>
           </a:xfrm>
           <a:prstGeom prst="rect">
             <a:avLst/>
@@ -3769,27 +3748,36 @@
               <a:buNone/>
             </a:pPr>
             <a:r>
-              <a:rPr lang="en-US" sz="3600" b="1" dirty="0">
-                <a:solidFill>
-                  <a:schemeClr val="bg1"/>
-                </a:solidFill>
+              <a:rPr lang="en-US" sz="4000" b="1" spc="600" kern="0" dirty="0">
+                <a:solidFill>
+                  <a:schemeClr val="accent2"/>
+                </a:solidFill>
+                <a:effectLst>
+                  <a:glow rad="63500">
+                    <a:srgbClr val="D4AF5F">
+                      <a:alpha val="30000"/>
+                    </a:srgbClr>
+                  </a:glow>
+                </a:effectLst>
               </a:rPr>
               <a:t>내빈 소개</a:t>
             </a:r>
-            <a:endParaRPr lang="en-US" sz="3600" dirty="0"/>
-          </a:p>
-        </p:txBody>
-      </p:sp>
-      <p:sp>
-        <p:nvSpPr>
-          <p:cNvPr id="3" name="Guests caption"/>
-          <p:cNvSpPr txBox="1"/>
-          <p:nvPr/>
-        </p:nvSpPr>
-        <p:spPr>
-          <a:xfrm>
-            <a:off x="822960" y="1481328"/>
-            <a:ext cx="5486400" cy="320040"/>
+            <a:endParaRPr lang="en-US" sz="4000" dirty="0"/>
+          </a:p>
+        </p:txBody>
+      </p:sp>
+      <p:sp>
+        <p:nvSpPr>
+          <p:cNvPr id="3" name="Text 0"/>
+          <p:cNvSpPr/>
+          <p:nvPr>
+            <p:ph idx="101" type="body" hasCustomPrompt="1"/>
+          </p:nvPr>
+        </p:nvSpPr>
+        <p:spPr>
+          <a:xfrm>
+            <a:off x="868680" y="1572768"/>
+            <a:ext cx="8686800" cy="320040"/>
           </a:xfrm>
           <a:prstGeom prst="rect">
             <a:avLst/>
@@ -3798,24 +3786,21 @@
           <a:ln/>
         </p:spPr>
         <p:txBody>
-          <a:bodyPr wrap="square" lIns="0" tIns="0" rIns="0" bIns="0" rtlCol="0" anchor="ctr"/>
-          <a:lstStyle/>
-          <a:p>
-            <a:pPr indent="0" marL="0">
-              <a:buNone/>
-            </a:pPr>
-            <a:r>
-              <a:rPr lang="en-US" sz="1200" spc="600" kern="0" dirty="0">
+          <a:bodyPr wrap="square" lIns="0" tIns="0" rIns="0" bIns="0" rtlCol="0"/>
+          <a:lstStyle/>
+          <a:p>
+            <a:pPr algn="l" indent="0" marL="0">
+              <a:buNone/>
+            </a:pPr>
+            <a:r>
+              <a:rPr lang="en-US" sz="1100" spc="700" kern="0" dirty="0">
                 <a:solidFill>
                   <a:schemeClr val="accent1"/>
                 </a:solidFill>
-                <a:latin typeface="나눔명조" pitchFamily="34" charset="0"/>
-                <a:ea typeface="나눔명조" pitchFamily="34" charset="-122"/>
-                <a:cs typeface="나눔명조" pitchFamily="34" charset="-120"/>
               </a:rPr>
               <a:t>DISTINGUISHED GUESTS</a:t>
             </a:r>
-            <a:endParaRPr lang="en-US" sz="1200" dirty="0"/>
+            <a:endParaRPr lang="en-US" sz="1100" dirty="0"/>
           </a:p>
         </p:txBody>
       </p:sp>
@@ -3827,35 +3812,69 @@
         </p:nvSpPr>
         <p:spPr>
           <a:xfrm>
-            <a:off x="868680" y="2103120"/>
-            <a:ext cx="3337560" cy="1783080"/>
+            <a:off x="914400" y="2194560"/>
+            <a:ext cx="3291840" cy="1783080"/>
           </a:xfrm>
           <a:prstGeom prst="rect">
             <a:avLst/>
           </a:prstGeom>
           <a:solidFill>
             <a:schemeClr val="tx2">
-              <a:alpha val="65000"/>
+              <a:alpha val="75000"/>
             </a:schemeClr>
           </a:solidFill>
-          <a:ln w="9525">
+          <a:ln w="15875">
             <a:solidFill>
               <a:schemeClr val="accent1"/>
             </a:solidFill>
             <a:prstDash val="solid"/>
           </a:ln>
-        </p:spPr>
-      </p:sp>
-      <p:sp>
-        <p:nvSpPr>
-          <p:cNvPr id="5" name="Guest mark 1"/>
-          <p:cNvSpPr/>
-          <p:nvPr/>
-        </p:nvSpPr>
-        <p:spPr>
-          <a:xfrm>
-            <a:off x="2473452" y="2377440"/>
-            <a:ext cx="128016" cy="128016"/>
+          <a:effectLst>
+            <a:outerShdw sx="100000" sy="100000" kx="0" ky="0" algn="bl" rotWithShape="0" blurRad="127000" dist="38100" dir="5400000">
+              <a:srgbClr val="000000">
+                <a:alpha val="45000"/>
+              </a:srgbClr>
+            </a:outerShdw>
+          </a:effectLst>
+        </p:spPr>
+      </p:sp>
+      <p:sp>
+        <p:nvSpPr>
+          <p:cNvPr id="5" name="Guest inner 1"/>
+          <p:cNvSpPr/>
+          <p:nvPr/>
+        </p:nvSpPr>
+        <p:spPr>
+          <a:xfrm>
+            <a:off x="1005840" y="2286000"/>
+            <a:ext cx="3108960" cy="1600200"/>
+          </a:xfrm>
+          <a:prstGeom prst="rect">
+            <a:avLst/>
+          </a:prstGeom>
+          <a:solidFill>
+            <a:schemeClr val="tx2">
+              <a:alpha val="0"/>
+            </a:schemeClr>
+          </a:solidFill>
+          <a:ln w="6350">
+            <a:solidFill>
+              <a:schemeClr val="accent4"/>
+            </a:solidFill>
+            <a:prstDash val="solid"/>
+          </a:ln>
+        </p:spPr>
+      </p:sp>
+      <p:sp>
+        <p:nvSpPr>
+          <p:cNvPr id="6" name="Guest mark 1"/>
+          <p:cNvSpPr/>
+          <p:nvPr/>
+        </p:nvSpPr>
+        <p:spPr>
+          <a:xfrm>
+            <a:off x="2478024" y="2487168"/>
+            <a:ext cx="164592" cy="164592"/>
           </a:xfrm>
           <a:prstGeom prst="diamond">
             <a:avLst/>
@@ -3873,14 +3892,14 @@
       </p:sp>
       <p:sp>
         <p:nvSpPr>
-          <p:cNvPr id="6" name="Guest name 1"/>
+          <p:cNvPr id="7" name="Guest name 1"/>
           <p:cNvSpPr txBox="1"/>
           <p:nvPr/>
         </p:nvSpPr>
         <p:spPr>
           <a:xfrm>
-            <a:off x="868680" y="2651760"/>
-            <a:ext cx="3337560" cy="594360"/>
+            <a:off x="914400" y="2743200"/>
+            <a:ext cx="3291840" cy="640080"/>
           </a:xfrm>
           <a:prstGeom prst="rect">
             <a:avLst/>
@@ -3896,30 +3915,37 @@
               <a:buNone/>
             </a:pPr>
             <a:r>
-              <a:rPr lang="en-US" sz="2600" b="1" spc="400" kern="0" dirty="0">
-                <a:solidFill>
-                  <a:schemeClr val="bg1"/>
-                </a:solidFill>
+              <a:rPr lang="en-US" sz="2800" b="1" spc="600" kern="0" dirty="0">
+                <a:solidFill>
+                  <a:schemeClr val="accent2"/>
+                </a:solidFill>
+                <a:effectLst>
+                  <a:glow rad="63500">
+                    <a:srgbClr val="D4AF5F">
+                      <a:alpha val="30000"/>
+                    </a:srgbClr>
+                  </a:glow>
+                </a:effectLst>
                 <a:latin typeface="나눔명조" pitchFamily="34" charset="0"/>
                 <a:ea typeface="나눔명조" pitchFamily="34" charset="-122"/>
                 <a:cs typeface="나눔명조" pitchFamily="34" charset="-120"/>
               </a:rPr>
               <a:t>○○○</a:t>
             </a:r>
-            <a:endParaRPr lang="en-US" sz="2600" dirty="0"/>
-          </a:p>
-        </p:txBody>
-      </p:sp>
-      <p:sp>
-        <p:nvSpPr>
-          <p:cNvPr id="7" name="Guest role 1"/>
+            <a:endParaRPr lang="en-US" sz="2800" dirty="0"/>
+          </a:p>
+        </p:txBody>
+      </p:sp>
+      <p:sp>
+        <p:nvSpPr>
+          <p:cNvPr id="8" name="Guest role 1"/>
           <p:cNvSpPr txBox="1"/>
           <p:nvPr/>
         </p:nvSpPr>
         <p:spPr>
           <a:xfrm>
-            <a:off x="868680" y="3291840"/>
-            <a:ext cx="3337560" cy="365760"/>
+            <a:off x="914400" y="3401568"/>
+            <a:ext cx="3291840" cy="365760"/>
           </a:xfrm>
           <a:prstGeom prst="rect">
             <a:avLst/>
@@ -3937,7 +3963,7 @@
             <a:r>
               <a:rPr lang="en-US" sz="1400" dirty="0">
                 <a:solidFill>
-                  <a:schemeClr val="accent2"/>
+                  <a:schemeClr val="bg1"/>
                 </a:solidFill>
                 <a:latin typeface="맑은 고딕" pitchFamily="34" charset="0"/>
                 <a:ea typeface="맑은 고딕" pitchFamily="34" charset="-122"/>
@@ -3951,41 +3977,75 @@
       </p:sp>
       <p:sp>
         <p:nvSpPr>
-          <p:cNvPr id="8" name="Guest card 2"/>
-          <p:cNvSpPr/>
-          <p:nvPr/>
-        </p:nvSpPr>
-        <p:spPr>
-          <a:xfrm>
-            <a:off x="4480560" y="2103120"/>
-            <a:ext cx="3337560" cy="1783080"/>
+          <p:cNvPr id="9" name="Guest card 2"/>
+          <p:cNvSpPr/>
+          <p:nvPr/>
+        </p:nvSpPr>
+        <p:spPr>
+          <a:xfrm>
+            <a:off x="4480560" y="2194560"/>
+            <a:ext cx="3291840" cy="1783080"/>
           </a:xfrm>
           <a:prstGeom prst="rect">
             <a:avLst/>
           </a:prstGeom>
           <a:solidFill>
             <a:schemeClr val="tx2">
-              <a:alpha val="65000"/>
+              <a:alpha val="75000"/>
             </a:schemeClr>
           </a:solidFill>
-          <a:ln w="9525">
+          <a:ln w="15875">
             <a:solidFill>
               <a:schemeClr val="accent1"/>
             </a:solidFill>
             <a:prstDash val="solid"/>
           </a:ln>
-        </p:spPr>
-      </p:sp>
-      <p:sp>
-        <p:nvSpPr>
-          <p:cNvPr id="9" name="Guest mark 2"/>
-          <p:cNvSpPr/>
-          <p:nvPr/>
-        </p:nvSpPr>
-        <p:spPr>
-          <a:xfrm>
-            <a:off x="6085332" y="2377440"/>
-            <a:ext cx="128016" cy="128016"/>
+          <a:effectLst>
+            <a:outerShdw sx="100000" sy="100000" kx="0" ky="0" algn="bl" rotWithShape="0" blurRad="127000" dist="38100" dir="5400000">
+              <a:srgbClr val="000000">
+                <a:alpha val="45000"/>
+              </a:srgbClr>
+            </a:outerShdw>
+          </a:effectLst>
+        </p:spPr>
+      </p:sp>
+      <p:sp>
+        <p:nvSpPr>
+          <p:cNvPr id="10" name="Guest inner 2"/>
+          <p:cNvSpPr/>
+          <p:nvPr/>
+        </p:nvSpPr>
+        <p:spPr>
+          <a:xfrm>
+            <a:off x="4572000" y="2286000"/>
+            <a:ext cx="3108960" cy="1600200"/>
+          </a:xfrm>
+          <a:prstGeom prst="rect">
+            <a:avLst/>
+          </a:prstGeom>
+          <a:solidFill>
+            <a:schemeClr val="tx2">
+              <a:alpha val="0"/>
+            </a:schemeClr>
+          </a:solidFill>
+          <a:ln w="6350">
+            <a:solidFill>
+              <a:schemeClr val="accent4"/>
+            </a:solidFill>
+            <a:prstDash val="solid"/>
+          </a:ln>
+        </p:spPr>
+      </p:sp>
+      <p:sp>
+        <p:nvSpPr>
+          <p:cNvPr id="11" name="Guest mark 2"/>
+          <p:cNvSpPr/>
+          <p:nvPr/>
+        </p:nvSpPr>
+        <p:spPr>
+          <a:xfrm>
+            <a:off x="6044184" y="2487168"/>
+            <a:ext cx="164592" cy="164592"/>
           </a:xfrm>
           <a:prstGeom prst="diamond">
             <a:avLst/>
@@ -4003,14 +4063,14 @@
       </p:sp>
       <p:sp>
         <p:nvSpPr>
-          <p:cNvPr id="10" name="Guest name 2"/>
+          <p:cNvPr id="12" name="Guest name 2"/>
           <p:cNvSpPr txBox="1"/>
           <p:nvPr/>
         </p:nvSpPr>
         <p:spPr>
           <a:xfrm>
-            <a:off x="4480560" y="2651760"/>
-            <a:ext cx="3337560" cy="594360"/>
+            <a:off x="4480560" y="2743200"/>
+            <a:ext cx="3291840" cy="640080"/>
           </a:xfrm>
           <a:prstGeom prst="rect">
             <a:avLst/>
@@ -4026,30 +4086,37 @@
               <a:buNone/>
             </a:pPr>
             <a:r>
-              <a:rPr lang="en-US" sz="2600" b="1" spc="400" kern="0" dirty="0">
-                <a:solidFill>
-                  <a:schemeClr val="bg1"/>
-                </a:solidFill>
+              <a:rPr lang="en-US" sz="2800" b="1" spc="600" kern="0" dirty="0">
+                <a:solidFill>
+                  <a:schemeClr val="accent2"/>
+                </a:solidFill>
+                <a:effectLst>
+                  <a:glow rad="63500">
+                    <a:srgbClr val="D4AF5F">
+                      <a:alpha val="30000"/>
+                    </a:srgbClr>
+                  </a:glow>
+                </a:effectLst>
                 <a:latin typeface="나눔명조" pitchFamily="34" charset="0"/>
                 <a:ea typeface="나눔명조" pitchFamily="34" charset="-122"/>
                 <a:cs typeface="나눔명조" pitchFamily="34" charset="-120"/>
               </a:rPr>
               <a:t>○○○</a:t>
             </a:r>
-            <a:endParaRPr lang="en-US" sz="2600" dirty="0"/>
-          </a:p>
-        </p:txBody>
-      </p:sp>
-      <p:sp>
-        <p:nvSpPr>
-          <p:cNvPr id="11" name="Guest role 2"/>
+            <a:endParaRPr lang="en-US" sz="2800" dirty="0"/>
+          </a:p>
+        </p:txBody>
+      </p:sp>
+      <p:sp>
+        <p:nvSpPr>
+          <p:cNvPr id="13" name="Guest role 2"/>
           <p:cNvSpPr txBox="1"/>
           <p:nvPr/>
         </p:nvSpPr>
         <p:spPr>
           <a:xfrm>
-            <a:off x="4480560" y="3291840"/>
-            <a:ext cx="3337560" cy="365760"/>
+            <a:off x="4480560" y="3401568"/>
+            <a:ext cx="3291840" cy="365760"/>
           </a:xfrm>
           <a:prstGeom prst="rect">
             <a:avLst/>
@@ -4067,7 +4134,7 @@
             <a:r>
               <a:rPr lang="en-US" sz="1400" dirty="0">
                 <a:solidFill>
-                  <a:schemeClr val="accent2"/>
+                  <a:schemeClr val="bg1"/>
                 </a:solidFill>
                 <a:latin typeface="맑은 고딕" pitchFamily="34" charset="0"/>
                 <a:ea typeface="맑은 고딕" pitchFamily="34" charset="-122"/>
@@ -4081,41 +4148,75 @@
       </p:sp>
       <p:sp>
         <p:nvSpPr>
-          <p:cNvPr id="12" name="Guest card 3"/>
-          <p:cNvSpPr/>
-          <p:nvPr/>
-        </p:nvSpPr>
-        <p:spPr>
-          <a:xfrm>
-            <a:off x="8092440" y="2103120"/>
-            <a:ext cx="3337560" cy="1783080"/>
+          <p:cNvPr id="14" name="Guest card 3"/>
+          <p:cNvSpPr/>
+          <p:nvPr/>
+        </p:nvSpPr>
+        <p:spPr>
+          <a:xfrm>
+            <a:off x="8046720" y="2194560"/>
+            <a:ext cx="3291840" cy="1783080"/>
           </a:xfrm>
           <a:prstGeom prst="rect">
             <a:avLst/>
           </a:prstGeom>
           <a:solidFill>
             <a:schemeClr val="tx2">
-              <a:alpha val="65000"/>
+              <a:alpha val="75000"/>
             </a:schemeClr>
           </a:solidFill>
-          <a:ln w="9525">
+          <a:ln w="15875">
             <a:solidFill>
               <a:schemeClr val="accent1"/>
             </a:solidFill>
             <a:prstDash val="solid"/>
           </a:ln>
-        </p:spPr>
-      </p:sp>
-      <p:sp>
-        <p:nvSpPr>
-          <p:cNvPr id="13" name="Guest mark 3"/>
-          <p:cNvSpPr/>
-          <p:nvPr/>
-        </p:nvSpPr>
-        <p:spPr>
-          <a:xfrm>
-            <a:off x="9697212" y="2377440"/>
-            <a:ext cx="128016" cy="128016"/>
+          <a:effectLst>
+            <a:outerShdw sx="100000" sy="100000" kx="0" ky="0" algn="bl" rotWithShape="0" blurRad="127000" dist="38100" dir="5400000">
+              <a:srgbClr val="000000">
+                <a:alpha val="45000"/>
+              </a:srgbClr>
+            </a:outerShdw>
+          </a:effectLst>
+        </p:spPr>
+      </p:sp>
+      <p:sp>
+        <p:nvSpPr>
+          <p:cNvPr id="15" name="Guest inner 3"/>
+          <p:cNvSpPr/>
+          <p:nvPr/>
+        </p:nvSpPr>
+        <p:spPr>
+          <a:xfrm>
+            <a:off x="8138160" y="2286000"/>
+            <a:ext cx="3108960" cy="1600200"/>
+          </a:xfrm>
+          <a:prstGeom prst="rect">
+            <a:avLst/>
+          </a:prstGeom>
+          <a:solidFill>
+            <a:schemeClr val="tx2">
+              <a:alpha val="0"/>
+            </a:schemeClr>
+          </a:solidFill>
+          <a:ln w="6350">
+            <a:solidFill>
+              <a:schemeClr val="accent4"/>
+            </a:solidFill>
+            <a:prstDash val="solid"/>
+          </a:ln>
+        </p:spPr>
+      </p:sp>
+      <p:sp>
+        <p:nvSpPr>
+          <p:cNvPr id="16" name="Guest mark 3"/>
+          <p:cNvSpPr/>
+          <p:nvPr/>
+        </p:nvSpPr>
+        <p:spPr>
+          <a:xfrm>
+            <a:off x="9610344" y="2487168"/>
+            <a:ext cx="164592" cy="164592"/>
           </a:xfrm>
           <a:prstGeom prst="diamond">
             <a:avLst/>
@@ -4133,14 +4234,14 @@
       </p:sp>
       <p:sp>
         <p:nvSpPr>
-          <p:cNvPr id="14" name="Guest name 3"/>
+          <p:cNvPr id="17" name="Guest name 3"/>
           <p:cNvSpPr txBox="1"/>
           <p:nvPr/>
         </p:nvSpPr>
         <p:spPr>
           <a:xfrm>
-            <a:off x="8092440" y="2651760"/>
-            <a:ext cx="3337560" cy="594360"/>
+            <a:off x="8046720" y="2743200"/>
+            <a:ext cx="3291840" cy="640080"/>
           </a:xfrm>
           <a:prstGeom prst="rect">
             <a:avLst/>
@@ -4156,30 +4257,37 @@
               <a:buNone/>
             </a:pPr>
             <a:r>
-              <a:rPr lang="en-US" sz="2600" b="1" spc="400" kern="0" dirty="0">
-                <a:solidFill>
-                  <a:schemeClr val="bg1"/>
-                </a:solidFill>
+              <a:rPr lang="en-US" sz="2800" b="1" spc="600" kern="0" dirty="0">
+                <a:solidFill>
+                  <a:schemeClr val="accent2"/>
+                </a:solidFill>
+                <a:effectLst>
+                  <a:glow rad="63500">
+                    <a:srgbClr val="D4AF5F">
+                      <a:alpha val="30000"/>
+                    </a:srgbClr>
+                  </a:glow>
+                </a:effectLst>
                 <a:latin typeface="나눔명조" pitchFamily="34" charset="0"/>
                 <a:ea typeface="나눔명조" pitchFamily="34" charset="-122"/>
                 <a:cs typeface="나눔명조" pitchFamily="34" charset="-120"/>
               </a:rPr>
               <a:t>○○○</a:t>
             </a:r>
-            <a:endParaRPr lang="en-US" sz="2600" dirty="0"/>
-          </a:p>
-        </p:txBody>
-      </p:sp>
-      <p:sp>
-        <p:nvSpPr>
-          <p:cNvPr id="15" name="Guest role 3"/>
+            <a:endParaRPr lang="en-US" sz="2800" dirty="0"/>
+          </a:p>
+        </p:txBody>
+      </p:sp>
+      <p:sp>
+        <p:nvSpPr>
+          <p:cNvPr id="18" name="Guest role 3"/>
           <p:cNvSpPr txBox="1"/>
           <p:nvPr/>
         </p:nvSpPr>
         <p:spPr>
           <a:xfrm>
-            <a:off x="8092440" y="3291840"/>
-            <a:ext cx="3337560" cy="365760"/>
+            <a:off x="8046720" y="3401568"/>
+            <a:ext cx="3291840" cy="365760"/>
           </a:xfrm>
           <a:prstGeom prst="rect">
             <a:avLst/>
@@ -4197,7 +4305,7 @@
             <a:r>
               <a:rPr lang="en-US" sz="1400" dirty="0">
                 <a:solidFill>
-                  <a:schemeClr val="accent2"/>
+                  <a:schemeClr val="bg1"/>
                 </a:solidFill>
                 <a:latin typeface="맑은 고딕" pitchFamily="34" charset="0"/>
                 <a:ea typeface="맑은 고딕" pitchFamily="34" charset="-122"/>
@@ -4211,41 +4319,75 @@
       </p:sp>
       <p:sp>
         <p:nvSpPr>
-          <p:cNvPr id="16" name="Guest card 4"/>
-          <p:cNvSpPr/>
-          <p:nvPr/>
-        </p:nvSpPr>
-        <p:spPr>
-          <a:xfrm>
-            <a:off x="868680" y="4160520"/>
-            <a:ext cx="3337560" cy="1783080"/>
+          <p:cNvPr id="19" name="Guest card 4"/>
+          <p:cNvSpPr/>
+          <p:nvPr/>
+        </p:nvSpPr>
+        <p:spPr>
+          <a:xfrm>
+            <a:off x="914400" y="4251960"/>
+            <a:ext cx="3291840" cy="1783080"/>
           </a:xfrm>
           <a:prstGeom prst="rect">
             <a:avLst/>
           </a:prstGeom>
           <a:solidFill>
             <a:schemeClr val="tx2">
-              <a:alpha val="65000"/>
+              <a:alpha val="75000"/>
             </a:schemeClr>
           </a:solidFill>
-          <a:ln w="9525">
+          <a:ln w="15875">
             <a:solidFill>
               <a:schemeClr val="accent1"/>
             </a:solidFill>
             <a:prstDash val="solid"/>
           </a:ln>
-        </p:spPr>
-      </p:sp>
-      <p:sp>
-        <p:nvSpPr>
-          <p:cNvPr id="17" name="Guest mark 4"/>
-          <p:cNvSpPr/>
-          <p:nvPr/>
-        </p:nvSpPr>
-        <p:spPr>
-          <a:xfrm>
-            <a:off x="2473452" y="4434840"/>
-            <a:ext cx="128016" cy="128016"/>
+          <a:effectLst>
+            <a:outerShdw sx="100000" sy="100000" kx="0" ky="0" algn="bl" rotWithShape="0" blurRad="127000" dist="38100" dir="5400000">
+              <a:srgbClr val="000000">
+                <a:alpha val="45000"/>
+              </a:srgbClr>
+            </a:outerShdw>
+          </a:effectLst>
+        </p:spPr>
+      </p:sp>
+      <p:sp>
+        <p:nvSpPr>
+          <p:cNvPr id="20" name="Guest inner 4"/>
+          <p:cNvSpPr/>
+          <p:nvPr/>
+        </p:nvSpPr>
+        <p:spPr>
+          <a:xfrm>
+            <a:off x="1005840" y="4343400"/>
+            <a:ext cx="3108960" cy="1600200"/>
+          </a:xfrm>
+          <a:prstGeom prst="rect">
+            <a:avLst/>
+          </a:prstGeom>
+          <a:solidFill>
+            <a:schemeClr val="tx2">
+              <a:alpha val="0"/>
+            </a:schemeClr>
+          </a:solidFill>
+          <a:ln w="6350">
+            <a:solidFill>
+              <a:schemeClr val="accent4"/>
+            </a:solidFill>
+            <a:prstDash val="solid"/>
+          </a:ln>
+        </p:spPr>
+      </p:sp>
+      <p:sp>
+        <p:nvSpPr>
+          <p:cNvPr id="21" name="Guest mark 4"/>
+          <p:cNvSpPr/>
+          <p:nvPr/>
+        </p:nvSpPr>
+        <p:spPr>
+          <a:xfrm>
+            <a:off x="2478024" y="4544568"/>
+            <a:ext cx="164592" cy="164592"/>
           </a:xfrm>
           <a:prstGeom prst="diamond">
             <a:avLst/>
@@ -4263,14 +4405,14 @@
       </p:sp>
       <p:sp>
         <p:nvSpPr>
-          <p:cNvPr id="18" name="Guest name 4"/>
+          <p:cNvPr id="22" name="Guest name 4"/>
           <p:cNvSpPr txBox="1"/>
           <p:nvPr/>
         </p:nvSpPr>
         <p:spPr>
           <a:xfrm>
-            <a:off x="868680" y="4709160"/>
-            <a:ext cx="3337560" cy="594360"/>
+            <a:off x="914400" y="4800600"/>
+            <a:ext cx="3291840" cy="640080"/>
           </a:xfrm>
           <a:prstGeom prst="rect">
             <a:avLst/>
@@ -4286,30 +4428,37 @@
               <a:buNone/>
             </a:pPr>
             <a:r>
-              <a:rPr lang="en-US" sz="2600" b="1" spc="400" kern="0" dirty="0">
-                <a:solidFill>
-                  <a:schemeClr val="bg1"/>
-                </a:solidFill>
+              <a:rPr lang="en-US" sz="2800" b="1" spc="600" kern="0" dirty="0">
+                <a:solidFill>
+                  <a:schemeClr val="accent2"/>
+                </a:solidFill>
+                <a:effectLst>
+                  <a:glow rad="63500">
+                    <a:srgbClr val="D4AF5F">
+                      <a:alpha val="30000"/>
+                    </a:srgbClr>
+                  </a:glow>
+                </a:effectLst>
                 <a:latin typeface="나눔명조" pitchFamily="34" charset="0"/>
                 <a:ea typeface="나눔명조" pitchFamily="34" charset="-122"/>
                 <a:cs typeface="나눔명조" pitchFamily="34" charset="-120"/>
               </a:rPr>
               <a:t>○○○</a:t>
             </a:r>
-            <a:endParaRPr lang="en-US" sz="2600" dirty="0"/>
-          </a:p>
-        </p:txBody>
-      </p:sp>
-      <p:sp>
-        <p:nvSpPr>
-          <p:cNvPr id="19" name="Guest role 4"/>
+            <a:endParaRPr lang="en-US" sz="2800" dirty="0"/>
+          </a:p>
+        </p:txBody>
+      </p:sp>
+      <p:sp>
+        <p:nvSpPr>
+          <p:cNvPr id="23" name="Guest role 4"/>
           <p:cNvSpPr txBox="1"/>
           <p:nvPr/>
         </p:nvSpPr>
         <p:spPr>
           <a:xfrm>
-            <a:off x="868680" y="5349240"/>
-            <a:ext cx="3337560" cy="365760"/>
+            <a:off x="914400" y="5458968"/>
+            <a:ext cx="3291840" cy="365760"/>
           </a:xfrm>
           <a:prstGeom prst="rect">
             <a:avLst/>
@@ -4327,7 +4476,7 @@
             <a:r>
               <a:rPr lang="en-US" sz="1400" dirty="0">
                 <a:solidFill>
-                  <a:schemeClr val="accent2"/>
+                  <a:schemeClr val="bg1"/>
                 </a:solidFill>
                 <a:latin typeface="맑은 고딕" pitchFamily="34" charset="0"/>
                 <a:ea typeface="맑은 고딕" pitchFamily="34" charset="-122"/>
@@ -4341,41 +4490,75 @@
       </p:sp>
       <p:sp>
         <p:nvSpPr>
-          <p:cNvPr id="20" name="Guest card 5"/>
-          <p:cNvSpPr/>
-          <p:nvPr/>
-        </p:nvSpPr>
-        <p:spPr>
-          <a:xfrm>
-            <a:off x="4480560" y="4160520"/>
-            <a:ext cx="3337560" cy="1783080"/>
+          <p:cNvPr id="24" name="Guest card 5"/>
+          <p:cNvSpPr/>
+          <p:nvPr/>
+        </p:nvSpPr>
+        <p:spPr>
+          <a:xfrm>
+            <a:off x="4480560" y="4251960"/>
+            <a:ext cx="3291840" cy="1783080"/>
           </a:xfrm>
           <a:prstGeom prst="rect">
             <a:avLst/>
           </a:prstGeom>
           <a:solidFill>
             <a:schemeClr val="tx2">
-              <a:alpha val="65000"/>
+              <a:alpha val="75000"/>
             </a:schemeClr>
           </a:solidFill>
-          <a:ln w="9525">
+          <a:ln w="15875">
             <a:solidFill>
               <a:schemeClr val="accent1"/>
             </a:solidFill>
             <a:prstDash val="solid"/>
           </a:ln>
-        </p:spPr>
-      </p:sp>
-      <p:sp>
-        <p:nvSpPr>
-          <p:cNvPr id="21" name="Guest mark 5"/>
-          <p:cNvSpPr/>
-          <p:nvPr/>
-        </p:nvSpPr>
-        <p:spPr>
-          <a:xfrm>
-            <a:off x="6085332" y="4434840"/>
-            <a:ext cx="128016" cy="128016"/>
+          <a:effectLst>
+            <a:outerShdw sx="100000" sy="100000" kx="0" ky="0" algn="bl" rotWithShape="0" blurRad="127000" dist="38100" dir="5400000">
+              <a:srgbClr val="000000">
+                <a:alpha val="45000"/>
+              </a:srgbClr>
+            </a:outerShdw>
+          </a:effectLst>
+        </p:spPr>
+      </p:sp>
+      <p:sp>
+        <p:nvSpPr>
+          <p:cNvPr id="25" name="Guest inner 5"/>
+          <p:cNvSpPr/>
+          <p:nvPr/>
+        </p:nvSpPr>
+        <p:spPr>
+          <a:xfrm>
+            <a:off x="4572000" y="4343400"/>
+            <a:ext cx="3108960" cy="1600200"/>
+          </a:xfrm>
+          <a:prstGeom prst="rect">
+            <a:avLst/>
+          </a:prstGeom>
+          <a:solidFill>
+            <a:schemeClr val="tx2">
+              <a:alpha val="0"/>
+            </a:schemeClr>
+          </a:solidFill>
+          <a:ln w="6350">
+            <a:solidFill>
+              <a:schemeClr val="accent4"/>
+            </a:solidFill>
+            <a:prstDash val="solid"/>
+          </a:ln>
+        </p:spPr>
+      </p:sp>
+      <p:sp>
+        <p:nvSpPr>
+          <p:cNvPr id="26" name="Guest mark 5"/>
+          <p:cNvSpPr/>
+          <p:nvPr/>
+        </p:nvSpPr>
+        <p:spPr>
+          <a:xfrm>
+            <a:off x="6044184" y="4544568"/>
+            <a:ext cx="164592" cy="164592"/>
           </a:xfrm>
           <a:prstGeom prst="diamond">
             <a:avLst/>
@@ -4393,14 +4576,14 @@
       </p:sp>
       <p:sp>
         <p:nvSpPr>
-          <p:cNvPr id="22" name="Guest name 5"/>
+          <p:cNvPr id="27" name="Guest name 5"/>
           <p:cNvSpPr txBox="1"/>
           <p:nvPr/>
         </p:nvSpPr>
         <p:spPr>
           <a:xfrm>
-            <a:off x="4480560" y="4709160"/>
-            <a:ext cx="3337560" cy="594360"/>
+            <a:off x="4480560" y="4800600"/>
+            <a:ext cx="3291840" cy="640080"/>
           </a:xfrm>
           <a:prstGeom prst="rect">
             <a:avLst/>
@@ -4416,30 +4599,37 @@
               <a:buNone/>
             </a:pPr>
             <a:r>
-              <a:rPr lang="en-US" sz="2600" b="1" spc="400" kern="0" dirty="0">
-                <a:solidFill>
-                  <a:schemeClr val="bg1"/>
-                </a:solidFill>
+              <a:rPr lang="en-US" sz="2800" b="1" spc="600" kern="0" dirty="0">
+                <a:solidFill>
+                  <a:schemeClr val="accent2"/>
+                </a:solidFill>
+                <a:effectLst>
+                  <a:glow rad="63500">
+                    <a:srgbClr val="D4AF5F">
+                      <a:alpha val="30000"/>
+                    </a:srgbClr>
+                  </a:glow>
+                </a:effectLst>
                 <a:latin typeface="나눔명조" pitchFamily="34" charset="0"/>
                 <a:ea typeface="나눔명조" pitchFamily="34" charset="-122"/>
                 <a:cs typeface="나눔명조" pitchFamily="34" charset="-120"/>
               </a:rPr>
               <a:t>○○○</a:t>
             </a:r>
-            <a:endParaRPr lang="en-US" sz="2600" dirty="0"/>
-          </a:p>
-        </p:txBody>
-      </p:sp>
-      <p:sp>
-        <p:nvSpPr>
-          <p:cNvPr id="23" name="Guest role 5"/>
+            <a:endParaRPr lang="en-US" sz="2800" dirty="0"/>
+          </a:p>
+        </p:txBody>
+      </p:sp>
+      <p:sp>
+        <p:nvSpPr>
+          <p:cNvPr id="28" name="Guest role 5"/>
           <p:cNvSpPr txBox="1"/>
           <p:nvPr/>
         </p:nvSpPr>
         <p:spPr>
           <a:xfrm>
-            <a:off x="4480560" y="5349240"/>
-            <a:ext cx="3337560" cy="365760"/>
+            <a:off x="4480560" y="5458968"/>
+            <a:ext cx="3291840" cy="365760"/>
           </a:xfrm>
           <a:prstGeom prst="rect">
             <a:avLst/>
@@ -4457,7 +4647,7 @@
             <a:r>
               <a:rPr lang="en-US" sz="1400" dirty="0">
                 <a:solidFill>
-                  <a:schemeClr val="accent2"/>
+                  <a:schemeClr val="bg1"/>
                 </a:solidFill>
                 <a:latin typeface="맑은 고딕" pitchFamily="34" charset="0"/>
                 <a:ea typeface="맑은 고딕" pitchFamily="34" charset="-122"/>
@@ -4471,41 +4661,75 @@
       </p:sp>
       <p:sp>
         <p:nvSpPr>
-          <p:cNvPr id="24" name="Guest card 6"/>
-          <p:cNvSpPr/>
-          <p:nvPr/>
-        </p:nvSpPr>
-        <p:spPr>
-          <a:xfrm>
-            <a:off x="8092440" y="4160520"/>
-            <a:ext cx="3337560" cy="1783080"/>
+          <p:cNvPr id="29" name="Guest card 6"/>
+          <p:cNvSpPr/>
+          <p:nvPr/>
+        </p:nvSpPr>
+        <p:spPr>
+          <a:xfrm>
+            <a:off x="8046720" y="4251960"/>
+            <a:ext cx="3291840" cy="1783080"/>
           </a:xfrm>
           <a:prstGeom prst="rect">
             <a:avLst/>
           </a:prstGeom>
           <a:solidFill>
             <a:schemeClr val="tx2">
-              <a:alpha val="65000"/>
+              <a:alpha val="75000"/>
             </a:schemeClr>
           </a:solidFill>
-          <a:ln w="9525">
+          <a:ln w="15875">
             <a:solidFill>
               <a:schemeClr val="accent1"/>
             </a:solidFill>
             <a:prstDash val="solid"/>
           </a:ln>
-        </p:spPr>
-      </p:sp>
-      <p:sp>
-        <p:nvSpPr>
-          <p:cNvPr id="25" name="Guest mark 6"/>
-          <p:cNvSpPr/>
-          <p:nvPr/>
-        </p:nvSpPr>
-        <p:spPr>
-          <a:xfrm>
-            <a:off x="9697212" y="4434840"/>
-            <a:ext cx="128016" cy="128016"/>
+          <a:effectLst>
+            <a:outerShdw sx="100000" sy="100000" kx="0" ky="0" algn="bl" rotWithShape="0" blurRad="127000" dist="38100" dir="5400000">
+              <a:srgbClr val="000000">
+                <a:alpha val="45000"/>
+              </a:srgbClr>
+            </a:outerShdw>
+          </a:effectLst>
+        </p:spPr>
+      </p:sp>
+      <p:sp>
+        <p:nvSpPr>
+          <p:cNvPr id="30" name="Guest inner 6"/>
+          <p:cNvSpPr/>
+          <p:nvPr/>
+        </p:nvSpPr>
+        <p:spPr>
+          <a:xfrm>
+            <a:off x="8138160" y="4343400"/>
+            <a:ext cx="3108960" cy="1600200"/>
+          </a:xfrm>
+          <a:prstGeom prst="rect">
+            <a:avLst/>
+          </a:prstGeom>
+          <a:solidFill>
+            <a:schemeClr val="tx2">
+              <a:alpha val="0"/>
+            </a:schemeClr>
+          </a:solidFill>
+          <a:ln w="6350">
+            <a:solidFill>
+              <a:schemeClr val="accent4"/>
+            </a:solidFill>
+            <a:prstDash val="solid"/>
+          </a:ln>
+        </p:spPr>
+      </p:sp>
+      <p:sp>
+        <p:nvSpPr>
+          <p:cNvPr id="31" name="Guest mark 6"/>
+          <p:cNvSpPr/>
+          <p:nvPr/>
+        </p:nvSpPr>
+        <p:spPr>
+          <a:xfrm>
+            <a:off x="9610344" y="4544568"/>
+            <a:ext cx="164592" cy="164592"/>
           </a:xfrm>
           <a:prstGeom prst="diamond">
             <a:avLst/>
@@ -4523,14 +4747,14 @@
       </p:sp>
       <p:sp>
         <p:nvSpPr>
-          <p:cNvPr id="26" name="Guest name 6"/>
+          <p:cNvPr id="32" name="Guest name 6"/>
           <p:cNvSpPr txBox="1"/>
           <p:nvPr/>
         </p:nvSpPr>
         <p:spPr>
           <a:xfrm>
-            <a:off x="8092440" y="4709160"/>
-            <a:ext cx="3337560" cy="594360"/>
+            <a:off x="8046720" y="4800600"/>
+            <a:ext cx="3291840" cy="640080"/>
           </a:xfrm>
           <a:prstGeom prst="rect">
             <a:avLst/>
@@ -4546,30 +4770,37 @@
               <a:buNone/>
             </a:pPr>
             <a:r>
-              <a:rPr lang="en-US" sz="2600" b="1" spc="400" kern="0" dirty="0">
-                <a:solidFill>
-                  <a:schemeClr val="bg1"/>
-                </a:solidFill>
+              <a:rPr lang="en-US" sz="2800" b="1" spc="600" kern="0" dirty="0">
+                <a:solidFill>
+                  <a:schemeClr val="accent2"/>
+                </a:solidFill>
+                <a:effectLst>
+                  <a:glow rad="63500">
+                    <a:srgbClr val="D4AF5F">
+                      <a:alpha val="30000"/>
+                    </a:srgbClr>
+                  </a:glow>
+                </a:effectLst>
                 <a:latin typeface="나눔명조" pitchFamily="34" charset="0"/>
                 <a:ea typeface="나눔명조" pitchFamily="34" charset="-122"/>
                 <a:cs typeface="나눔명조" pitchFamily="34" charset="-120"/>
               </a:rPr>
               <a:t>○○○</a:t>
             </a:r>
-            <a:endParaRPr lang="en-US" sz="2600" dirty="0"/>
-          </a:p>
-        </p:txBody>
-      </p:sp>
-      <p:sp>
-        <p:nvSpPr>
-          <p:cNvPr id="27" name="Guest role 6"/>
+            <a:endParaRPr lang="en-US" sz="2800" dirty="0"/>
+          </a:p>
+        </p:txBody>
+      </p:sp>
+      <p:sp>
+        <p:nvSpPr>
+          <p:cNvPr id="33" name="Guest role 6"/>
           <p:cNvSpPr txBox="1"/>
           <p:nvPr/>
         </p:nvSpPr>
         <p:spPr>
           <a:xfrm>
-            <a:off x="8092440" y="5349240"/>
-            <a:ext cx="3337560" cy="365760"/>
+            <a:off x="8046720" y="5458968"/>
+            <a:ext cx="3291840" cy="365760"/>
           </a:xfrm>
           <a:prstGeom prst="rect">
             <a:avLst/>
@@ -4587,7 +4818,7 @@
             <a:r>
               <a:rPr lang="en-US" sz="1400" dirty="0">
                 <a:solidFill>
-                  <a:schemeClr val="accent2"/>
+                  <a:schemeClr val="bg1"/>
                 </a:solidFill>
                 <a:latin typeface="맑은 고딕" pitchFamily="34" charset="0"/>
                 <a:ea typeface="맑은 고딕" pitchFamily="34" charset="-122"/>
@@ -4634,7 +4865,90 @@
         </p:nvSpPr>
         <p:spPr>
           <a:xfrm>
-            <a:off x="1371600" y="1417320"/>
+            <a:off x="1371600" y="1965960"/>
+            <a:ext cx="9448495" cy="411480"/>
+          </a:xfrm>
+          <a:prstGeom prst="rect">
+            <a:avLst/>
+          </a:prstGeom>
+          <a:noFill/>
+          <a:ln/>
+        </p:spPr>
+        <p:txBody>
+          <a:bodyPr wrap="square" lIns="0" tIns="0" rIns="0" bIns="0" rtlCol="0"/>
+          <a:lstStyle/>
+          <a:p>
+            <a:pPr algn="ctr" indent="0" marL="0">
+              <a:buNone/>
+            </a:pPr>
+            <a:r>
+              <a:rPr lang="en-US" sz="1700" spc="1000" kern="0" dirty="0">
+                <a:solidFill>
+                  <a:schemeClr val="accent2"/>
+                </a:solidFill>
+              </a:rPr>
+              <a:t>THANK YOU</a:t>
+            </a:r>
+            <a:endParaRPr lang="en-US" sz="1700" dirty="0"/>
+          </a:p>
+        </p:txBody>
+      </p:sp>
+      <p:sp>
+        <p:nvSpPr>
+          <p:cNvPr id="3" name="Text 0"/>
+          <p:cNvSpPr/>
+          <p:nvPr>
+            <p:ph idx="101" type="title" hasCustomPrompt="1"/>
+          </p:nvPr>
+        </p:nvSpPr>
+        <p:spPr>
+          <a:xfrm>
+            <a:off x="731520" y="2514600"/>
+            <a:ext cx="10728655" cy="1417320"/>
+          </a:xfrm>
+          <a:prstGeom prst="rect">
+            <a:avLst/>
+          </a:prstGeom>
+          <a:noFill/>
+          <a:ln/>
+        </p:spPr>
+        <p:txBody>
+          <a:bodyPr wrap="square" lIns="0" tIns="0" rIns="0" bIns="0" rtlCol="0"/>
+          <a:lstStyle/>
+          <a:p>
+            <a:pPr algn="ctr" indent="0" marL="0">
+              <a:buNone/>
+            </a:pPr>
+            <a:r>
+              <a:rPr lang="en-US" sz="5800" b="1" spc="400" kern="0" dirty="0">
+                <a:solidFill>
+                  <a:schemeClr val="accent2"/>
+                </a:solidFill>
+                <a:effectLst>
+                  <a:glow rad="63500">
+                    <a:srgbClr val="D4AF5F">
+                      <a:alpha val="35000"/>
+                    </a:srgbClr>
+                  </a:glow>
+                </a:effectLst>
+              </a:rPr>
+              <a:t>감사합니다</a:t>
+            </a:r>
+            <a:endParaRPr lang="en-US" sz="5800" dirty="0"/>
+          </a:p>
+        </p:txBody>
+      </p:sp>
+      <p:sp>
+        <p:nvSpPr>
+          <p:cNvPr id="4" name="Text 0"/>
+          <p:cNvSpPr/>
+          <p:nvPr>
+            <p:ph idx="102" type="body" hasCustomPrompt="1"/>
+          </p:nvPr>
+        </p:nvSpPr>
+        <p:spPr>
+          <a:xfrm>
+            <a:off x="1371600" y="4160520"/>
             <a:ext cx="9448495" cy="457200"/>
           </a:xfrm>
           <a:prstGeom prst="rect">
@@ -4651,29 +4965,29 @@
               <a:buNone/>
             </a:pPr>
             <a:r>
-              <a:rPr lang="en-US" sz="1800" spc="800" kern="0" dirty="0">
-                <a:solidFill>
-                  <a:schemeClr val="accent1"/>
-                </a:solidFill>
-              </a:rPr>
-              <a:t>THANK YOU</a:t>
-            </a:r>
-            <a:endParaRPr lang="en-US" sz="1800" dirty="0"/>
-          </a:p>
-        </p:txBody>
-      </p:sp>
-      <p:sp>
-        <p:nvSpPr>
-          <p:cNvPr id="3" name="Text 0"/>
-          <p:cNvSpPr/>
-          <p:nvPr>
-            <p:ph idx="101" type="title" hasCustomPrompt="1"/>
-          </p:nvPr>
-        </p:nvSpPr>
-        <p:spPr>
-          <a:xfrm>
-            <a:off x="914400" y="2240280"/>
-            <a:ext cx="10362895" cy="1463040"/>
+              <a:rPr lang="en-US" sz="1900" dirty="0">
+                <a:solidFill>
+                  <a:schemeClr val="bg1"/>
+                </a:solidFill>
+              </a:rPr>
+              <a:t>함께해 주신 내빈 여러분께 깊이 감사드립니다</a:t>
+            </a:r>
+            <a:endParaRPr lang="en-US" sz="1900" dirty="0"/>
+          </a:p>
+        </p:txBody>
+      </p:sp>
+      <p:sp>
+        <p:nvSpPr>
+          <p:cNvPr id="5" name="Text 0"/>
+          <p:cNvSpPr/>
+          <p:nvPr>
+            <p:ph idx="103" type="body" hasCustomPrompt="1"/>
+          </p:nvPr>
+        </p:nvSpPr>
+        <p:spPr>
+          <a:xfrm>
+            <a:off x="1371600" y="4617720"/>
+            <a:ext cx="9448495" cy="365760"/>
           </a:xfrm>
           <a:prstGeom prst="rect">
             <a:avLst/>
@@ -4689,111 +5003,27 @@
               <a:buNone/>
             </a:pPr>
             <a:r>
-              <a:rPr lang="en-US" sz="5400" b="1" dirty="0">
-                <a:solidFill>
-                  <a:schemeClr val="bg1"/>
-                </a:solidFill>
-              </a:rPr>
-              <a:t>감사합니다</a:t>
-            </a:r>
-            <a:endParaRPr lang="en-US" sz="5400" dirty="0"/>
-          </a:p>
-        </p:txBody>
-      </p:sp>
-      <p:sp>
-        <p:nvSpPr>
-          <p:cNvPr id="4" name="Text 0"/>
-          <p:cNvSpPr/>
-          <p:nvPr>
-            <p:ph idx="102" type="body" hasCustomPrompt="1"/>
-          </p:nvPr>
-        </p:nvSpPr>
-        <p:spPr>
-          <a:xfrm>
-            <a:off x="1371600" y="4160520"/>
-            <a:ext cx="9448495" cy="502920"/>
-          </a:xfrm>
-          <a:prstGeom prst="rect">
-            <a:avLst/>
-          </a:prstGeom>
-          <a:noFill/>
-          <a:ln/>
-        </p:spPr>
-        <p:txBody>
-          <a:bodyPr wrap="square" lIns="0" tIns="0" rIns="0" bIns="0" rtlCol="0"/>
-          <a:lstStyle/>
-          <a:p>
-            <a:pPr algn="ctr" indent="0" marL="0">
-              <a:buNone/>
-            </a:pPr>
-            <a:r>
-              <a:rPr lang="en-US" sz="2000" dirty="0">
-                <a:solidFill>
-                  <a:schemeClr val="accent2"/>
-                </a:solidFill>
-              </a:rPr>
-              <a:t>함께해 주신 내빈 여러분께 깊이 감사드립니다</a:t>
-            </a:r>
-            <a:endParaRPr lang="en-US" sz="2000" dirty="0"/>
-          </a:p>
-        </p:txBody>
-      </p:sp>
-      <p:sp>
-        <p:nvSpPr>
-          <p:cNvPr id="5" name="Top line L"/>
-          <p:cNvSpPr/>
-          <p:nvPr/>
-        </p:nvSpPr>
-        <p:spPr>
-          <a:xfrm>
-            <a:off x="4632808" y="2057400"/>
-            <a:ext cx="1316736" cy="0"/>
-          </a:xfrm>
-          <a:prstGeom prst="line">
-            <a:avLst/>
-          </a:prstGeom>
-          <a:noFill/>
-          <a:ln w="12700">
-            <a:solidFill>
-              <a:schemeClr val="accent1"/>
-            </a:solidFill>
-            <a:prstDash val="solid"/>
-          </a:ln>
-        </p:spPr>
-      </p:sp>
-      <p:sp>
-        <p:nvSpPr>
-          <p:cNvPr id="6" name="Top line R"/>
-          <p:cNvSpPr/>
-          <p:nvPr/>
-        </p:nvSpPr>
-        <p:spPr>
-          <a:xfrm>
-            <a:off x="6242152" y="2057400"/>
-            <a:ext cx="1316736" cy="0"/>
-          </a:xfrm>
-          <a:prstGeom prst="line">
-            <a:avLst/>
-          </a:prstGeom>
-          <a:noFill/>
-          <a:ln w="12700">
-            <a:solidFill>
-              <a:schemeClr val="accent1"/>
-            </a:solidFill>
-            <a:prstDash val="solid"/>
-          </a:ln>
-        </p:spPr>
-      </p:sp>
-      <p:sp>
-        <p:nvSpPr>
-          <p:cNvPr id="7" name="Top diamond"/>
-          <p:cNvSpPr/>
-          <p:nvPr/>
-        </p:nvSpPr>
-        <p:spPr>
-          <a:xfrm>
-            <a:off x="6040984" y="2002536"/>
-            <a:ext cx="109728" cy="109728"/>
+              <a:rPr lang="en-US" sz="1400" spc="300" kern="0" dirty="0">
+                <a:solidFill>
+                  <a:schemeClr val="accent3"/>
+                </a:solidFill>
+              </a:rPr>
+              <a:t>만찬은 2층 연회장에서 이어집니다</a:t>
+            </a:r>
+            <a:endParaRPr lang="en-US" sz="1400" dirty="0"/>
+          </a:p>
+        </p:txBody>
+      </p:sp>
+      <p:sp>
+        <p:nvSpPr>
+          <p:cNvPr id="6" name="Eyebrow diamond -1"/>
+          <p:cNvSpPr/>
+          <p:nvPr/>
+        </p:nvSpPr>
+        <p:spPr>
+          <a:xfrm>
+            <a:off x="3837280" y="2103120"/>
+            <a:ext cx="128016" cy="128016"/>
           </a:xfrm>
           <a:prstGeom prst="diamond">
             <a:avLst/>
@@ -4811,20 +5041,20 @@
       </p:sp>
       <p:sp>
         <p:nvSpPr>
-          <p:cNvPr id="8" name="Bottom line L"/>
-          <p:cNvSpPr/>
-          <p:nvPr/>
-        </p:nvSpPr>
-        <p:spPr>
-          <a:xfrm>
-            <a:off x="4632808" y="4937760"/>
-            <a:ext cx="1316736" cy="0"/>
+          <p:cNvPr id="7" name="Eyebrow line -1"/>
+          <p:cNvSpPr/>
+          <p:nvPr/>
+        </p:nvSpPr>
+        <p:spPr>
+          <a:xfrm>
+            <a:off x="3992728" y="2167128"/>
+            <a:ext cx="731520" cy="0"/>
           </a:xfrm>
           <a:prstGeom prst="line">
             <a:avLst/>
           </a:prstGeom>
           <a:noFill/>
-          <a:ln w="12700">
+          <a:ln w="9525">
             <a:solidFill>
               <a:schemeClr val="accent1"/>
             </a:solidFill>
@@ -4834,37 +5064,14 @@
       </p:sp>
       <p:sp>
         <p:nvSpPr>
-          <p:cNvPr id="9" name="Bottom line R"/>
-          <p:cNvSpPr/>
-          <p:nvPr/>
-        </p:nvSpPr>
-        <p:spPr>
-          <a:xfrm>
-            <a:off x="6242152" y="4937760"/>
-            <a:ext cx="1316736" cy="0"/>
-          </a:xfrm>
-          <a:prstGeom prst="line">
-            <a:avLst/>
-          </a:prstGeom>
-          <a:noFill/>
-          <a:ln w="12700">
-            <a:solidFill>
-              <a:schemeClr val="accent1"/>
-            </a:solidFill>
-            <a:prstDash val="solid"/>
-          </a:ln>
-        </p:spPr>
-      </p:sp>
-      <p:sp>
-        <p:nvSpPr>
-          <p:cNvPr id="10" name="Bottom diamond"/>
-          <p:cNvSpPr/>
-          <p:nvPr/>
-        </p:nvSpPr>
-        <p:spPr>
-          <a:xfrm>
-            <a:off x="6040984" y="4882896"/>
-            <a:ext cx="109728" cy="109728"/>
+          <p:cNvPr id="8" name="Eyebrow diamond 1"/>
+          <p:cNvSpPr/>
+          <p:nvPr/>
+        </p:nvSpPr>
+        <p:spPr>
+          <a:xfrm>
+            <a:off x="8226400" y="2103120"/>
+            <a:ext cx="128016" cy="128016"/>
           </a:xfrm>
           <a:prstGeom prst="diamond">
             <a:avLst/>
@@ -4873,6 +5080,29 @@
             <a:schemeClr val="accent1"/>
           </a:solidFill>
           <a:ln w="12700">
+            <a:solidFill>
+              <a:schemeClr val="accent1"/>
+            </a:solidFill>
+            <a:prstDash val="solid"/>
+          </a:ln>
+        </p:spPr>
+      </p:sp>
+      <p:sp>
+        <p:nvSpPr>
+          <p:cNvPr id="9" name="Eyebrow line 1"/>
+          <p:cNvSpPr/>
+          <p:nvPr/>
+        </p:nvSpPr>
+        <p:spPr>
+          <a:xfrm>
+            <a:off x="7467448" y="2167128"/>
+            <a:ext cx="731520" cy="0"/>
+          </a:xfrm>
+          <a:prstGeom prst="line">
+            <a:avLst/>
+          </a:prstGeom>
+          <a:noFill/>
+          <a:ln w="9525">
             <a:solidFill>
               <a:schemeClr val="accent1"/>
             </a:solidFill>
@@ -4915,7 +5145,90 @@
         </p:nvSpPr>
         <p:spPr>
           <a:xfrm>
-            <a:off x="1371600" y="1417320"/>
+            <a:off x="1371600" y="1965960"/>
+            <a:ext cx="9448495" cy="411480"/>
+          </a:xfrm>
+          <a:prstGeom prst="rect">
+            <a:avLst/>
+          </a:prstGeom>
+          <a:noFill/>
+          <a:ln/>
+        </p:spPr>
+        <p:txBody>
+          <a:bodyPr wrap="square" lIns="0" tIns="0" rIns="0" bIns="0" rtlCol="0"/>
+          <a:lstStyle/>
+          <a:p>
+            <a:pPr algn="ctr" indent="0" marL="0">
+              <a:buNone/>
+            </a:pPr>
+            <a:r>
+              <a:rPr lang="en-US" sz="1700" spc="1000" kern="0" dirty="0">
+                <a:solidFill>
+                  <a:schemeClr val="accent2"/>
+                </a:solidFill>
+              </a:rPr>
+              <a:t>WELCOME</a:t>
+            </a:r>
+            <a:endParaRPr lang="en-US" sz="1700" dirty="0"/>
+          </a:p>
+        </p:txBody>
+      </p:sp>
+      <p:sp>
+        <p:nvSpPr>
+          <p:cNvPr id="3" name="Text 0"/>
+          <p:cNvSpPr/>
+          <p:nvPr>
+            <p:ph idx="101" type="title" hasCustomPrompt="1"/>
+          </p:nvPr>
+        </p:nvSpPr>
+        <p:spPr>
+          <a:xfrm>
+            <a:off x="731520" y="2514600"/>
+            <a:ext cx="10728655" cy="1417320"/>
+          </a:xfrm>
+          <a:prstGeom prst="rect">
+            <a:avLst/>
+          </a:prstGeom>
+          <a:noFill/>
+          <a:ln/>
+        </p:spPr>
+        <p:txBody>
+          <a:bodyPr wrap="square" lIns="0" tIns="0" rIns="0" bIns="0" rtlCol="0"/>
+          <a:lstStyle/>
+          <a:p>
+            <a:pPr algn="ctr" indent="0" marL="0">
+              <a:buNone/>
+            </a:pPr>
+            <a:r>
+              <a:rPr lang="en-US" sz="5800" b="1" spc="400" kern="0" dirty="0">
+                <a:solidFill>
+                  <a:schemeClr val="accent2"/>
+                </a:solidFill>
+                <a:effectLst>
+                  <a:glow rad="63500">
+                    <a:srgbClr val="D4AF5F">
+                      <a:alpha val="35000"/>
+                    </a:srgbClr>
+                  </a:glow>
+                </a:effectLst>
+              </a:rPr>
+              <a:t>잠시 후 행사가 시작됩니다</a:t>
+            </a:r>
+            <a:endParaRPr lang="en-US" sz="5800" dirty="0"/>
+          </a:p>
+        </p:txBody>
+      </p:sp>
+      <p:sp>
+        <p:nvSpPr>
+          <p:cNvPr id="4" name="Text 0"/>
+          <p:cNvSpPr/>
+          <p:nvPr>
+            <p:ph idx="102" type="body" hasCustomPrompt="1"/>
+          </p:nvPr>
+        </p:nvSpPr>
+        <p:spPr>
+          <a:xfrm>
+            <a:off x="1371600" y="4160520"/>
             <a:ext cx="9448495" cy="457200"/>
           </a:xfrm>
           <a:prstGeom prst="rect">
@@ -4932,29 +5245,29 @@
               <a:buNone/>
             </a:pPr>
             <a:r>
-              <a:rPr lang="en-US" sz="1800" spc="800" kern="0" dirty="0">
-                <a:solidFill>
-                  <a:schemeClr val="accent1"/>
-                </a:solidFill>
-              </a:rPr>
-              <a:t>WELCOME</a:t>
-            </a:r>
-            <a:endParaRPr lang="en-US" sz="1800" dirty="0"/>
-          </a:p>
-        </p:txBody>
-      </p:sp>
-      <p:sp>
-        <p:nvSpPr>
-          <p:cNvPr id="3" name="Text 0"/>
-          <p:cNvSpPr/>
-          <p:nvPr>
-            <p:ph idx="101" type="title" hasCustomPrompt="1"/>
-          </p:nvPr>
-        </p:nvSpPr>
-        <p:spPr>
-          <a:xfrm>
-            <a:off x="914400" y="2240280"/>
-            <a:ext cx="10362895" cy="1463040"/>
+              <a:rPr lang="en-US" sz="1900" dirty="0">
+                <a:solidFill>
+                  <a:schemeClr val="bg1"/>
+                </a:solidFill>
+              </a:rPr>
+              <a:t>내빈 여러분께서는 자리에 착석해 주시기 바랍니다</a:t>
+            </a:r>
+            <a:endParaRPr lang="en-US" sz="1900" dirty="0"/>
+          </a:p>
+        </p:txBody>
+      </p:sp>
+      <p:sp>
+        <p:nvSpPr>
+          <p:cNvPr id="5" name="Text 0"/>
+          <p:cNvSpPr/>
+          <p:nvPr>
+            <p:ph idx="103" type="body" hasCustomPrompt="1"/>
+          </p:nvPr>
+        </p:nvSpPr>
+        <p:spPr>
+          <a:xfrm>
+            <a:off x="1371600" y="4617720"/>
+            <a:ext cx="9448495" cy="365760"/>
           </a:xfrm>
           <a:prstGeom prst="rect">
             <a:avLst/>
@@ -4970,111 +5283,27 @@
               <a:buNone/>
             </a:pPr>
             <a:r>
-              <a:rPr lang="en-US" sz="5400" b="1" dirty="0">
-                <a:solidFill>
-                  <a:schemeClr val="bg1"/>
-                </a:solidFill>
-              </a:rPr>
-              <a:t>잠시 후 행사가 시작됩니다</a:t>
-            </a:r>
-            <a:endParaRPr lang="en-US" sz="5400" dirty="0"/>
-          </a:p>
-        </p:txBody>
-      </p:sp>
-      <p:sp>
-        <p:nvSpPr>
-          <p:cNvPr id="4" name="Text 0"/>
-          <p:cNvSpPr/>
-          <p:nvPr>
-            <p:ph idx="102" type="body" hasCustomPrompt="1"/>
-          </p:nvPr>
-        </p:nvSpPr>
-        <p:spPr>
-          <a:xfrm>
-            <a:off x="1371600" y="4160520"/>
-            <a:ext cx="9448495" cy="502920"/>
-          </a:xfrm>
-          <a:prstGeom prst="rect">
-            <a:avLst/>
-          </a:prstGeom>
-          <a:noFill/>
-          <a:ln/>
-        </p:spPr>
-        <p:txBody>
-          <a:bodyPr wrap="square" lIns="0" tIns="0" rIns="0" bIns="0" rtlCol="0"/>
-          <a:lstStyle/>
-          <a:p>
-            <a:pPr algn="ctr" indent="0" marL="0">
-              <a:buNone/>
-            </a:pPr>
-            <a:r>
-              <a:rPr lang="en-US" sz="2000" dirty="0">
-                <a:solidFill>
-                  <a:schemeClr val="accent2"/>
-                </a:solidFill>
-              </a:rPr>
-              <a:t>내빈 여러분께서는 자리에 착석해 주시기 바랍니다</a:t>
-            </a:r>
-            <a:endParaRPr lang="en-US" sz="2000" dirty="0"/>
-          </a:p>
-        </p:txBody>
-      </p:sp>
-      <p:sp>
-        <p:nvSpPr>
-          <p:cNvPr id="5" name="Top line L"/>
-          <p:cNvSpPr/>
-          <p:nvPr/>
-        </p:nvSpPr>
-        <p:spPr>
-          <a:xfrm>
-            <a:off x="4632808" y="2057400"/>
-            <a:ext cx="1316736" cy="0"/>
-          </a:xfrm>
-          <a:prstGeom prst="line">
-            <a:avLst/>
-          </a:prstGeom>
-          <a:noFill/>
-          <a:ln w="12700">
-            <a:solidFill>
-              <a:schemeClr val="accent1"/>
-            </a:solidFill>
-            <a:prstDash val="solid"/>
-          </a:ln>
-        </p:spPr>
-      </p:sp>
-      <p:sp>
-        <p:nvSpPr>
-          <p:cNvPr id="6" name="Top line R"/>
-          <p:cNvSpPr/>
-          <p:nvPr/>
-        </p:nvSpPr>
-        <p:spPr>
-          <a:xfrm>
-            <a:off x="6242152" y="2057400"/>
-            <a:ext cx="1316736" cy="0"/>
-          </a:xfrm>
-          <a:prstGeom prst="line">
-            <a:avLst/>
-          </a:prstGeom>
-          <a:noFill/>
-          <a:ln w="12700">
-            <a:solidFill>
-              <a:schemeClr val="accent1"/>
-            </a:solidFill>
-            <a:prstDash val="solid"/>
-          </a:ln>
-        </p:spPr>
-      </p:sp>
-      <p:sp>
-        <p:nvSpPr>
-          <p:cNvPr id="7" name="Top diamond"/>
-          <p:cNvSpPr/>
-          <p:nvPr/>
-        </p:nvSpPr>
-        <p:spPr>
-          <a:xfrm>
-            <a:off x="6040984" y="2002536"/>
-            <a:ext cx="109728" cy="109728"/>
+              <a:rPr lang="en-US" sz="1400" spc="300" kern="0" dirty="0">
+                <a:solidFill>
+                  <a:schemeClr val="accent3"/>
+                </a:solidFill>
+              </a:rPr>
+              <a:t>휴대전화는 진동으로 전환해 주시면 감사하겠습니다</a:t>
+            </a:r>
+            <a:endParaRPr lang="en-US" sz="1400" dirty="0"/>
+          </a:p>
+        </p:txBody>
+      </p:sp>
+      <p:sp>
+        <p:nvSpPr>
+          <p:cNvPr id="6" name="Eyebrow diamond -1"/>
+          <p:cNvSpPr/>
+          <p:nvPr/>
+        </p:nvSpPr>
+        <p:spPr>
+          <a:xfrm>
+            <a:off x="4020160" y="2103120"/>
+            <a:ext cx="128016" cy="128016"/>
           </a:xfrm>
           <a:prstGeom prst="diamond">
             <a:avLst/>
@@ -5092,20 +5321,20 @@
       </p:sp>
       <p:sp>
         <p:nvSpPr>
-          <p:cNvPr id="8" name="Bottom line L"/>
-          <p:cNvSpPr/>
-          <p:nvPr/>
-        </p:nvSpPr>
-        <p:spPr>
-          <a:xfrm>
-            <a:off x="4632808" y="4937760"/>
-            <a:ext cx="1316736" cy="0"/>
+          <p:cNvPr id="7" name="Eyebrow line -1"/>
+          <p:cNvSpPr/>
+          <p:nvPr/>
+        </p:nvSpPr>
+        <p:spPr>
+          <a:xfrm>
+            <a:off x="4175608" y="2167128"/>
+            <a:ext cx="731520" cy="0"/>
           </a:xfrm>
           <a:prstGeom prst="line">
             <a:avLst/>
           </a:prstGeom>
           <a:noFill/>
-          <a:ln w="12700">
+          <a:ln w="9525">
             <a:solidFill>
               <a:schemeClr val="accent1"/>
             </a:solidFill>
@@ -5115,37 +5344,14 @@
       </p:sp>
       <p:sp>
         <p:nvSpPr>
-          <p:cNvPr id="9" name="Bottom line R"/>
-          <p:cNvSpPr/>
-          <p:nvPr/>
-        </p:nvSpPr>
-        <p:spPr>
-          <a:xfrm>
-            <a:off x="6242152" y="4937760"/>
-            <a:ext cx="1316736" cy="0"/>
-          </a:xfrm>
-          <a:prstGeom prst="line">
-            <a:avLst/>
-          </a:prstGeom>
-          <a:noFill/>
-          <a:ln w="12700">
-            <a:solidFill>
-              <a:schemeClr val="accent1"/>
-            </a:solidFill>
-            <a:prstDash val="solid"/>
-          </a:ln>
-        </p:spPr>
-      </p:sp>
-      <p:sp>
-        <p:nvSpPr>
-          <p:cNvPr id="10" name="Bottom diamond"/>
-          <p:cNvSpPr/>
-          <p:nvPr/>
-        </p:nvSpPr>
-        <p:spPr>
-          <a:xfrm>
-            <a:off x="6040984" y="4882896"/>
-            <a:ext cx="109728" cy="109728"/>
+          <p:cNvPr id="8" name="Eyebrow diamond 1"/>
+          <p:cNvSpPr/>
+          <p:nvPr/>
+        </p:nvSpPr>
+        <p:spPr>
+          <a:xfrm>
+            <a:off x="8043520" y="2103120"/>
+            <a:ext cx="128016" cy="128016"/>
           </a:xfrm>
           <a:prstGeom prst="diamond">
             <a:avLst/>
@@ -5154,6 +5360,29 @@
             <a:schemeClr val="accent1"/>
           </a:solidFill>
           <a:ln w="12700">
+            <a:solidFill>
+              <a:schemeClr val="accent1"/>
+            </a:solidFill>
+            <a:prstDash val="solid"/>
+          </a:ln>
+        </p:spPr>
+      </p:sp>
+      <p:sp>
+        <p:nvSpPr>
+          <p:cNvPr id="9" name="Eyebrow line 1"/>
+          <p:cNvSpPr/>
+          <p:nvPr/>
+        </p:nvSpPr>
+        <p:spPr>
+          <a:xfrm>
+            <a:off x="7284568" y="2167128"/>
+            <a:ext cx="731520" cy="0"/>
+          </a:xfrm>
+          <a:prstGeom prst="line">
+            <a:avLst/>
+          </a:prstGeom>
+          <a:noFill/>
+          <a:ln w="9525">
             <a:solidFill>
               <a:schemeClr val="accent1"/>
             </a:solidFill>
@@ -5196,8 +5425,8 @@
         </p:nvSpPr>
         <p:spPr>
           <a:xfrm>
-            <a:off x="822960" y="685800"/>
-            <a:ext cx="10545775" cy="822960"/>
+            <a:off x="868680" y="731520"/>
+            <a:ext cx="8686800" cy="868680"/>
           </a:xfrm>
           <a:prstGeom prst="rect">
             <a:avLst/>
@@ -5213,27 +5442,36 @@
               <a:buNone/>
             </a:pPr>
             <a:r>
-              <a:rPr lang="en-US" sz="3600" b="1" dirty="0">
-                <a:solidFill>
-                  <a:schemeClr val="bg1"/>
-                </a:solidFill>
+              <a:rPr lang="en-US" sz="4000" b="1" spc="600" kern="0" dirty="0">
+                <a:solidFill>
+                  <a:schemeClr val="accent2"/>
+                </a:solidFill>
+                <a:effectLst>
+                  <a:glow rad="63500">
+                    <a:srgbClr val="D4AF5F">
+                      <a:alpha val="30000"/>
+                    </a:srgbClr>
+                  </a:glow>
+                </a:effectLst>
               </a:rPr>
               <a:t>식  순</a:t>
             </a:r>
-            <a:endParaRPr lang="en-US" sz="3600" dirty="0"/>
-          </a:p>
-        </p:txBody>
-      </p:sp>
-      <p:sp>
-        <p:nvSpPr>
-          <p:cNvPr id="3" name="Programme caption"/>
-          <p:cNvSpPr txBox="1"/>
-          <p:nvPr/>
-        </p:nvSpPr>
-        <p:spPr>
-          <a:xfrm>
-            <a:off x="822960" y="1481328"/>
-            <a:ext cx="5486400" cy="320040"/>
+            <a:endParaRPr lang="en-US" sz="4000" dirty="0"/>
+          </a:p>
+        </p:txBody>
+      </p:sp>
+      <p:sp>
+        <p:nvSpPr>
+          <p:cNvPr id="3" name="Text 0"/>
+          <p:cNvSpPr/>
+          <p:nvPr>
+            <p:ph idx="101" type="body" hasCustomPrompt="1"/>
+          </p:nvPr>
+        </p:nvSpPr>
+        <p:spPr>
+          <a:xfrm>
+            <a:off x="868680" y="1572768"/>
+            <a:ext cx="8686800" cy="320040"/>
           </a:xfrm>
           <a:prstGeom prst="rect">
             <a:avLst/>
@@ -5242,39 +5480,36 @@
           <a:ln/>
         </p:spPr>
         <p:txBody>
-          <a:bodyPr wrap="square" lIns="0" tIns="0" rIns="0" bIns="0" rtlCol="0" anchor="ctr"/>
-          <a:lstStyle/>
-          <a:p>
-            <a:pPr indent="0" marL="0">
-              <a:buNone/>
-            </a:pPr>
-            <a:r>
-              <a:rPr lang="en-US" sz="1200" spc="600" kern="0" dirty="0">
+          <a:bodyPr wrap="square" lIns="0" tIns="0" rIns="0" bIns="0" rtlCol="0"/>
+          <a:lstStyle/>
+          <a:p>
+            <a:pPr algn="l" indent="0" marL="0">
+              <a:buNone/>
+            </a:pPr>
+            <a:r>
+              <a:rPr lang="en-US" sz="1100" spc="700" kern="0" dirty="0">
                 <a:solidFill>
                   <a:schemeClr val="accent1"/>
                 </a:solidFill>
-                <a:latin typeface="나눔명조" pitchFamily="34" charset="0"/>
-                <a:ea typeface="나눔명조" pitchFamily="34" charset="-122"/>
-                <a:cs typeface="나눔명조" pitchFamily="34" charset="-120"/>
-              </a:rPr>
-              <a:t>PROGRAMME</a:t>
-            </a:r>
-            <a:endParaRPr lang="en-US" sz="1200" dirty="0"/>
-          </a:p>
-        </p:txBody>
-      </p:sp>
-      <p:sp>
-        <p:nvSpPr>
-          <p:cNvPr id="4" name="Badge 1"/>
-          <p:cNvSpPr/>
-          <p:nvPr/>
-        </p:nvSpPr>
-        <p:spPr>
-          <a:xfrm>
-            <a:off x="868680" y="2194560"/>
+              </a:rPr>
+              <a:t>ORDER OF CEREMONY</a:t>
+            </a:r>
+            <a:endParaRPr lang="en-US" sz="1100" dirty="0"/>
+          </a:p>
+        </p:txBody>
+      </p:sp>
+      <p:sp>
+        <p:nvSpPr>
+          <p:cNvPr id="4" name="Badge 1 outer"/>
+          <p:cNvSpPr/>
+          <p:nvPr/>
+        </p:nvSpPr>
+        <p:spPr>
+          <a:xfrm>
+            <a:off x="950976" y="2313432"/>
             <a:ext cx="475488" cy="475488"/>
           </a:xfrm>
-          <a:prstGeom prst="ellipse">
+          <a:prstGeom prst="diamond">
             <a:avLst/>
           </a:prstGeom>
           <a:solidFill>
@@ -5290,14 +5525,39 @@
       </p:sp>
       <p:sp>
         <p:nvSpPr>
-          <p:cNvPr id="5" name="Badge no 1"/>
+          <p:cNvPr id="5" name="Badge 1 inner"/>
+          <p:cNvSpPr/>
+          <p:nvPr/>
+        </p:nvSpPr>
+        <p:spPr>
+          <a:xfrm>
+            <a:off x="996696" y="2359152"/>
+            <a:ext cx="384048" cy="384048"/>
+          </a:xfrm>
+          <a:prstGeom prst="diamond">
+            <a:avLst/>
+          </a:prstGeom>
+          <a:solidFill>
+            <a:schemeClr val="tx1"/>
+          </a:solidFill>
+          <a:ln w="6350">
+            <a:solidFill>
+              <a:schemeClr val="accent2"/>
+            </a:solidFill>
+            <a:prstDash val="solid"/>
+          </a:ln>
+        </p:spPr>
+      </p:sp>
+      <p:sp>
+        <p:nvSpPr>
+          <p:cNvPr id="6" name="Badge 1 label"/>
           <p:cNvSpPr txBox="1"/>
           <p:nvPr/>
         </p:nvSpPr>
         <p:spPr>
           <a:xfrm>
-            <a:off x="868680" y="2194560"/>
-            <a:ext cx="475488" cy="475488"/>
+            <a:off x="996696" y="2359152"/>
+            <a:ext cx="384048" cy="384048"/>
           </a:xfrm>
           <a:prstGeom prst="rect">
             <a:avLst/>
@@ -5313,9 +5573,9 @@
               <a:buNone/>
             </a:pPr>
             <a:r>
-              <a:rPr lang="en-US" sz="1400" b="1" dirty="0">
-                <a:solidFill>
-                  <a:schemeClr val="accent1"/>
+              <a:rPr lang="en-US" sz="1300" b="1" dirty="0">
+                <a:solidFill>
+                  <a:schemeClr val="accent2"/>
                 </a:solidFill>
                 <a:latin typeface="나눔명조" pitchFamily="34" charset="0"/>
                 <a:ea typeface="나눔명조" pitchFamily="34" charset="-122"/>
@@ -5323,20 +5583,20 @@
               </a:rPr>
               <a:t>1</a:t>
             </a:r>
-            <a:endParaRPr lang="en-US" sz="1400" dirty="0"/>
-          </a:p>
-        </p:txBody>
-      </p:sp>
-      <p:sp>
-        <p:nvSpPr>
-          <p:cNvPr id="6" name="Item 1"/>
+            <a:endParaRPr lang="en-US" sz="1300" dirty="0"/>
+          </a:p>
+        </p:txBody>
+      </p:sp>
+      <p:sp>
+        <p:nvSpPr>
+          <p:cNvPr id="7" name="Item 1"/>
           <p:cNvSpPr txBox="1"/>
           <p:nvPr/>
         </p:nvSpPr>
         <p:spPr>
           <a:xfrm>
-            <a:off x="1527048" y="2103120"/>
-            <a:ext cx="4325112" cy="658368"/>
+            <a:off x="1691640" y="2240280"/>
+            <a:ext cx="4160520" cy="621792"/>
           </a:xfrm>
           <a:prstGeom prst="rect">
             <a:avLst/>
@@ -5352,7 +5612,7 @@
               <a:buNone/>
             </a:pPr>
             <a:r>
-              <a:rPr lang="en-US" sz="2200" b="1" spc="200" kern="0" dirty="0">
+              <a:rPr lang="en-US" sz="2200" b="1" spc="300" kern="0" dirty="0">
                 <a:solidFill>
                   <a:schemeClr val="bg1"/>
                 </a:solidFill>
@@ -5368,7 +5628,7 @@
             <a:r>
               <a:rPr lang="en-US" sz="1300" dirty="0">
                 <a:solidFill>
-                  <a:schemeClr val="accent3"/>
+                  <a:schemeClr val="accent2"/>
                 </a:solidFill>
                 <a:latin typeface="맑은 고딕" pitchFamily="34" charset="0"/>
                 <a:ea typeface="맑은 고딕" pitchFamily="34" charset="-122"/>
@@ -5382,14 +5642,14 @@
       </p:sp>
       <p:sp>
         <p:nvSpPr>
-          <p:cNvPr id="7" name="Rule 1"/>
-          <p:cNvSpPr/>
-          <p:nvPr/>
-        </p:nvSpPr>
-        <p:spPr>
-          <a:xfrm>
-            <a:off x="1527048" y="2825496"/>
-            <a:ext cx="4325112" cy="0"/>
+          <p:cNvPr id="8" name="Rule 1"/>
+          <p:cNvSpPr/>
+          <p:nvPr/>
+        </p:nvSpPr>
+        <p:spPr>
+          <a:xfrm>
+            <a:off x="1691640" y="2953512"/>
+            <a:ext cx="4160520" cy="0"/>
           </a:xfrm>
           <a:prstGeom prst="line">
             <a:avLst/>
@@ -5397,24 +5657,49 @@
           <a:noFill/>
           <a:ln w="6350">
             <a:solidFill>
-              <a:schemeClr val="accent5"/>
-            </a:solidFill>
-            <a:prstDash val="sysDot"/>
-          </a:ln>
-        </p:spPr>
-      </p:sp>
-      <p:sp>
-        <p:nvSpPr>
-          <p:cNvPr id="8" name="Badge 2"/>
-          <p:cNvSpPr/>
-          <p:nvPr/>
-        </p:nvSpPr>
-        <p:spPr>
-          <a:xfrm>
-            <a:off x="868680" y="2980944"/>
+              <a:schemeClr val="accent4"/>
+            </a:solidFill>
+            <a:prstDash val="solid"/>
+          </a:ln>
+        </p:spPr>
+      </p:sp>
+      <p:sp>
+        <p:nvSpPr>
+          <p:cNvPr id="9" name="Rule end 1"/>
+          <p:cNvSpPr/>
+          <p:nvPr/>
+        </p:nvSpPr>
+        <p:spPr>
+          <a:xfrm>
+            <a:off x="5797296" y="2898648"/>
+            <a:ext cx="109728" cy="109728"/>
+          </a:xfrm>
+          <a:prstGeom prst="diamond">
+            <a:avLst/>
+          </a:prstGeom>
+          <a:solidFill>
+            <a:schemeClr val="accent1"/>
+          </a:solidFill>
+          <a:ln w="12700">
+            <a:solidFill>
+              <a:schemeClr val="accent1"/>
+            </a:solidFill>
+            <a:prstDash val="solid"/>
+          </a:ln>
+        </p:spPr>
+      </p:sp>
+      <p:sp>
+        <p:nvSpPr>
+          <p:cNvPr id="10" name="Badge 2 outer"/>
+          <p:cNvSpPr/>
+          <p:nvPr/>
+        </p:nvSpPr>
+        <p:spPr>
+          <a:xfrm>
+            <a:off x="950976" y="3099816"/>
             <a:ext cx="475488" cy="475488"/>
           </a:xfrm>
-          <a:prstGeom prst="ellipse">
+          <a:prstGeom prst="diamond">
             <a:avLst/>
           </a:prstGeom>
           <a:solidFill>
@@ -5430,14 +5715,39 @@
       </p:sp>
       <p:sp>
         <p:nvSpPr>
-          <p:cNvPr id="9" name="Badge no 2"/>
+          <p:cNvPr id="11" name="Badge 2 inner"/>
+          <p:cNvSpPr/>
+          <p:nvPr/>
+        </p:nvSpPr>
+        <p:spPr>
+          <a:xfrm>
+            <a:off x="996696" y="3145536"/>
+            <a:ext cx="384048" cy="384048"/>
+          </a:xfrm>
+          <a:prstGeom prst="diamond">
+            <a:avLst/>
+          </a:prstGeom>
+          <a:solidFill>
+            <a:schemeClr val="tx1"/>
+          </a:solidFill>
+          <a:ln w="6350">
+            <a:solidFill>
+              <a:schemeClr val="accent2"/>
+            </a:solidFill>
+            <a:prstDash val="solid"/>
+          </a:ln>
+        </p:spPr>
+      </p:sp>
+      <p:sp>
+        <p:nvSpPr>
+          <p:cNvPr id="12" name="Badge 2 label"/>
           <p:cNvSpPr txBox="1"/>
           <p:nvPr/>
         </p:nvSpPr>
         <p:spPr>
           <a:xfrm>
-            <a:off x="868680" y="2980944"/>
-            <a:ext cx="475488" cy="475488"/>
+            <a:off x="996696" y="3145536"/>
+            <a:ext cx="384048" cy="384048"/>
           </a:xfrm>
           <a:prstGeom prst="rect">
             <a:avLst/>
@@ -5453,9 +5763,9 @@
               <a:buNone/>
             </a:pPr>
             <a:r>
-              <a:rPr lang="en-US" sz="1400" b="1" dirty="0">
-                <a:solidFill>
-                  <a:schemeClr val="accent1"/>
+              <a:rPr lang="en-US" sz="1300" b="1" dirty="0">
+                <a:solidFill>
+                  <a:schemeClr val="accent2"/>
                 </a:solidFill>
                 <a:latin typeface="나눔명조" pitchFamily="34" charset="0"/>
                 <a:ea typeface="나눔명조" pitchFamily="34" charset="-122"/>
@@ -5463,20 +5773,20 @@
               </a:rPr>
               <a:t>2</a:t>
             </a:r>
-            <a:endParaRPr lang="en-US" sz="1400" dirty="0"/>
-          </a:p>
-        </p:txBody>
-      </p:sp>
-      <p:sp>
-        <p:nvSpPr>
-          <p:cNvPr id="10" name="Item 2"/>
+            <a:endParaRPr lang="en-US" sz="1300" dirty="0"/>
+          </a:p>
+        </p:txBody>
+      </p:sp>
+      <p:sp>
+        <p:nvSpPr>
+          <p:cNvPr id="13" name="Item 2"/>
           <p:cNvSpPr txBox="1"/>
           <p:nvPr/>
         </p:nvSpPr>
         <p:spPr>
           <a:xfrm>
-            <a:off x="1527048" y="2889504"/>
-            <a:ext cx="4325112" cy="658368"/>
+            <a:off x="1691640" y="3026664"/>
+            <a:ext cx="4160520" cy="621792"/>
           </a:xfrm>
           <a:prstGeom prst="rect">
             <a:avLst/>
@@ -5492,7 +5802,7 @@
               <a:buNone/>
             </a:pPr>
             <a:r>
-              <a:rPr lang="en-US" sz="2200" b="1" spc="200" kern="0" dirty="0">
+              <a:rPr lang="en-US" sz="2200" b="1" spc="300" kern="0" dirty="0">
                 <a:solidFill>
                   <a:schemeClr val="bg1"/>
                 </a:solidFill>
@@ -5508,7 +5818,7 @@
             <a:r>
               <a:rPr lang="en-US" sz="1300" dirty="0">
                 <a:solidFill>
-                  <a:schemeClr val="accent3"/>
+                  <a:schemeClr val="accent2"/>
                 </a:solidFill>
                 <a:latin typeface="맑은 고딕" pitchFamily="34" charset="0"/>
                 <a:ea typeface="맑은 고딕" pitchFamily="34" charset="-122"/>
@@ -5522,14 +5832,14 @@
       </p:sp>
       <p:sp>
         <p:nvSpPr>
-          <p:cNvPr id="11" name="Rule 2"/>
-          <p:cNvSpPr/>
-          <p:nvPr/>
-        </p:nvSpPr>
-        <p:spPr>
-          <a:xfrm>
-            <a:off x="1527048" y="3611880"/>
-            <a:ext cx="4325112" cy="0"/>
+          <p:cNvPr id="14" name="Rule 2"/>
+          <p:cNvSpPr/>
+          <p:nvPr/>
+        </p:nvSpPr>
+        <p:spPr>
+          <a:xfrm>
+            <a:off x="1691640" y="3739896"/>
+            <a:ext cx="4160520" cy="0"/>
           </a:xfrm>
           <a:prstGeom prst="line">
             <a:avLst/>
@@ -5537,24 +5847,49 @@
           <a:noFill/>
           <a:ln w="6350">
             <a:solidFill>
-              <a:schemeClr val="accent5"/>
-            </a:solidFill>
-            <a:prstDash val="sysDot"/>
-          </a:ln>
-        </p:spPr>
-      </p:sp>
-      <p:sp>
-        <p:nvSpPr>
-          <p:cNvPr id="12" name="Badge 3"/>
-          <p:cNvSpPr/>
-          <p:nvPr/>
-        </p:nvSpPr>
-        <p:spPr>
-          <a:xfrm>
-            <a:off x="868680" y="3767328"/>
+              <a:schemeClr val="accent4"/>
+            </a:solidFill>
+            <a:prstDash val="solid"/>
+          </a:ln>
+        </p:spPr>
+      </p:sp>
+      <p:sp>
+        <p:nvSpPr>
+          <p:cNvPr id="15" name="Rule end 2"/>
+          <p:cNvSpPr/>
+          <p:nvPr/>
+        </p:nvSpPr>
+        <p:spPr>
+          <a:xfrm>
+            <a:off x="5797296" y="3685032"/>
+            <a:ext cx="109728" cy="109728"/>
+          </a:xfrm>
+          <a:prstGeom prst="diamond">
+            <a:avLst/>
+          </a:prstGeom>
+          <a:solidFill>
+            <a:schemeClr val="accent1"/>
+          </a:solidFill>
+          <a:ln w="12700">
+            <a:solidFill>
+              <a:schemeClr val="accent1"/>
+            </a:solidFill>
+            <a:prstDash val="solid"/>
+          </a:ln>
+        </p:spPr>
+      </p:sp>
+      <p:sp>
+        <p:nvSpPr>
+          <p:cNvPr id="16" name="Badge 3 outer"/>
+          <p:cNvSpPr/>
+          <p:nvPr/>
+        </p:nvSpPr>
+        <p:spPr>
+          <a:xfrm>
+            <a:off x="950976" y="3886200"/>
             <a:ext cx="475488" cy="475488"/>
           </a:xfrm>
-          <a:prstGeom prst="ellipse">
+          <a:prstGeom prst="diamond">
             <a:avLst/>
           </a:prstGeom>
           <a:solidFill>
@@ -5570,14 +5905,39 @@
       </p:sp>
       <p:sp>
         <p:nvSpPr>
-          <p:cNvPr id="13" name="Badge no 3"/>
+          <p:cNvPr id="17" name="Badge 3 inner"/>
+          <p:cNvSpPr/>
+          <p:nvPr/>
+        </p:nvSpPr>
+        <p:spPr>
+          <a:xfrm>
+            <a:off x="996696" y="3931920"/>
+            <a:ext cx="384048" cy="384048"/>
+          </a:xfrm>
+          <a:prstGeom prst="diamond">
+            <a:avLst/>
+          </a:prstGeom>
+          <a:solidFill>
+            <a:schemeClr val="tx1"/>
+          </a:solidFill>
+          <a:ln w="6350">
+            <a:solidFill>
+              <a:schemeClr val="accent2"/>
+            </a:solidFill>
+            <a:prstDash val="solid"/>
+          </a:ln>
+        </p:spPr>
+      </p:sp>
+      <p:sp>
+        <p:nvSpPr>
+          <p:cNvPr id="18" name="Badge 3 label"/>
           <p:cNvSpPr txBox="1"/>
           <p:nvPr/>
         </p:nvSpPr>
         <p:spPr>
           <a:xfrm>
-            <a:off x="868680" y="3767328"/>
-            <a:ext cx="475488" cy="475488"/>
+            <a:off x="996696" y="3931920"/>
+            <a:ext cx="384048" cy="384048"/>
           </a:xfrm>
           <a:prstGeom prst="rect">
             <a:avLst/>
@@ -5593,9 +5953,9 @@
               <a:buNone/>
             </a:pPr>
             <a:r>
-              <a:rPr lang="en-US" sz="1400" b="1" dirty="0">
-                <a:solidFill>
-                  <a:schemeClr val="accent1"/>
+              <a:rPr lang="en-US" sz="1300" b="1" dirty="0">
+                <a:solidFill>
+                  <a:schemeClr val="accent2"/>
                 </a:solidFill>
                 <a:latin typeface="나눔명조" pitchFamily="34" charset="0"/>
                 <a:ea typeface="나눔명조" pitchFamily="34" charset="-122"/>
@@ -5603,20 +5963,20 @@
               </a:rPr>
               <a:t>3</a:t>
             </a:r>
-            <a:endParaRPr lang="en-US" sz="1400" dirty="0"/>
-          </a:p>
-        </p:txBody>
-      </p:sp>
-      <p:sp>
-        <p:nvSpPr>
-          <p:cNvPr id="14" name="Item 3"/>
+            <a:endParaRPr lang="en-US" sz="1300" dirty="0"/>
+          </a:p>
+        </p:txBody>
+      </p:sp>
+      <p:sp>
+        <p:nvSpPr>
+          <p:cNvPr id="19" name="Item 3"/>
           <p:cNvSpPr txBox="1"/>
           <p:nvPr/>
         </p:nvSpPr>
         <p:spPr>
           <a:xfrm>
-            <a:off x="1527048" y="3675888"/>
-            <a:ext cx="4325112" cy="658368"/>
+            <a:off x="1691640" y="3813048"/>
+            <a:ext cx="4160520" cy="621792"/>
           </a:xfrm>
           <a:prstGeom prst="rect">
             <a:avLst/>
@@ -5632,7 +5992,7 @@
               <a:buNone/>
             </a:pPr>
             <a:r>
-              <a:rPr lang="en-US" sz="2200" b="1" spc="200" kern="0" dirty="0">
+              <a:rPr lang="en-US" sz="2200" b="1" spc="300" kern="0" dirty="0">
                 <a:solidFill>
                   <a:schemeClr val="bg1"/>
                 </a:solidFill>
@@ -5648,7 +6008,7 @@
             <a:r>
               <a:rPr lang="en-US" sz="1300" dirty="0">
                 <a:solidFill>
-                  <a:schemeClr val="accent3"/>
+                  <a:schemeClr val="accent2"/>
                 </a:solidFill>
                 <a:latin typeface="맑은 고딕" pitchFamily="34" charset="0"/>
                 <a:ea typeface="맑은 고딕" pitchFamily="34" charset="-122"/>
@@ -5662,14 +6022,14 @@
       </p:sp>
       <p:sp>
         <p:nvSpPr>
-          <p:cNvPr id="15" name="Rule 3"/>
-          <p:cNvSpPr/>
-          <p:nvPr/>
-        </p:nvSpPr>
-        <p:spPr>
-          <a:xfrm>
-            <a:off x="1527048" y="4398264"/>
-            <a:ext cx="4325112" cy="0"/>
+          <p:cNvPr id="20" name="Rule 3"/>
+          <p:cNvSpPr/>
+          <p:nvPr/>
+        </p:nvSpPr>
+        <p:spPr>
+          <a:xfrm>
+            <a:off x="1691640" y="4526280"/>
+            <a:ext cx="4160520" cy="0"/>
           </a:xfrm>
           <a:prstGeom prst="line">
             <a:avLst/>
@@ -5677,24 +6037,49 @@
           <a:noFill/>
           <a:ln w="6350">
             <a:solidFill>
-              <a:schemeClr val="accent5"/>
-            </a:solidFill>
-            <a:prstDash val="sysDot"/>
-          </a:ln>
-        </p:spPr>
-      </p:sp>
-      <p:sp>
-        <p:nvSpPr>
-          <p:cNvPr id="16" name="Badge 4"/>
-          <p:cNvSpPr/>
-          <p:nvPr/>
-        </p:nvSpPr>
-        <p:spPr>
-          <a:xfrm>
-            <a:off x="868680" y="4553712"/>
+              <a:schemeClr val="accent4"/>
+            </a:solidFill>
+            <a:prstDash val="solid"/>
+          </a:ln>
+        </p:spPr>
+      </p:sp>
+      <p:sp>
+        <p:nvSpPr>
+          <p:cNvPr id="21" name="Rule end 3"/>
+          <p:cNvSpPr/>
+          <p:nvPr/>
+        </p:nvSpPr>
+        <p:spPr>
+          <a:xfrm>
+            <a:off x="5797296" y="4471416"/>
+            <a:ext cx="109728" cy="109728"/>
+          </a:xfrm>
+          <a:prstGeom prst="diamond">
+            <a:avLst/>
+          </a:prstGeom>
+          <a:solidFill>
+            <a:schemeClr val="accent1"/>
+          </a:solidFill>
+          <a:ln w="12700">
+            <a:solidFill>
+              <a:schemeClr val="accent1"/>
+            </a:solidFill>
+            <a:prstDash val="solid"/>
+          </a:ln>
+        </p:spPr>
+      </p:sp>
+      <p:sp>
+        <p:nvSpPr>
+          <p:cNvPr id="22" name="Badge 4 outer"/>
+          <p:cNvSpPr/>
+          <p:nvPr/>
+        </p:nvSpPr>
+        <p:spPr>
+          <a:xfrm>
+            <a:off x="950976" y="4672584"/>
             <a:ext cx="475488" cy="475488"/>
           </a:xfrm>
-          <a:prstGeom prst="ellipse">
+          <a:prstGeom prst="diamond">
             <a:avLst/>
           </a:prstGeom>
           <a:solidFill>
@@ -5710,14 +6095,39 @@
       </p:sp>
       <p:sp>
         <p:nvSpPr>
-          <p:cNvPr id="17" name="Badge no 4"/>
+          <p:cNvPr id="23" name="Badge 4 inner"/>
+          <p:cNvSpPr/>
+          <p:nvPr/>
+        </p:nvSpPr>
+        <p:spPr>
+          <a:xfrm>
+            <a:off x="996696" y="4718304"/>
+            <a:ext cx="384048" cy="384048"/>
+          </a:xfrm>
+          <a:prstGeom prst="diamond">
+            <a:avLst/>
+          </a:prstGeom>
+          <a:solidFill>
+            <a:schemeClr val="tx1"/>
+          </a:solidFill>
+          <a:ln w="6350">
+            <a:solidFill>
+              <a:schemeClr val="accent2"/>
+            </a:solidFill>
+            <a:prstDash val="solid"/>
+          </a:ln>
+        </p:spPr>
+      </p:sp>
+      <p:sp>
+        <p:nvSpPr>
+          <p:cNvPr id="24" name="Badge 4 label"/>
           <p:cNvSpPr txBox="1"/>
           <p:nvPr/>
         </p:nvSpPr>
         <p:spPr>
           <a:xfrm>
-            <a:off x="868680" y="4553712"/>
-            <a:ext cx="475488" cy="475488"/>
+            <a:off x="996696" y="4718304"/>
+            <a:ext cx="384048" cy="384048"/>
           </a:xfrm>
           <a:prstGeom prst="rect">
             <a:avLst/>
@@ -5733,9 +6143,9 @@
               <a:buNone/>
             </a:pPr>
             <a:r>
-              <a:rPr lang="en-US" sz="1400" b="1" dirty="0">
-                <a:solidFill>
-                  <a:schemeClr val="accent1"/>
+              <a:rPr lang="en-US" sz="1300" b="1" dirty="0">
+                <a:solidFill>
+                  <a:schemeClr val="accent2"/>
                 </a:solidFill>
                 <a:latin typeface="나눔명조" pitchFamily="34" charset="0"/>
                 <a:ea typeface="나눔명조" pitchFamily="34" charset="-122"/>
@@ -5743,20 +6153,20 @@
               </a:rPr>
               <a:t>4</a:t>
             </a:r>
-            <a:endParaRPr lang="en-US" sz="1400" dirty="0"/>
-          </a:p>
-        </p:txBody>
-      </p:sp>
-      <p:sp>
-        <p:nvSpPr>
-          <p:cNvPr id="18" name="Item 4"/>
+            <a:endParaRPr lang="en-US" sz="1300" dirty="0"/>
+          </a:p>
+        </p:txBody>
+      </p:sp>
+      <p:sp>
+        <p:nvSpPr>
+          <p:cNvPr id="25" name="Item 4"/>
           <p:cNvSpPr txBox="1"/>
           <p:nvPr/>
         </p:nvSpPr>
         <p:spPr>
           <a:xfrm>
-            <a:off x="1527048" y="4462272"/>
-            <a:ext cx="4325112" cy="658368"/>
+            <a:off x="1691640" y="4599432"/>
+            <a:ext cx="4160520" cy="621792"/>
           </a:xfrm>
           <a:prstGeom prst="rect">
             <a:avLst/>
@@ -5772,7 +6182,7 @@
               <a:buNone/>
             </a:pPr>
             <a:r>
-              <a:rPr lang="en-US" sz="2200" b="1" spc="200" kern="0" dirty="0">
+              <a:rPr lang="en-US" sz="2200" b="1" spc="300" kern="0" dirty="0">
                 <a:solidFill>
                   <a:schemeClr val="bg1"/>
                 </a:solidFill>
@@ -5788,7 +6198,7 @@
             <a:r>
               <a:rPr lang="en-US" sz="1300" dirty="0">
                 <a:solidFill>
-                  <a:schemeClr val="accent3"/>
+                  <a:schemeClr val="accent2"/>
                 </a:solidFill>
                 <a:latin typeface="맑은 고딕" pitchFamily="34" charset="0"/>
                 <a:ea typeface="맑은 고딕" pitchFamily="34" charset="-122"/>
@@ -5802,14 +6212,14 @@
       </p:sp>
       <p:sp>
         <p:nvSpPr>
-          <p:cNvPr id="19" name="Rule 4"/>
-          <p:cNvSpPr/>
-          <p:nvPr/>
-        </p:nvSpPr>
-        <p:spPr>
-          <a:xfrm>
-            <a:off x="1527048" y="5184648"/>
-            <a:ext cx="4325112" cy="0"/>
+          <p:cNvPr id="26" name="Rule 4"/>
+          <p:cNvSpPr/>
+          <p:nvPr/>
+        </p:nvSpPr>
+        <p:spPr>
+          <a:xfrm>
+            <a:off x="1691640" y="5312664"/>
+            <a:ext cx="4160520" cy="0"/>
           </a:xfrm>
           <a:prstGeom prst="line">
             <a:avLst/>
@@ -5817,24 +6227,49 @@
           <a:noFill/>
           <a:ln w="6350">
             <a:solidFill>
-              <a:schemeClr val="accent5"/>
-            </a:solidFill>
-            <a:prstDash val="sysDot"/>
-          </a:ln>
-        </p:spPr>
-      </p:sp>
-      <p:sp>
-        <p:nvSpPr>
-          <p:cNvPr id="20" name="Badge 5"/>
-          <p:cNvSpPr/>
-          <p:nvPr/>
-        </p:nvSpPr>
-        <p:spPr>
-          <a:xfrm>
-            <a:off x="868680" y="5340096"/>
+              <a:schemeClr val="accent4"/>
+            </a:solidFill>
+            <a:prstDash val="solid"/>
+          </a:ln>
+        </p:spPr>
+      </p:sp>
+      <p:sp>
+        <p:nvSpPr>
+          <p:cNvPr id="27" name="Rule end 4"/>
+          <p:cNvSpPr/>
+          <p:nvPr/>
+        </p:nvSpPr>
+        <p:spPr>
+          <a:xfrm>
+            <a:off x="5797296" y="5257800"/>
+            <a:ext cx="109728" cy="109728"/>
+          </a:xfrm>
+          <a:prstGeom prst="diamond">
+            <a:avLst/>
+          </a:prstGeom>
+          <a:solidFill>
+            <a:schemeClr val="accent1"/>
+          </a:solidFill>
+          <a:ln w="12700">
+            <a:solidFill>
+              <a:schemeClr val="accent1"/>
+            </a:solidFill>
+            <a:prstDash val="solid"/>
+          </a:ln>
+        </p:spPr>
+      </p:sp>
+      <p:sp>
+        <p:nvSpPr>
+          <p:cNvPr id="28" name="Badge 5 outer"/>
+          <p:cNvSpPr/>
+          <p:nvPr/>
+        </p:nvSpPr>
+        <p:spPr>
+          <a:xfrm>
+            <a:off x="950976" y="5458968"/>
             <a:ext cx="475488" cy="475488"/>
           </a:xfrm>
-          <a:prstGeom prst="ellipse">
+          <a:prstGeom prst="diamond">
             <a:avLst/>
           </a:prstGeom>
           <a:solidFill>
@@ -5850,14 +6285,39 @@
       </p:sp>
       <p:sp>
         <p:nvSpPr>
-          <p:cNvPr id="21" name="Badge no 5"/>
+          <p:cNvPr id="29" name="Badge 5 inner"/>
+          <p:cNvSpPr/>
+          <p:nvPr/>
+        </p:nvSpPr>
+        <p:spPr>
+          <a:xfrm>
+            <a:off x="996696" y="5504688"/>
+            <a:ext cx="384048" cy="384048"/>
+          </a:xfrm>
+          <a:prstGeom prst="diamond">
+            <a:avLst/>
+          </a:prstGeom>
+          <a:solidFill>
+            <a:schemeClr val="tx1"/>
+          </a:solidFill>
+          <a:ln w="6350">
+            <a:solidFill>
+              <a:schemeClr val="accent2"/>
+            </a:solidFill>
+            <a:prstDash val="solid"/>
+          </a:ln>
+        </p:spPr>
+      </p:sp>
+      <p:sp>
+        <p:nvSpPr>
+          <p:cNvPr id="30" name="Badge 5 label"/>
           <p:cNvSpPr txBox="1"/>
           <p:nvPr/>
         </p:nvSpPr>
         <p:spPr>
           <a:xfrm>
-            <a:off x="868680" y="5340096"/>
-            <a:ext cx="475488" cy="475488"/>
+            <a:off x="996696" y="5504688"/>
+            <a:ext cx="384048" cy="384048"/>
           </a:xfrm>
           <a:prstGeom prst="rect">
             <a:avLst/>
@@ -5873,9 +6333,9 @@
               <a:buNone/>
             </a:pPr>
             <a:r>
-              <a:rPr lang="en-US" sz="1400" b="1" dirty="0">
-                <a:solidFill>
-                  <a:schemeClr val="accent1"/>
+              <a:rPr lang="en-US" sz="1300" b="1" dirty="0">
+                <a:solidFill>
+                  <a:schemeClr val="accent2"/>
                 </a:solidFill>
                 <a:latin typeface="나눔명조" pitchFamily="34" charset="0"/>
                 <a:ea typeface="나눔명조" pitchFamily="34" charset="-122"/>
@@ -5883,20 +6343,20 @@
               </a:rPr>
               <a:t>5</a:t>
             </a:r>
-            <a:endParaRPr lang="en-US" sz="1400" dirty="0"/>
-          </a:p>
-        </p:txBody>
-      </p:sp>
-      <p:sp>
-        <p:nvSpPr>
-          <p:cNvPr id="22" name="Item 5"/>
+            <a:endParaRPr lang="en-US" sz="1300" dirty="0"/>
+          </a:p>
+        </p:txBody>
+      </p:sp>
+      <p:sp>
+        <p:nvSpPr>
+          <p:cNvPr id="31" name="Item 5"/>
           <p:cNvSpPr txBox="1"/>
           <p:nvPr/>
         </p:nvSpPr>
         <p:spPr>
           <a:xfrm>
-            <a:off x="1527048" y="5248656"/>
-            <a:ext cx="4325112" cy="658368"/>
+            <a:off x="1691640" y="5385816"/>
+            <a:ext cx="4160520" cy="621792"/>
           </a:xfrm>
           <a:prstGeom prst="rect">
             <a:avLst/>
@@ -5912,7 +6372,7 @@
               <a:buNone/>
             </a:pPr>
             <a:r>
-              <a:rPr lang="en-US" sz="2200" b="1" spc="200" kern="0" dirty="0">
+              <a:rPr lang="en-US" sz="2200" b="1" spc="300" kern="0" dirty="0">
                 <a:solidFill>
                   <a:schemeClr val="bg1"/>
                 </a:solidFill>
@@ -5928,7 +6388,7 @@
             <a:r>
               <a:rPr lang="en-US" sz="1300" dirty="0">
                 <a:solidFill>
-                  <a:schemeClr val="accent3"/>
+                  <a:schemeClr val="accent2"/>
                 </a:solidFill>
                 <a:latin typeface="맑은 고딕" pitchFamily="34" charset="0"/>
                 <a:ea typeface="맑은 고딕" pitchFamily="34" charset="-122"/>
@@ -5942,16 +6402,16 @@
       </p:sp>
       <p:sp>
         <p:nvSpPr>
-          <p:cNvPr id="23" name="Badge 6"/>
-          <p:cNvSpPr/>
-          <p:nvPr/>
-        </p:nvSpPr>
-        <p:spPr>
-          <a:xfrm>
-            <a:off x="6355080" y="2194560"/>
+          <p:cNvPr id="32" name="Badge 6 outer"/>
+          <p:cNvSpPr/>
+          <p:nvPr/>
+        </p:nvSpPr>
+        <p:spPr>
+          <a:xfrm>
+            <a:off x="6437376" y="2313432"/>
             <a:ext cx="475488" cy="475488"/>
           </a:xfrm>
-          <a:prstGeom prst="ellipse">
+          <a:prstGeom prst="diamond">
             <a:avLst/>
           </a:prstGeom>
           <a:solidFill>
@@ -5967,14 +6427,39 @@
       </p:sp>
       <p:sp>
         <p:nvSpPr>
-          <p:cNvPr id="24" name="Badge no 6"/>
+          <p:cNvPr id="33" name="Badge 6 inner"/>
+          <p:cNvSpPr/>
+          <p:nvPr/>
+        </p:nvSpPr>
+        <p:spPr>
+          <a:xfrm>
+            <a:off x="6483096" y="2359152"/>
+            <a:ext cx="384048" cy="384048"/>
+          </a:xfrm>
+          <a:prstGeom prst="diamond">
+            <a:avLst/>
+          </a:prstGeom>
+          <a:solidFill>
+            <a:schemeClr val="tx1"/>
+          </a:solidFill>
+          <a:ln w="6350">
+            <a:solidFill>
+              <a:schemeClr val="accent2"/>
+            </a:solidFill>
+            <a:prstDash val="solid"/>
+          </a:ln>
+        </p:spPr>
+      </p:sp>
+      <p:sp>
+        <p:nvSpPr>
+          <p:cNvPr id="34" name="Badge 6 label"/>
           <p:cNvSpPr txBox="1"/>
           <p:nvPr/>
         </p:nvSpPr>
         <p:spPr>
           <a:xfrm>
-            <a:off x="6355080" y="2194560"/>
-            <a:ext cx="475488" cy="475488"/>
+            <a:off x="6483096" y="2359152"/>
+            <a:ext cx="384048" cy="384048"/>
           </a:xfrm>
           <a:prstGeom prst="rect">
             <a:avLst/>
@@ -5990,9 +6475,9 @@
               <a:buNone/>
             </a:pPr>
             <a:r>
-              <a:rPr lang="en-US" sz="1400" b="1" dirty="0">
-                <a:solidFill>
-                  <a:schemeClr val="accent1"/>
+              <a:rPr lang="en-US" sz="1300" b="1" dirty="0">
+                <a:solidFill>
+                  <a:schemeClr val="accent2"/>
                 </a:solidFill>
                 <a:latin typeface="나눔명조" pitchFamily="34" charset="0"/>
                 <a:ea typeface="나눔명조" pitchFamily="34" charset="-122"/>
@@ -6000,20 +6485,20 @@
               </a:rPr>
               <a:t>6</a:t>
             </a:r>
-            <a:endParaRPr lang="en-US" sz="1400" dirty="0"/>
-          </a:p>
-        </p:txBody>
-      </p:sp>
-      <p:sp>
-        <p:nvSpPr>
-          <p:cNvPr id="25" name="Item 6"/>
+            <a:endParaRPr lang="en-US" sz="1300" dirty="0"/>
+          </a:p>
+        </p:txBody>
+      </p:sp>
+      <p:sp>
+        <p:nvSpPr>
+          <p:cNvPr id="35" name="Item 6"/>
           <p:cNvSpPr txBox="1"/>
           <p:nvPr/>
         </p:nvSpPr>
         <p:spPr>
           <a:xfrm>
-            <a:off x="7013448" y="2103120"/>
-            <a:ext cx="4325112" cy="658368"/>
+            <a:off x="7178040" y="2240280"/>
+            <a:ext cx="4160520" cy="621792"/>
           </a:xfrm>
           <a:prstGeom prst="rect">
             <a:avLst/>
@@ -6029,7 +6514,7 @@
               <a:buNone/>
             </a:pPr>
             <a:r>
-              <a:rPr lang="en-US" sz="2200" b="1" spc="200" kern="0" dirty="0">
+              <a:rPr lang="en-US" sz="2200" b="1" spc="300" kern="0" dirty="0">
                 <a:solidFill>
                   <a:schemeClr val="bg1"/>
                 </a:solidFill>
@@ -6045,7 +6530,7 @@
             <a:r>
               <a:rPr lang="en-US" sz="1300" dirty="0">
                 <a:solidFill>
-                  <a:schemeClr val="accent3"/>
+                  <a:schemeClr val="accent2"/>
                 </a:solidFill>
                 <a:latin typeface="맑은 고딕" pitchFamily="34" charset="0"/>
                 <a:ea typeface="맑은 고딕" pitchFamily="34" charset="-122"/>
@@ -6059,14 +6544,14 @@
       </p:sp>
       <p:sp>
         <p:nvSpPr>
-          <p:cNvPr id="26" name="Rule 6"/>
-          <p:cNvSpPr/>
-          <p:nvPr/>
-        </p:nvSpPr>
-        <p:spPr>
-          <a:xfrm>
-            <a:off x="7013448" y="2825496"/>
-            <a:ext cx="4325112" cy="0"/>
+          <p:cNvPr id="36" name="Rule 6"/>
+          <p:cNvSpPr/>
+          <p:nvPr/>
+        </p:nvSpPr>
+        <p:spPr>
+          <a:xfrm>
+            <a:off x="7178040" y="2953512"/>
+            <a:ext cx="4160520" cy="0"/>
           </a:xfrm>
           <a:prstGeom prst="line">
             <a:avLst/>
@@ -6074,24 +6559,49 @@
           <a:noFill/>
           <a:ln w="6350">
             <a:solidFill>
-              <a:schemeClr val="accent5"/>
-            </a:solidFill>
-            <a:prstDash val="sysDot"/>
-          </a:ln>
-        </p:spPr>
-      </p:sp>
-      <p:sp>
-        <p:nvSpPr>
-          <p:cNvPr id="27" name="Badge 7"/>
-          <p:cNvSpPr/>
-          <p:nvPr/>
-        </p:nvSpPr>
-        <p:spPr>
-          <a:xfrm>
-            <a:off x="6355080" y="2980944"/>
+              <a:schemeClr val="accent4"/>
+            </a:solidFill>
+            <a:prstDash val="solid"/>
+          </a:ln>
+        </p:spPr>
+      </p:sp>
+      <p:sp>
+        <p:nvSpPr>
+          <p:cNvPr id="37" name="Rule end 6"/>
+          <p:cNvSpPr/>
+          <p:nvPr/>
+        </p:nvSpPr>
+        <p:spPr>
+          <a:xfrm>
+            <a:off x="11283696" y="2898648"/>
+            <a:ext cx="109728" cy="109728"/>
+          </a:xfrm>
+          <a:prstGeom prst="diamond">
+            <a:avLst/>
+          </a:prstGeom>
+          <a:solidFill>
+            <a:schemeClr val="accent1"/>
+          </a:solidFill>
+          <a:ln w="12700">
+            <a:solidFill>
+              <a:schemeClr val="accent1"/>
+            </a:solidFill>
+            <a:prstDash val="solid"/>
+          </a:ln>
+        </p:spPr>
+      </p:sp>
+      <p:sp>
+        <p:nvSpPr>
+          <p:cNvPr id="38" name="Badge 7 outer"/>
+          <p:cNvSpPr/>
+          <p:nvPr/>
+        </p:nvSpPr>
+        <p:spPr>
+          <a:xfrm>
+            <a:off x="6437376" y="3099816"/>
             <a:ext cx="475488" cy="475488"/>
           </a:xfrm>
-          <a:prstGeom prst="ellipse">
+          <a:prstGeom prst="diamond">
             <a:avLst/>
           </a:prstGeom>
           <a:solidFill>
@@ -6107,14 +6617,39 @@
       </p:sp>
       <p:sp>
         <p:nvSpPr>
-          <p:cNvPr id="28" name="Badge no 7"/>
+          <p:cNvPr id="39" name="Badge 7 inner"/>
+          <p:cNvSpPr/>
+          <p:nvPr/>
+        </p:nvSpPr>
+        <p:spPr>
+          <a:xfrm>
+            <a:off x="6483096" y="3145536"/>
+            <a:ext cx="384048" cy="384048"/>
+          </a:xfrm>
+          <a:prstGeom prst="diamond">
+            <a:avLst/>
+          </a:prstGeom>
+          <a:solidFill>
+            <a:schemeClr val="tx1"/>
+          </a:solidFill>
+          <a:ln w="6350">
+            <a:solidFill>
+              <a:schemeClr val="accent2"/>
+            </a:solidFill>
+            <a:prstDash val="solid"/>
+          </a:ln>
+        </p:spPr>
+      </p:sp>
+      <p:sp>
+        <p:nvSpPr>
+          <p:cNvPr id="40" name="Badge 7 label"/>
           <p:cNvSpPr txBox="1"/>
           <p:nvPr/>
         </p:nvSpPr>
         <p:spPr>
           <a:xfrm>
-            <a:off x="6355080" y="2980944"/>
-            <a:ext cx="475488" cy="475488"/>
+            <a:off x="6483096" y="3145536"/>
+            <a:ext cx="384048" cy="384048"/>
           </a:xfrm>
           <a:prstGeom prst="rect">
             <a:avLst/>
@@ -6130,9 +6665,9 @@
               <a:buNone/>
             </a:pPr>
             <a:r>
-              <a:rPr lang="en-US" sz="1400" b="1" dirty="0">
-                <a:solidFill>
-                  <a:schemeClr val="accent1"/>
+              <a:rPr lang="en-US" sz="1300" b="1" dirty="0">
+                <a:solidFill>
+                  <a:schemeClr val="accent2"/>
                 </a:solidFill>
                 <a:latin typeface="나눔명조" pitchFamily="34" charset="0"/>
                 <a:ea typeface="나눔명조" pitchFamily="34" charset="-122"/>
@@ -6140,20 +6675,20 @@
               </a:rPr>
               <a:t>7</a:t>
             </a:r>
-            <a:endParaRPr lang="en-US" sz="1400" dirty="0"/>
-          </a:p>
-        </p:txBody>
-      </p:sp>
-      <p:sp>
-        <p:nvSpPr>
-          <p:cNvPr id="29" name="Item 7"/>
+            <a:endParaRPr lang="en-US" sz="1300" dirty="0"/>
+          </a:p>
+        </p:txBody>
+      </p:sp>
+      <p:sp>
+        <p:nvSpPr>
+          <p:cNvPr id="41" name="Item 7"/>
           <p:cNvSpPr txBox="1"/>
           <p:nvPr/>
         </p:nvSpPr>
         <p:spPr>
           <a:xfrm>
-            <a:off x="7013448" y="2889504"/>
-            <a:ext cx="4325112" cy="658368"/>
+            <a:off x="7178040" y="3026664"/>
+            <a:ext cx="4160520" cy="621792"/>
           </a:xfrm>
           <a:prstGeom prst="rect">
             <a:avLst/>
@@ -6169,7 +6704,7 @@
               <a:buNone/>
             </a:pPr>
             <a:r>
-              <a:rPr lang="en-US" sz="2200" b="1" spc="200" kern="0" dirty="0">
+              <a:rPr lang="en-US" sz="2200" b="1" spc="300" kern="0" dirty="0">
                 <a:solidFill>
                   <a:schemeClr val="bg1"/>
                 </a:solidFill>
@@ -6185,7 +6720,7 @@
             <a:r>
               <a:rPr lang="en-US" sz="1300" dirty="0">
                 <a:solidFill>
-                  <a:schemeClr val="accent3"/>
+                  <a:schemeClr val="accent2"/>
                 </a:solidFill>
                 <a:latin typeface="맑은 고딕" pitchFamily="34" charset="0"/>
                 <a:ea typeface="맑은 고딕" pitchFamily="34" charset="-122"/>
@@ -6199,14 +6734,14 @@
       </p:sp>
       <p:sp>
         <p:nvSpPr>
-          <p:cNvPr id="30" name="Rule 7"/>
-          <p:cNvSpPr/>
-          <p:nvPr/>
-        </p:nvSpPr>
-        <p:spPr>
-          <a:xfrm>
-            <a:off x="7013448" y="3611880"/>
-            <a:ext cx="4325112" cy="0"/>
+          <p:cNvPr id="42" name="Rule 7"/>
+          <p:cNvSpPr/>
+          <p:nvPr/>
+        </p:nvSpPr>
+        <p:spPr>
+          <a:xfrm>
+            <a:off x="7178040" y="3739896"/>
+            <a:ext cx="4160520" cy="0"/>
           </a:xfrm>
           <a:prstGeom prst="line">
             <a:avLst/>
@@ -6214,24 +6749,49 @@
           <a:noFill/>
           <a:ln w="6350">
             <a:solidFill>
-              <a:schemeClr val="accent5"/>
-            </a:solidFill>
-            <a:prstDash val="sysDot"/>
-          </a:ln>
-        </p:spPr>
-      </p:sp>
-      <p:sp>
-        <p:nvSpPr>
-          <p:cNvPr id="31" name="Badge 8"/>
-          <p:cNvSpPr/>
-          <p:nvPr/>
-        </p:nvSpPr>
-        <p:spPr>
-          <a:xfrm>
-            <a:off x="6355080" y="3767328"/>
+              <a:schemeClr val="accent4"/>
+            </a:solidFill>
+            <a:prstDash val="solid"/>
+          </a:ln>
+        </p:spPr>
+      </p:sp>
+      <p:sp>
+        <p:nvSpPr>
+          <p:cNvPr id="43" name="Rule end 7"/>
+          <p:cNvSpPr/>
+          <p:nvPr/>
+        </p:nvSpPr>
+        <p:spPr>
+          <a:xfrm>
+            <a:off x="11283696" y="3685032"/>
+            <a:ext cx="109728" cy="109728"/>
+          </a:xfrm>
+          <a:prstGeom prst="diamond">
+            <a:avLst/>
+          </a:prstGeom>
+          <a:solidFill>
+            <a:schemeClr val="accent1"/>
+          </a:solidFill>
+          <a:ln w="12700">
+            <a:solidFill>
+              <a:schemeClr val="accent1"/>
+            </a:solidFill>
+            <a:prstDash val="solid"/>
+          </a:ln>
+        </p:spPr>
+      </p:sp>
+      <p:sp>
+        <p:nvSpPr>
+          <p:cNvPr id="44" name="Badge 8 outer"/>
+          <p:cNvSpPr/>
+          <p:nvPr/>
+        </p:nvSpPr>
+        <p:spPr>
+          <a:xfrm>
+            <a:off x="6437376" y="3886200"/>
             <a:ext cx="475488" cy="475488"/>
           </a:xfrm>
-          <a:prstGeom prst="ellipse">
+          <a:prstGeom prst="diamond">
             <a:avLst/>
           </a:prstGeom>
           <a:solidFill>
@@ -6247,14 +6807,39 @@
       </p:sp>
       <p:sp>
         <p:nvSpPr>
-          <p:cNvPr id="32" name="Badge no 8"/>
+          <p:cNvPr id="45" name="Badge 8 inner"/>
+          <p:cNvSpPr/>
+          <p:nvPr/>
+        </p:nvSpPr>
+        <p:spPr>
+          <a:xfrm>
+            <a:off x="6483096" y="3931920"/>
+            <a:ext cx="384048" cy="384048"/>
+          </a:xfrm>
+          <a:prstGeom prst="diamond">
+            <a:avLst/>
+          </a:prstGeom>
+          <a:solidFill>
+            <a:schemeClr val="tx1"/>
+          </a:solidFill>
+          <a:ln w="6350">
+            <a:solidFill>
+              <a:schemeClr val="accent2"/>
+            </a:solidFill>
+            <a:prstDash val="solid"/>
+          </a:ln>
+        </p:spPr>
+      </p:sp>
+      <p:sp>
+        <p:nvSpPr>
+          <p:cNvPr id="46" name="Badge 8 label"/>
           <p:cNvSpPr txBox="1"/>
           <p:nvPr/>
         </p:nvSpPr>
         <p:spPr>
           <a:xfrm>
-            <a:off x="6355080" y="3767328"/>
-            <a:ext cx="475488" cy="475488"/>
+            <a:off x="6483096" y="3931920"/>
+            <a:ext cx="384048" cy="384048"/>
           </a:xfrm>
           <a:prstGeom prst="rect">
             <a:avLst/>
@@ -6270,9 +6855,9 @@
               <a:buNone/>
             </a:pPr>
             <a:r>
-              <a:rPr lang="en-US" sz="1400" b="1" dirty="0">
-                <a:solidFill>
-                  <a:schemeClr val="accent1"/>
+              <a:rPr lang="en-US" sz="1300" b="1" dirty="0">
+                <a:solidFill>
+                  <a:schemeClr val="accent2"/>
                 </a:solidFill>
                 <a:latin typeface="나눔명조" pitchFamily="34" charset="0"/>
                 <a:ea typeface="나눔명조" pitchFamily="34" charset="-122"/>
@@ -6280,20 +6865,20 @@
               </a:rPr>
               <a:t>8</a:t>
             </a:r>
-            <a:endParaRPr lang="en-US" sz="1400" dirty="0"/>
-          </a:p>
-        </p:txBody>
-      </p:sp>
-      <p:sp>
-        <p:nvSpPr>
-          <p:cNvPr id="33" name="Item 8"/>
+            <a:endParaRPr lang="en-US" sz="1300" dirty="0"/>
+          </a:p>
+        </p:txBody>
+      </p:sp>
+      <p:sp>
+        <p:nvSpPr>
+          <p:cNvPr id="47" name="Item 8"/>
           <p:cNvSpPr txBox="1"/>
           <p:nvPr/>
         </p:nvSpPr>
         <p:spPr>
           <a:xfrm>
-            <a:off x="7013448" y="3675888"/>
-            <a:ext cx="4325112" cy="658368"/>
+            <a:off x="7178040" y="3813048"/>
+            <a:ext cx="4160520" cy="621792"/>
           </a:xfrm>
           <a:prstGeom prst="rect">
             <a:avLst/>
@@ -6309,7 +6894,7 @@
               <a:buNone/>
             </a:pPr>
             <a:r>
-              <a:rPr lang="en-US" sz="2200" b="1" spc="200" kern="0" dirty="0">
+              <a:rPr lang="en-US" sz="2200" b="1" spc="300" kern="0" dirty="0">
                 <a:solidFill>
                   <a:schemeClr val="bg1"/>
                 </a:solidFill>
@@ -6325,7 +6910,7 @@
             <a:r>
               <a:rPr lang="en-US" sz="1300" dirty="0">
                 <a:solidFill>
-                  <a:schemeClr val="accent3"/>
+                  <a:schemeClr val="accent2"/>
                 </a:solidFill>
                 <a:latin typeface="맑은 고딕" pitchFamily="34" charset="0"/>
                 <a:ea typeface="맑은 고딕" pitchFamily="34" charset="-122"/>
@@ -6339,14 +6924,14 @@
       </p:sp>
       <p:sp>
         <p:nvSpPr>
-          <p:cNvPr id="34" name="Rule 8"/>
-          <p:cNvSpPr/>
-          <p:nvPr/>
-        </p:nvSpPr>
-        <p:spPr>
-          <a:xfrm>
-            <a:off x="7013448" y="4398264"/>
-            <a:ext cx="4325112" cy="0"/>
+          <p:cNvPr id="48" name="Rule 8"/>
+          <p:cNvSpPr/>
+          <p:nvPr/>
+        </p:nvSpPr>
+        <p:spPr>
+          <a:xfrm>
+            <a:off x="7178040" y="4526280"/>
+            <a:ext cx="4160520" cy="0"/>
           </a:xfrm>
           <a:prstGeom prst="line">
             <a:avLst/>
@@ -6354,24 +6939,49 @@
           <a:noFill/>
           <a:ln w="6350">
             <a:solidFill>
-              <a:schemeClr val="accent5"/>
-            </a:solidFill>
-            <a:prstDash val="sysDot"/>
-          </a:ln>
-        </p:spPr>
-      </p:sp>
-      <p:sp>
-        <p:nvSpPr>
-          <p:cNvPr id="35" name="Badge 9"/>
-          <p:cNvSpPr/>
-          <p:nvPr/>
-        </p:nvSpPr>
-        <p:spPr>
-          <a:xfrm>
-            <a:off x="6355080" y="4553712"/>
+              <a:schemeClr val="accent4"/>
+            </a:solidFill>
+            <a:prstDash val="solid"/>
+          </a:ln>
+        </p:spPr>
+      </p:sp>
+      <p:sp>
+        <p:nvSpPr>
+          <p:cNvPr id="49" name="Rule end 8"/>
+          <p:cNvSpPr/>
+          <p:nvPr/>
+        </p:nvSpPr>
+        <p:spPr>
+          <a:xfrm>
+            <a:off x="11283696" y="4471416"/>
+            <a:ext cx="109728" cy="109728"/>
+          </a:xfrm>
+          <a:prstGeom prst="diamond">
+            <a:avLst/>
+          </a:prstGeom>
+          <a:solidFill>
+            <a:schemeClr val="accent1"/>
+          </a:solidFill>
+          <a:ln w="12700">
+            <a:solidFill>
+              <a:schemeClr val="accent1"/>
+            </a:solidFill>
+            <a:prstDash val="solid"/>
+          </a:ln>
+        </p:spPr>
+      </p:sp>
+      <p:sp>
+        <p:nvSpPr>
+          <p:cNvPr id="50" name="Badge 9 outer"/>
+          <p:cNvSpPr/>
+          <p:nvPr/>
+        </p:nvSpPr>
+        <p:spPr>
+          <a:xfrm>
+            <a:off x="6437376" y="4672584"/>
             <a:ext cx="475488" cy="475488"/>
           </a:xfrm>
-          <a:prstGeom prst="ellipse">
+          <a:prstGeom prst="diamond">
             <a:avLst/>
           </a:prstGeom>
           <a:solidFill>
@@ -6387,14 +6997,39 @@
       </p:sp>
       <p:sp>
         <p:nvSpPr>
-          <p:cNvPr id="36" name="Badge no 9"/>
+          <p:cNvPr id="51" name="Badge 9 inner"/>
+          <p:cNvSpPr/>
+          <p:nvPr/>
+        </p:nvSpPr>
+        <p:spPr>
+          <a:xfrm>
+            <a:off x="6483096" y="4718304"/>
+            <a:ext cx="384048" cy="384048"/>
+          </a:xfrm>
+          <a:prstGeom prst="diamond">
+            <a:avLst/>
+          </a:prstGeom>
+          <a:solidFill>
+            <a:schemeClr val="tx1"/>
+          </a:solidFill>
+          <a:ln w="6350">
+            <a:solidFill>
+              <a:schemeClr val="accent2"/>
+            </a:solidFill>
+            <a:prstDash val="solid"/>
+          </a:ln>
+        </p:spPr>
+      </p:sp>
+      <p:sp>
+        <p:nvSpPr>
+          <p:cNvPr id="52" name="Badge 9 label"/>
           <p:cNvSpPr txBox="1"/>
           <p:nvPr/>
         </p:nvSpPr>
         <p:spPr>
           <a:xfrm>
-            <a:off x="6355080" y="4553712"/>
-            <a:ext cx="475488" cy="475488"/>
+            <a:off x="6483096" y="4718304"/>
+            <a:ext cx="384048" cy="384048"/>
           </a:xfrm>
           <a:prstGeom prst="rect">
             <a:avLst/>
@@ -6410,9 +7045,9 @@
               <a:buNone/>
             </a:pPr>
             <a:r>
-              <a:rPr lang="en-US" sz="1400" b="1" dirty="0">
-                <a:solidFill>
-                  <a:schemeClr val="accent1"/>
+              <a:rPr lang="en-US" sz="1300" b="1" dirty="0">
+                <a:solidFill>
+                  <a:schemeClr val="accent2"/>
                 </a:solidFill>
                 <a:latin typeface="나눔명조" pitchFamily="34" charset="0"/>
                 <a:ea typeface="나눔명조" pitchFamily="34" charset="-122"/>
@@ -6420,20 +7055,20 @@
               </a:rPr>
               <a:t>9</a:t>
             </a:r>
-            <a:endParaRPr lang="en-US" sz="1400" dirty="0"/>
-          </a:p>
-        </p:txBody>
-      </p:sp>
-      <p:sp>
-        <p:nvSpPr>
-          <p:cNvPr id="37" name="Item 9"/>
+            <a:endParaRPr lang="en-US" sz="1300" dirty="0"/>
+          </a:p>
+        </p:txBody>
+      </p:sp>
+      <p:sp>
+        <p:nvSpPr>
+          <p:cNvPr id="53" name="Item 9"/>
           <p:cNvSpPr txBox="1"/>
           <p:nvPr/>
         </p:nvSpPr>
         <p:spPr>
           <a:xfrm>
-            <a:off x="7013448" y="4462272"/>
-            <a:ext cx="4325112" cy="658368"/>
+            <a:off x="7178040" y="4599432"/>
+            <a:ext cx="4160520" cy="621792"/>
           </a:xfrm>
           <a:prstGeom prst="rect">
             <a:avLst/>
@@ -6449,7 +7084,7 @@
               <a:buNone/>
             </a:pPr>
             <a:r>
-              <a:rPr lang="en-US" sz="2200" b="1" spc="200" kern="0" dirty="0">
+              <a:rPr lang="en-US" sz="2200" b="1" spc="300" kern="0" dirty="0">
                 <a:solidFill>
                   <a:schemeClr val="bg1"/>
                 </a:solidFill>
@@ -6465,7 +7100,7 @@
             <a:r>
               <a:rPr lang="en-US" sz="1300" dirty="0">
                 <a:solidFill>
-                  <a:schemeClr val="accent3"/>
+                  <a:schemeClr val="accent2"/>
                 </a:solidFill>
                 <a:latin typeface="맑은 고딕" pitchFamily="34" charset="0"/>
                 <a:ea typeface="맑은 고딕" pitchFamily="34" charset="-122"/>
@@ -6479,14 +7114,14 @@
       </p:sp>
       <p:sp>
         <p:nvSpPr>
-          <p:cNvPr id="38" name="Rule 9"/>
-          <p:cNvSpPr/>
-          <p:nvPr/>
-        </p:nvSpPr>
-        <p:spPr>
-          <a:xfrm>
-            <a:off x="7013448" y="5184648"/>
-            <a:ext cx="4325112" cy="0"/>
+          <p:cNvPr id="54" name="Rule 9"/>
+          <p:cNvSpPr/>
+          <p:nvPr/>
+        </p:nvSpPr>
+        <p:spPr>
+          <a:xfrm>
+            <a:off x="7178040" y="5312664"/>
+            <a:ext cx="4160520" cy="0"/>
           </a:xfrm>
           <a:prstGeom prst="line">
             <a:avLst/>
@@ -6494,9 +7129,34 @@
           <a:noFill/>
           <a:ln w="6350">
             <a:solidFill>
-              <a:schemeClr val="accent5"/>
-            </a:solidFill>
-            <a:prstDash val="sysDot"/>
+              <a:schemeClr val="accent4"/>
+            </a:solidFill>
+            <a:prstDash val="solid"/>
+          </a:ln>
+        </p:spPr>
+      </p:sp>
+      <p:sp>
+        <p:nvSpPr>
+          <p:cNvPr id="55" name="Rule end 9"/>
+          <p:cNvSpPr/>
+          <p:nvPr/>
+        </p:nvSpPr>
+        <p:spPr>
+          <a:xfrm>
+            <a:off x="11283696" y="5257800"/>
+            <a:ext cx="109728" cy="109728"/>
+          </a:xfrm>
+          <a:prstGeom prst="diamond">
+            <a:avLst/>
+          </a:prstGeom>
+          <a:solidFill>
+            <a:schemeClr val="accent1"/>
+          </a:solidFill>
+          <a:ln w="12700">
+            <a:solidFill>
+              <a:schemeClr val="accent1"/>
+            </a:solidFill>
+            <a:prstDash val="solid"/>
           </a:ln>
         </p:spPr>
       </p:sp>
@@ -6535,8 +7195,8 @@
         </p:nvSpPr>
         <p:spPr>
           <a:xfrm>
-            <a:off x="914400" y="1600200"/>
-            <a:ext cx="10362895" cy="640080"/>
+            <a:off x="1371600" y="1938528"/>
+            <a:ext cx="9448495" cy="457200"/>
           </a:xfrm>
           <a:prstGeom prst="rect">
             <a:avLst/>
@@ -6552,14 +7212,14 @@
               <a:buNone/>
             </a:pPr>
             <a:r>
-              <a:rPr lang="en-US" sz="2200" spc="1000" kern="0" dirty="0">
-                <a:solidFill>
-                  <a:schemeClr val="accent1"/>
+              <a:rPr lang="en-US" sz="1800" spc="1200" kern="0" dirty="0">
+                <a:solidFill>
+                  <a:schemeClr val="accent2"/>
                 </a:solidFill>
               </a:rPr>
               <a:t>제 1 순서</a:t>
             </a:r>
-            <a:endParaRPr lang="en-US" sz="2200" dirty="0"/>
+            <a:endParaRPr lang="en-US" sz="1800" dirty="0"/>
           </a:p>
         </p:txBody>
       </p:sp>
@@ -6573,8 +7233,8 @@
         </p:nvSpPr>
         <p:spPr>
           <a:xfrm>
-            <a:off x="914400" y="2377440"/>
-            <a:ext cx="10362895" cy="1280160"/>
+            <a:off x="731520" y="2468880"/>
+            <a:ext cx="10728655" cy="1463040"/>
           </a:xfrm>
           <a:prstGeom prst="rect">
             <a:avLst/>
@@ -6590,14 +7250,21 @@
               <a:buNone/>
             </a:pPr>
             <a:r>
-              <a:rPr lang="en-US" sz="6000" b="1" spc="600" kern="0" dirty="0">
-                <a:solidFill>
-                  <a:schemeClr val="bg1"/>
-                </a:solidFill>
+              <a:rPr lang="en-US" sz="6600" b="1" spc="1000" kern="0" dirty="0">
+                <a:solidFill>
+                  <a:schemeClr val="accent2"/>
+                </a:solidFill>
+                <a:effectLst>
+                  <a:glow rad="63500">
+                    <a:srgbClr val="D4AF5F">
+                      <a:alpha val="35000"/>
+                    </a:srgbClr>
+                  </a:glow>
+                </a:effectLst>
               </a:rPr>
               <a:t>개회 선언</a:t>
             </a:r>
-            <a:endParaRPr lang="en-US" sz="6000" dirty="0"/>
+            <a:endParaRPr lang="en-US" sz="6600" dirty="0"/>
           </a:p>
         </p:txBody>
       </p:sp>
@@ -6611,8 +7278,8 @@
         </p:nvSpPr>
         <p:spPr>
           <a:xfrm>
-            <a:off x="1645920" y="4160520"/>
-            <a:ext cx="8899855" cy="1005840"/>
+            <a:off x="1645920" y="4114800"/>
+            <a:ext cx="8899855" cy="1097280"/>
           </a:xfrm>
           <a:prstGeom prst="rect">
             <a:avLst/>
@@ -6631,9 +7298,9 @@
               <a:buNone/>
             </a:pPr>
             <a:r>
-              <a:rPr lang="en-US" sz="2000" b="1" dirty="0">
-                <a:solidFill>
-                  <a:schemeClr val="accent1"/>
+              <a:rPr lang="en-US" sz="2000" b="1" spc="300" kern="0" dirty="0">
+                <a:solidFill>
+                  <a:schemeClr val="accent2"/>
                 </a:solidFill>
               </a:rPr>
               <a:t>사회자</a:t>
@@ -6650,7 +7317,7 @@
             <a:r>
               <a:rPr lang="en-US" sz="2000" dirty="0">
                 <a:solidFill>
-                  <a:schemeClr val="accent2"/>
+                  <a:schemeClr val="bg1"/>
                 </a:solidFill>
               </a:rPr>
               <a:t>행사의 시작을 알립니다.</a:t>
@@ -6661,60 +7328,14 @@
       </p:sp>
       <p:sp>
         <p:nvSpPr>
-          <p:cNvPr id="5" name="Top line L"/>
-          <p:cNvSpPr/>
-          <p:nvPr/>
-        </p:nvSpPr>
-        <p:spPr>
-          <a:xfrm>
-            <a:off x="4907128" y="2194560"/>
-            <a:ext cx="1042416" cy="0"/>
-          </a:xfrm>
-          <a:prstGeom prst="line">
-            <a:avLst/>
-          </a:prstGeom>
-          <a:noFill/>
-          <a:ln w="12700">
-            <a:solidFill>
-              <a:schemeClr val="accent1"/>
-            </a:solidFill>
-            <a:prstDash val="solid"/>
-          </a:ln>
-        </p:spPr>
-      </p:sp>
-      <p:sp>
-        <p:nvSpPr>
-          <p:cNvPr id="6" name="Top line R"/>
-          <p:cNvSpPr/>
-          <p:nvPr/>
-        </p:nvSpPr>
-        <p:spPr>
-          <a:xfrm>
-            <a:off x="6242152" y="2194560"/>
-            <a:ext cx="1042416" cy="0"/>
-          </a:xfrm>
-          <a:prstGeom prst="line">
-            <a:avLst/>
-          </a:prstGeom>
-          <a:noFill/>
-          <a:ln w="12700">
-            <a:solidFill>
-              <a:schemeClr val="accent1"/>
-            </a:solidFill>
-            <a:prstDash val="solid"/>
-          </a:ln>
-        </p:spPr>
-      </p:sp>
-      <p:sp>
-        <p:nvSpPr>
-          <p:cNvPr id="7" name="Top diamond"/>
-          <p:cNvSpPr/>
-          <p:nvPr/>
-        </p:nvSpPr>
-        <p:spPr>
-          <a:xfrm>
-            <a:off x="6040984" y="2139696"/>
-            <a:ext cx="109728" cy="109728"/>
+          <p:cNvPr id="5" name="Eyebrow diamond -1"/>
+          <p:cNvSpPr/>
+          <p:nvPr/>
+        </p:nvSpPr>
+        <p:spPr>
+          <a:xfrm>
+            <a:off x="3928720" y="2103120"/>
+            <a:ext cx="128016" cy="128016"/>
           </a:xfrm>
           <a:prstGeom prst="diamond">
             <a:avLst/>
@@ -6732,20 +7353,20 @@
       </p:sp>
       <p:sp>
         <p:nvSpPr>
-          <p:cNvPr id="8" name="Bottom line L"/>
-          <p:cNvSpPr/>
-          <p:nvPr/>
-        </p:nvSpPr>
-        <p:spPr>
-          <a:xfrm>
-            <a:off x="4907128" y="3931920"/>
-            <a:ext cx="1042416" cy="0"/>
+          <p:cNvPr id="6" name="Eyebrow line -1"/>
+          <p:cNvSpPr/>
+          <p:nvPr/>
+        </p:nvSpPr>
+        <p:spPr>
+          <a:xfrm>
+            <a:off x="4084168" y="2167128"/>
+            <a:ext cx="731520" cy="0"/>
           </a:xfrm>
           <a:prstGeom prst="line">
             <a:avLst/>
           </a:prstGeom>
           <a:noFill/>
-          <a:ln w="12700">
+          <a:ln w="9525">
             <a:solidFill>
               <a:schemeClr val="accent1"/>
             </a:solidFill>
@@ -6755,37 +7376,14 @@
       </p:sp>
       <p:sp>
         <p:nvSpPr>
-          <p:cNvPr id="9" name="Bottom line R"/>
-          <p:cNvSpPr/>
-          <p:nvPr/>
-        </p:nvSpPr>
-        <p:spPr>
-          <a:xfrm>
-            <a:off x="6242152" y="3931920"/>
-            <a:ext cx="1042416" cy="0"/>
-          </a:xfrm>
-          <a:prstGeom prst="line">
-            <a:avLst/>
-          </a:prstGeom>
-          <a:noFill/>
-          <a:ln w="12700">
-            <a:solidFill>
-              <a:schemeClr val="accent1"/>
-            </a:solidFill>
-            <a:prstDash val="solid"/>
-          </a:ln>
-        </p:spPr>
-      </p:sp>
-      <p:sp>
-        <p:nvSpPr>
-          <p:cNvPr id="10" name="Bottom diamond"/>
-          <p:cNvSpPr/>
-          <p:nvPr/>
-        </p:nvSpPr>
-        <p:spPr>
-          <a:xfrm>
-            <a:off x="6040984" y="3877056"/>
-            <a:ext cx="109728" cy="109728"/>
+          <p:cNvPr id="7" name="Eyebrow diamond 1"/>
+          <p:cNvSpPr/>
+          <p:nvPr/>
+        </p:nvSpPr>
+        <p:spPr>
+          <a:xfrm>
+            <a:off x="8134960" y="2103120"/>
+            <a:ext cx="128016" cy="128016"/>
           </a:xfrm>
           <a:prstGeom prst="diamond">
             <a:avLst/>
@@ -6794,6 +7392,29 @@
             <a:schemeClr val="accent1"/>
           </a:solidFill>
           <a:ln w="12700">
+            <a:solidFill>
+              <a:schemeClr val="accent1"/>
+            </a:solidFill>
+            <a:prstDash val="solid"/>
+          </a:ln>
+        </p:spPr>
+      </p:sp>
+      <p:sp>
+        <p:nvSpPr>
+          <p:cNvPr id="8" name="Eyebrow line 1"/>
+          <p:cNvSpPr/>
+          <p:nvPr/>
+        </p:nvSpPr>
+        <p:spPr>
+          <a:xfrm>
+            <a:off x="7376008" y="2167128"/>
+            <a:ext cx="731520" cy="0"/>
+          </a:xfrm>
+          <a:prstGeom prst="line">
+            <a:avLst/>
+          </a:prstGeom>
+          <a:noFill/>
+          <a:ln w="9525">
             <a:solidFill>
               <a:schemeClr val="accent1"/>
             </a:solidFill>
@@ -6836,8 +7457,8 @@
         </p:nvSpPr>
         <p:spPr>
           <a:xfrm>
-            <a:off x="914400" y="1600200"/>
-            <a:ext cx="10362895" cy="640080"/>
+            <a:off x="1371600" y="1938528"/>
+            <a:ext cx="9448495" cy="457200"/>
           </a:xfrm>
           <a:prstGeom prst="rect">
             <a:avLst/>
@@ -6853,14 +7474,14 @@
               <a:buNone/>
             </a:pPr>
             <a:r>
-              <a:rPr lang="en-US" sz="2200" spc="1000" kern="0" dirty="0">
-                <a:solidFill>
-                  <a:schemeClr val="accent1"/>
+              <a:rPr lang="en-US" sz="1800" spc="1200" kern="0" dirty="0">
+                <a:solidFill>
+                  <a:schemeClr val="accent2"/>
                 </a:solidFill>
               </a:rPr>
               <a:t>제 2 순서</a:t>
             </a:r>
-            <a:endParaRPr lang="en-US" sz="2200" dirty="0"/>
+            <a:endParaRPr lang="en-US" sz="1800" dirty="0"/>
           </a:p>
         </p:txBody>
       </p:sp>
@@ -6874,8 +7495,8 @@
         </p:nvSpPr>
         <p:spPr>
           <a:xfrm>
-            <a:off x="914400" y="2377440"/>
-            <a:ext cx="10362895" cy="1280160"/>
+            <a:off x="731520" y="2468880"/>
+            <a:ext cx="10728655" cy="1463040"/>
           </a:xfrm>
           <a:prstGeom prst="rect">
             <a:avLst/>
@@ -6891,14 +7512,21 @@
               <a:buNone/>
             </a:pPr>
             <a:r>
-              <a:rPr lang="en-US" sz="6000" b="1" spc="600" kern="0" dirty="0">
-                <a:solidFill>
-                  <a:schemeClr val="bg1"/>
-                </a:solidFill>
+              <a:rPr lang="en-US" sz="6600" b="1" spc="1000" kern="0" dirty="0">
+                <a:solidFill>
+                  <a:schemeClr val="accent2"/>
+                </a:solidFill>
+                <a:effectLst>
+                  <a:glow rad="63500">
+                    <a:srgbClr val="D4AF5F">
+                      <a:alpha val="35000"/>
+                    </a:srgbClr>
+                  </a:glow>
+                </a:effectLst>
               </a:rPr>
               <a:t>국민의례</a:t>
             </a:r>
-            <a:endParaRPr lang="en-US" sz="6000" dirty="0"/>
+            <a:endParaRPr lang="en-US" sz="6600" dirty="0"/>
           </a:p>
         </p:txBody>
       </p:sp>
@@ -6912,8 +7540,8 @@
         </p:nvSpPr>
         <p:spPr>
           <a:xfrm>
-            <a:off x="1645920" y="4160520"/>
-            <a:ext cx="8899855" cy="1005840"/>
+            <a:off x="1645920" y="4114800"/>
+            <a:ext cx="8899855" cy="1097280"/>
           </a:xfrm>
           <a:prstGeom prst="rect">
             <a:avLst/>
@@ -6932,9 +7560,9 @@
               <a:buNone/>
             </a:pPr>
             <a:r>
-              <a:rPr lang="en-US" sz="2000" b="1" dirty="0">
-                <a:solidFill>
-                  <a:schemeClr val="accent1"/>
+              <a:rPr lang="en-US" sz="2000" b="1" spc="300" kern="0" dirty="0">
+                <a:solidFill>
+                  <a:schemeClr val="accent2"/>
                 </a:solidFill>
               </a:rPr>
               <a:t>참석자 전원</a:t>
@@ -6951,7 +7579,7 @@
             <a:r>
               <a:rPr lang="en-US" sz="2000" dirty="0">
                 <a:solidFill>
-                  <a:schemeClr val="accent2"/>
+                  <a:schemeClr val="bg1"/>
                 </a:solidFill>
               </a:rPr>
               <a:t>국기에 대한 경례 · 애국가 제창 · 순국선열 및 호국영령에 대한 묵념</a:t>
@@ -6962,60 +7590,14 @@
       </p:sp>
       <p:sp>
         <p:nvSpPr>
-          <p:cNvPr id="5" name="Top line L"/>
-          <p:cNvSpPr/>
-          <p:nvPr/>
-        </p:nvSpPr>
-        <p:spPr>
-          <a:xfrm>
-            <a:off x="4907128" y="2194560"/>
-            <a:ext cx="1042416" cy="0"/>
-          </a:xfrm>
-          <a:prstGeom prst="line">
-            <a:avLst/>
-          </a:prstGeom>
-          <a:noFill/>
-          <a:ln w="12700">
-            <a:solidFill>
-              <a:schemeClr val="accent1"/>
-            </a:solidFill>
-            <a:prstDash val="solid"/>
-          </a:ln>
-        </p:spPr>
-      </p:sp>
-      <p:sp>
-        <p:nvSpPr>
-          <p:cNvPr id="6" name="Top line R"/>
-          <p:cNvSpPr/>
-          <p:nvPr/>
-        </p:nvSpPr>
-        <p:spPr>
-          <a:xfrm>
-            <a:off x="6242152" y="2194560"/>
-            <a:ext cx="1042416" cy="0"/>
-          </a:xfrm>
-          <a:prstGeom prst="line">
-            <a:avLst/>
-          </a:prstGeom>
-          <a:noFill/>
-          <a:ln w="12700">
-            <a:solidFill>
-              <a:schemeClr val="accent1"/>
-            </a:solidFill>
-            <a:prstDash val="solid"/>
-          </a:ln>
-        </p:spPr>
-      </p:sp>
-      <p:sp>
-        <p:nvSpPr>
-          <p:cNvPr id="7" name="Top diamond"/>
-          <p:cNvSpPr/>
-          <p:nvPr/>
-        </p:nvSpPr>
-        <p:spPr>
-          <a:xfrm>
-            <a:off x="6040984" y="2139696"/>
-            <a:ext cx="109728" cy="109728"/>
+          <p:cNvPr id="5" name="Eyebrow diamond -1"/>
+          <p:cNvSpPr/>
+          <p:nvPr/>
+        </p:nvSpPr>
+        <p:spPr>
+          <a:xfrm>
+            <a:off x="3928720" y="2103120"/>
+            <a:ext cx="128016" cy="128016"/>
           </a:xfrm>
           <a:prstGeom prst="diamond">
             <a:avLst/>
@@ -7033,20 +7615,20 @@
       </p:sp>
       <p:sp>
         <p:nvSpPr>
-          <p:cNvPr id="8" name="Bottom line L"/>
-          <p:cNvSpPr/>
-          <p:nvPr/>
-        </p:nvSpPr>
-        <p:spPr>
-          <a:xfrm>
-            <a:off x="4907128" y="3931920"/>
-            <a:ext cx="1042416" cy="0"/>
+          <p:cNvPr id="6" name="Eyebrow line -1"/>
+          <p:cNvSpPr/>
+          <p:nvPr/>
+        </p:nvSpPr>
+        <p:spPr>
+          <a:xfrm>
+            <a:off x="4084168" y="2167128"/>
+            <a:ext cx="731520" cy="0"/>
           </a:xfrm>
           <a:prstGeom prst="line">
             <a:avLst/>
           </a:prstGeom>
           <a:noFill/>
-          <a:ln w="12700">
+          <a:ln w="9525">
             <a:solidFill>
               <a:schemeClr val="accent1"/>
             </a:solidFill>
@@ -7056,37 +7638,14 @@
       </p:sp>
       <p:sp>
         <p:nvSpPr>
-          <p:cNvPr id="9" name="Bottom line R"/>
-          <p:cNvSpPr/>
-          <p:nvPr/>
-        </p:nvSpPr>
-        <p:spPr>
-          <a:xfrm>
-            <a:off x="6242152" y="3931920"/>
-            <a:ext cx="1042416" cy="0"/>
-          </a:xfrm>
-          <a:prstGeom prst="line">
-            <a:avLst/>
-          </a:prstGeom>
-          <a:noFill/>
-          <a:ln w="12700">
-            <a:solidFill>
-              <a:schemeClr val="accent1"/>
-            </a:solidFill>
-            <a:prstDash val="solid"/>
-          </a:ln>
-        </p:spPr>
-      </p:sp>
-      <p:sp>
-        <p:nvSpPr>
-          <p:cNvPr id="10" name="Bottom diamond"/>
-          <p:cNvSpPr/>
-          <p:nvPr/>
-        </p:nvSpPr>
-        <p:spPr>
-          <a:xfrm>
-            <a:off x="6040984" y="3877056"/>
-            <a:ext cx="109728" cy="109728"/>
+          <p:cNvPr id="7" name="Eyebrow diamond 1"/>
+          <p:cNvSpPr/>
+          <p:nvPr/>
+        </p:nvSpPr>
+        <p:spPr>
+          <a:xfrm>
+            <a:off x="8134960" y="2103120"/>
+            <a:ext cx="128016" cy="128016"/>
           </a:xfrm>
           <a:prstGeom prst="diamond">
             <a:avLst/>
@@ -7095,6 +7654,29 @@
             <a:schemeClr val="accent1"/>
           </a:solidFill>
           <a:ln w="12700">
+            <a:solidFill>
+              <a:schemeClr val="accent1"/>
+            </a:solidFill>
+            <a:prstDash val="solid"/>
+          </a:ln>
+        </p:spPr>
+      </p:sp>
+      <p:sp>
+        <p:nvSpPr>
+          <p:cNvPr id="8" name="Eyebrow line 1"/>
+          <p:cNvSpPr/>
+          <p:nvPr/>
+        </p:nvSpPr>
+        <p:spPr>
+          <a:xfrm>
+            <a:off x="7376008" y="2167128"/>
+            <a:ext cx="731520" cy="0"/>
+          </a:xfrm>
+          <a:prstGeom prst="line">
+            <a:avLst/>
+          </a:prstGeom>
+          <a:noFill/>
+          <a:ln w="9525">
             <a:solidFill>
               <a:schemeClr val="accent1"/>
             </a:solidFill>
@@ -7137,8 +7719,8 @@
         </p:nvSpPr>
         <p:spPr>
           <a:xfrm>
-            <a:off x="914400" y="1600200"/>
-            <a:ext cx="10362895" cy="640080"/>
+            <a:off x="1371600" y="1938528"/>
+            <a:ext cx="9448495" cy="457200"/>
           </a:xfrm>
           <a:prstGeom prst="rect">
             <a:avLst/>
@@ -7154,14 +7736,14 @@
               <a:buNone/>
             </a:pPr>
             <a:r>
-              <a:rPr lang="en-US" sz="2200" spc="1000" kern="0" dirty="0">
-                <a:solidFill>
-                  <a:schemeClr val="accent1"/>
+              <a:rPr lang="en-US" sz="1800" spc="1200" kern="0" dirty="0">
+                <a:solidFill>
+                  <a:schemeClr val="accent2"/>
                 </a:solidFill>
               </a:rPr>
               <a:t>제 3 순서</a:t>
             </a:r>
-            <a:endParaRPr lang="en-US" sz="2200" dirty="0"/>
+            <a:endParaRPr lang="en-US" sz="1800" dirty="0"/>
           </a:p>
         </p:txBody>
       </p:sp>
@@ -7175,8 +7757,8 @@
         </p:nvSpPr>
         <p:spPr>
           <a:xfrm>
-            <a:off x="914400" y="2377440"/>
-            <a:ext cx="10362895" cy="1280160"/>
+            <a:off x="731520" y="2468880"/>
+            <a:ext cx="10728655" cy="1463040"/>
           </a:xfrm>
           <a:prstGeom prst="rect">
             <a:avLst/>
@@ -7192,14 +7774,21 @@
               <a:buNone/>
             </a:pPr>
             <a:r>
-              <a:rPr lang="en-US" sz="6000" b="1" spc="600" kern="0" dirty="0">
-                <a:solidFill>
-                  <a:schemeClr val="bg1"/>
-                </a:solidFill>
+              <a:rPr lang="en-US" sz="6600" b="1" spc="1000" kern="0" dirty="0">
+                <a:solidFill>
+                  <a:schemeClr val="accent2"/>
+                </a:solidFill>
+                <a:effectLst>
+                  <a:glow rad="63500">
+                    <a:srgbClr val="D4AF5F">
+                      <a:alpha val="35000"/>
+                    </a:srgbClr>
+                  </a:glow>
+                </a:effectLst>
               </a:rPr>
               <a:t>내빈 소개</a:t>
             </a:r>
-            <a:endParaRPr lang="en-US" sz="6000" dirty="0"/>
+            <a:endParaRPr lang="en-US" sz="6600" dirty="0"/>
           </a:p>
         </p:txBody>
       </p:sp>
@@ -7213,8 +7802,8 @@
         </p:nvSpPr>
         <p:spPr>
           <a:xfrm>
-            <a:off x="1645920" y="4160520"/>
-            <a:ext cx="8899855" cy="1005840"/>
+            <a:off x="1645920" y="4114800"/>
+            <a:ext cx="8899855" cy="1097280"/>
           </a:xfrm>
           <a:prstGeom prst="rect">
             <a:avLst/>
@@ -7233,9 +7822,9 @@
               <a:buNone/>
             </a:pPr>
             <a:r>
-              <a:rPr lang="en-US" sz="2000" b="1" dirty="0">
-                <a:solidFill>
-                  <a:schemeClr val="accent1"/>
+              <a:rPr lang="en-US" sz="2000" b="1" spc="300" kern="0" dirty="0">
+                <a:solidFill>
+                  <a:schemeClr val="accent2"/>
                 </a:solidFill>
               </a:rPr>
               <a:t>사회자</a:t>
@@ -7252,7 +7841,7 @@
             <a:r>
               <a:rPr lang="en-US" sz="2000" dirty="0">
                 <a:solidFill>
-                  <a:schemeClr val="accent2"/>
+                  <a:schemeClr val="bg1"/>
                 </a:solidFill>
               </a:rPr>
               <a:t>자리를 빛내 주신 내빈 여러분을 소개합니다.</a:t>
@@ -7263,60 +7852,14 @@
       </p:sp>
       <p:sp>
         <p:nvSpPr>
-          <p:cNvPr id="5" name="Top line L"/>
-          <p:cNvSpPr/>
-          <p:nvPr/>
-        </p:nvSpPr>
-        <p:spPr>
-          <a:xfrm>
-            <a:off x="4907128" y="2194560"/>
-            <a:ext cx="1042416" cy="0"/>
-          </a:xfrm>
-          <a:prstGeom prst="line">
-            <a:avLst/>
-          </a:prstGeom>
-          <a:noFill/>
-          <a:ln w="12700">
-            <a:solidFill>
-              <a:schemeClr val="accent1"/>
-            </a:solidFill>
-            <a:prstDash val="solid"/>
-          </a:ln>
-        </p:spPr>
-      </p:sp>
-      <p:sp>
-        <p:nvSpPr>
-          <p:cNvPr id="6" name="Top line R"/>
-          <p:cNvSpPr/>
-          <p:nvPr/>
-        </p:nvSpPr>
-        <p:spPr>
-          <a:xfrm>
-            <a:off x="6242152" y="2194560"/>
-            <a:ext cx="1042416" cy="0"/>
-          </a:xfrm>
-          <a:prstGeom prst="line">
-            <a:avLst/>
-          </a:prstGeom>
-          <a:noFill/>
-          <a:ln w="12700">
-            <a:solidFill>
-              <a:schemeClr val="accent1"/>
-            </a:solidFill>
-            <a:prstDash val="solid"/>
-          </a:ln>
-        </p:spPr>
-      </p:sp>
-      <p:sp>
-        <p:nvSpPr>
-          <p:cNvPr id="7" name="Top diamond"/>
-          <p:cNvSpPr/>
-          <p:nvPr/>
-        </p:nvSpPr>
-        <p:spPr>
-          <a:xfrm>
-            <a:off x="6040984" y="2139696"/>
-            <a:ext cx="109728" cy="109728"/>
+          <p:cNvPr id="5" name="Eyebrow diamond -1"/>
+          <p:cNvSpPr/>
+          <p:nvPr/>
+        </p:nvSpPr>
+        <p:spPr>
+          <a:xfrm>
+            <a:off x="3928720" y="2103120"/>
+            <a:ext cx="128016" cy="128016"/>
           </a:xfrm>
           <a:prstGeom prst="diamond">
             <a:avLst/>
@@ -7334,20 +7877,20 @@
       </p:sp>
       <p:sp>
         <p:nvSpPr>
-          <p:cNvPr id="8" name="Bottom line L"/>
-          <p:cNvSpPr/>
-          <p:nvPr/>
-        </p:nvSpPr>
-        <p:spPr>
-          <a:xfrm>
-            <a:off x="4907128" y="3931920"/>
-            <a:ext cx="1042416" cy="0"/>
+          <p:cNvPr id="6" name="Eyebrow line -1"/>
+          <p:cNvSpPr/>
+          <p:nvPr/>
+        </p:nvSpPr>
+        <p:spPr>
+          <a:xfrm>
+            <a:off x="4084168" y="2167128"/>
+            <a:ext cx="731520" cy="0"/>
           </a:xfrm>
           <a:prstGeom prst="line">
             <a:avLst/>
           </a:prstGeom>
           <a:noFill/>
-          <a:ln w="12700">
+          <a:ln w="9525">
             <a:solidFill>
               <a:schemeClr val="accent1"/>
             </a:solidFill>
@@ -7357,37 +7900,14 @@
       </p:sp>
       <p:sp>
         <p:nvSpPr>
-          <p:cNvPr id="9" name="Bottom line R"/>
-          <p:cNvSpPr/>
-          <p:nvPr/>
-        </p:nvSpPr>
-        <p:spPr>
-          <a:xfrm>
-            <a:off x="6242152" y="3931920"/>
-            <a:ext cx="1042416" cy="0"/>
-          </a:xfrm>
-          <a:prstGeom prst="line">
-            <a:avLst/>
-          </a:prstGeom>
-          <a:noFill/>
-          <a:ln w="12700">
-            <a:solidFill>
-              <a:schemeClr val="accent1"/>
-            </a:solidFill>
-            <a:prstDash val="solid"/>
-          </a:ln>
-        </p:spPr>
-      </p:sp>
-      <p:sp>
-        <p:nvSpPr>
-          <p:cNvPr id="10" name="Bottom diamond"/>
-          <p:cNvSpPr/>
-          <p:nvPr/>
-        </p:nvSpPr>
-        <p:spPr>
-          <a:xfrm>
-            <a:off x="6040984" y="3877056"/>
-            <a:ext cx="109728" cy="109728"/>
+          <p:cNvPr id="7" name="Eyebrow diamond 1"/>
+          <p:cNvSpPr/>
+          <p:nvPr/>
+        </p:nvSpPr>
+        <p:spPr>
+          <a:xfrm>
+            <a:off x="8134960" y="2103120"/>
+            <a:ext cx="128016" cy="128016"/>
           </a:xfrm>
           <a:prstGeom prst="diamond">
             <a:avLst/>
@@ -7396,6 +7916,29 @@
             <a:schemeClr val="accent1"/>
           </a:solidFill>
           <a:ln w="12700">
+            <a:solidFill>
+              <a:schemeClr val="accent1"/>
+            </a:solidFill>
+            <a:prstDash val="solid"/>
+          </a:ln>
+        </p:spPr>
+      </p:sp>
+      <p:sp>
+        <p:nvSpPr>
+          <p:cNvPr id="8" name="Eyebrow line 1"/>
+          <p:cNvSpPr/>
+          <p:nvPr/>
+        </p:nvSpPr>
+        <p:spPr>
+          <a:xfrm>
+            <a:off x="7376008" y="2167128"/>
+            <a:ext cx="731520" cy="0"/>
+          </a:xfrm>
+          <a:prstGeom prst="line">
+            <a:avLst/>
+          </a:prstGeom>
+          <a:noFill/>
+          <a:ln w="9525">
             <a:solidFill>
               <a:schemeClr val="accent1"/>
             </a:solidFill>
@@ -7438,8 +7981,8 @@
         </p:nvSpPr>
         <p:spPr>
           <a:xfrm>
-            <a:off x="914400" y="1600200"/>
-            <a:ext cx="10362895" cy="640080"/>
+            <a:off x="1371600" y="1938528"/>
+            <a:ext cx="9448495" cy="457200"/>
           </a:xfrm>
           <a:prstGeom prst="rect">
             <a:avLst/>
@@ -7455,14 +7998,14 @@
               <a:buNone/>
             </a:pPr>
             <a:r>
-              <a:rPr lang="en-US" sz="2200" spc="1000" kern="0" dirty="0">
-                <a:solidFill>
-                  <a:schemeClr val="accent1"/>
+              <a:rPr lang="en-US" sz="1800" spc="1200" kern="0" dirty="0">
+                <a:solidFill>
+                  <a:schemeClr val="accent2"/>
                 </a:solidFill>
               </a:rPr>
               <a:t>제 4 순서</a:t>
             </a:r>
-            <a:endParaRPr lang="en-US" sz="2200" dirty="0"/>
+            <a:endParaRPr lang="en-US" sz="1800" dirty="0"/>
           </a:p>
         </p:txBody>
       </p:sp>
@@ -7476,8 +8019,8 @@
         </p:nvSpPr>
         <p:spPr>
           <a:xfrm>
-            <a:off x="914400" y="2377440"/>
-            <a:ext cx="10362895" cy="1280160"/>
+            <a:off x="731520" y="2468880"/>
+            <a:ext cx="10728655" cy="1463040"/>
           </a:xfrm>
           <a:prstGeom prst="rect">
             <a:avLst/>
@@ -7493,14 +8036,21 @@
               <a:buNone/>
             </a:pPr>
             <a:r>
-              <a:rPr lang="en-US" sz="6000" b="1" spc="600" kern="0" dirty="0">
-                <a:solidFill>
-                  <a:schemeClr val="bg1"/>
-                </a:solidFill>
+              <a:rPr lang="en-US" sz="6600" b="1" spc="1000" kern="0" dirty="0">
+                <a:solidFill>
+                  <a:schemeClr val="accent2"/>
+                </a:solidFill>
+                <a:effectLst>
+                  <a:glow rad="63500">
+                    <a:srgbClr val="D4AF5F">
+                      <a:alpha val="35000"/>
+                    </a:srgbClr>
+                  </a:glow>
+                </a:effectLst>
               </a:rPr>
               <a:t>경과보고</a:t>
             </a:r>
-            <a:endParaRPr lang="en-US" sz="6000" dirty="0"/>
+            <a:endParaRPr lang="en-US" sz="6600" dirty="0"/>
           </a:p>
         </p:txBody>
       </p:sp>
@@ -7514,8 +8064,8 @@
         </p:nvSpPr>
         <p:spPr>
           <a:xfrm>
-            <a:off x="1645920" y="4160520"/>
-            <a:ext cx="8899855" cy="1005840"/>
+            <a:off x="1645920" y="4114800"/>
+            <a:ext cx="8899855" cy="1097280"/>
           </a:xfrm>
           <a:prstGeom prst="rect">
             <a:avLst/>
@@ -7534,9 +8084,9 @@
               <a:buNone/>
             </a:pPr>
             <a:r>
-              <a:rPr lang="en-US" sz="2000" b="1" dirty="0">
-                <a:solidFill>
-                  <a:schemeClr val="accent1"/>
+              <a:rPr lang="en-US" sz="2000" b="1" spc="300" kern="0" dirty="0">
+                <a:solidFill>
+                  <a:schemeClr val="accent2"/>
                 </a:solidFill>
               </a:rPr>
               <a:t>사무총장</a:t>
@@ -7553,7 +8103,7 @@
             <a:r>
               <a:rPr lang="en-US" sz="2000" dirty="0">
                 <a:solidFill>
-                  <a:schemeClr val="accent2"/>
+                  <a:schemeClr val="bg1"/>
                 </a:solidFill>
               </a:rPr>
               <a:t>창립 이후 30년의 발자취를 보고드립니다.</a:t>
@@ -7564,60 +8114,14 @@
       </p:sp>
       <p:sp>
         <p:nvSpPr>
-          <p:cNvPr id="5" name="Top line L"/>
-          <p:cNvSpPr/>
-          <p:nvPr/>
-        </p:nvSpPr>
-        <p:spPr>
-          <a:xfrm>
-            <a:off x="4907128" y="2194560"/>
-            <a:ext cx="1042416" cy="0"/>
-          </a:xfrm>
-          <a:prstGeom prst="line">
-            <a:avLst/>
-          </a:prstGeom>
-          <a:noFill/>
-          <a:ln w="12700">
-            <a:solidFill>
-              <a:schemeClr val="accent1"/>
-            </a:solidFill>
-            <a:prstDash val="solid"/>
-          </a:ln>
-        </p:spPr>
-      </p:sp>
-      <p:sp>
-        <p:nvSpPr>
-          <p:cNvPr id="6" name="Top line R"/>
-          <p:cNvSpPr/>
-          <p:nvPr/>
-        </p:nvSpPr>
-        <p:spPr>
-          <a:xfrm>
-            <a:off x="6242152" y="2194560"/>
-            <a:ext cx="1042416" cy="0"/>
-          </a:xfrm>
-          <a:prstGeom prst="line">
-            <a:avLst/>
-          </a:prstGeom>
-          <a:noFill/>
-          <a:ln w="12700">
-            <a:solidFill>
-              <a:schemeClr val="accent1"/>
-            </a:solidFill>
-            <a:prstDash val="solid"/>
-          </a:ln>
-        </p:spPr>
-      </p:sp>
-      <p:sp>
-        <p:nvSpPr>
-          <p:cNvPr id="7" name="Top diamond"/>
-          <p:cNvSpPr/>
-          <p:nvPr/>
-        </p:nvSpPr>
-        <p:spPr>
-          <a:xfrm>
-            <a:off x="6040984" y="2139696"/>
-            <a:ext cx="109728" cy="109728"/>
+          <p:cNvPr id="5" name="Eyebrow diamond -1"/>
+          <p:cNvSpPr/>
+          <p:nvPr/>
+        </p:nvSpPr>
+        <p:spPr>
+          <a:xfrm>
+            <a:off x="3928720" y="2103120"/>
+            <a:ext cx="128016" cy="128016"/>
           </a:xfrm>
           <a:prstGeom prst="diamond">
             <a:avLst/>
@@ -7635,20 +8139,20 @@
       </p:sp>
       <p:sp>
         <p:nvSpPr>
-          <p:cNvPr id="8" name="Bottom line L"/>
-          <p:cNvSpPr/>
-          <p:nvPr/>
-        </p:nvSpPr>
-        <p:spPr>
-          <a:xfrm>
-            <a:off x="4907128" y="3931920"/>
-            <a:ext cx="1042416" cy="0"/>
+          <p:cNvPr id="6" name="Eyebrow line -1"/>
+          <p:cNvSpPr/>
+          <p:nvPr/>
+        </p:nvSpPr>
+        <p:spPr>
+          <a:xfrm>
+            <a:off x="4084168" y="2167128"/>
+            <a:ext cx="731520" cy="0"/>
           </a:xfrm>
           <a:prstGeom prst="line">
             <a:avLst/>
           </a:prstGeom>
           <a:noFill/>
-          <a:ln w="12700">
+          <a:ln w="9525">
             <a:solidFill>
               <a:schemeClr val="accent1"/>
             </a:solidFill>
@@ -7658,37 +8162,14 @@
       </p:sp>
       <p:sp>
         <p:nvSpPr>
-          <p:cNvPr id="9" name="Bottom line R"/>
-          <p:cNvSpPr/>
-          <p:nvPr/>
-        </p:nvSpPr>
-        <p:spPr>
-          <a:xfrm>
-            <a:off x="6242152" y="3931920"/>
-            <a:ext cx="1042416" cy="0"/>
-          </a:xfrm>
-          <a:prstGeom prst="line">
-            <a:avLst/>
-          </a:prstGeom>
-          <a:noFill/>
-          <a:ln w="12700">
-            <a:solidFill>
-              <a:schemeClr val="accent1"/>
-            </a:solidFill>
-            <a:prstDash val="solid"/>
-          </a:ln>
-        </p:spPr>
-      </p:sp>
-      <p:sp>
-        <p:nvSpPr>
-          <p:cNvPr id="10" name="Bottom diamond"/>
-          <p:cNvSpPr/>
-          <p:nvPr/>
-        </p:nvSpPr>
-        <p:spPr>
-          <a:xfrm>
-            <a:off x="6040984" y="3877056"/>
-            <a:ext cx="109728" cy="109728"/>
+          <p:cNvPr id="7" name="Eyebrow diamond 1"/>
+          <p:cNvSpPr/>
+          <p:nvPr/>
+        </p:nvSpPr>
+        <p:spPr>
+          <a:xfrm>
+            <a:off x="8134960" y="2103120"/>
+            <a:ext cx="128016" cy="128016"/>
           </a:xfrm>
           <a:prstGeom prst="diamond">
             <a:avLst/>
@@ -7697,6 +8178,29 @@
             <a:schemeClr val="accent1"/>
           </a:solidFill>
           <a:ln w="12700">
+            <a:solidFill>
+              <a:schemeClr val="accent1"/>
+            </a:solidFill>
+            <a:prstDash val="solid"/>
+          </a:ln>
+        </p:spPr>
+      </p:sp>
+      <p:sp>
+        <p:nvSpPr>
+          <p:cNvPr id="8" name="Eyebrow line 1"/>
+          <p:cNvSpPr/>
+          <p:nvPr/>
+        </p:nvSpPr>
+        <p:spPr>
+          <a:xfrm>
+            <a:off x="7376008" y="2167128"/>
+            <a:ext cx="731520" cy="0"/>
+          </a:xfrm>
+          <a:prstGeom prst="line">
+            <a:avLst/>
+          </a:prstGeom>
+          <a:noFill/>
+          <a:ln w="9525">
             <a:solidFill>
               <a:schemeClr val="accent1"/>
             </a:solidFill>
@@ -7739,8 +8243,8 @@
         </p:nvSpPr>
         <p:spPr>
           <a:xfrm>
-            <a:off x="914400" y="1600200"/>
-            <a:ext cx="10362895" cy="640080"/>
+            <a:off x="1371600" y="1938528"/>
+            <a:ext cx="9448495" cy="457200"/>
           </a:xfrm>
           <a:prstGeom prst="rect">
             <a:avLst/>
@@ -7756,14 +8260,14 @@
               <a:buNone/>
             </a:pPr>
             <a:r>
-              <a:rPr lang="en-US" sz="2200" spc="1000" kern="0" dirty="0">
-                <a:solidFill>
-                  <a:schemeClr val="accent1"/>
+              <a:rPr lang="en-US" sz="1800" spc="1200" kern="0" dirty="0">
+                <a:solidFill>
+                  <a:schemeClr val="accent2"/>
                 </a:solidFill>
               </a:rPr>
               <a:t>제 5 순서</a:t>
             </a:r>
-            <a:endParaRPr lang="en-US" sz="2200" dirty="0"/>
+            <a:endParaRPr lang="en-US" sz="1800" dirty="0"/>
           </a:p>
         </p:txBody>
       </p:sp>
@@ -7777,8 +8281,8 @@
         </p:nvSpPr>
         <p:spPr>
           <a:xfrm>
-            <a:off x="914400" y="2377440"/>
-            <a:ext cx="10362895" cy="1280160"/>
+            <a:off x="731520" y="2468880"/>
+            <a:ext cx="10728655" cy="1463040"/>
           </a:xfrm>
           <a:prstGeom prst="rect">
             <a:avLst/>
@@ -7794,14 +8298,21 @@
               <a:buNone/>
             </a:pPr>
             <a:r>
-              <a:rPr lang="en-US" sz="6000" b="1" spc="600" kern="0" dirty="0">
-                <a:solidFill>
-                  <a:schemeClr val="bg1"/>
-                </a:solidFill>
+              <a:rPr lang="en-US" sz="6600" b="1" spc="1000" kern="0" dirty="0">
+                <a:solidFill>
+                  <a:schemeClr val="accent2"/>
+                </a:solidFill>
+                <a:effectLst>
+                  <a:glow rad="63500">
+                    <a:srgbClr val="D4AF5F">
+                      <a:alpha val="35000"/>
+                    </a:srgbClr>
+                  </a:glow>
+                </a:effectLst>
               </a:rPr>
               <a:t>기념사</a:t>
             </a:r>
-            <a:endParaRPr lang="en-US" sz="6000" dirty="0"/>
+            <a:endParaRPr lang="en-US" sz="6600" dirty="0"/>
           </a:p>
         </p:txBody>
       </p:sp>
@@ -7815,8 +8326,8 @@
         </p:nvSpPr>
         <p:spPr>
           <a:xfrm>
-            <a:off x="1645920" y="4160520"/>
-            <a:ext cx="8899855" cy="1005840"/>
+            <a:off x="1645920" y="4114800"/>
+            <a:ext cx="8899855" cy="1097280"/>
           </a:xfrm>
           <a:prstGeom prst="rect">
             <a:avLst/>
@@ -7835,9 +8346,9 @@
               <a:buNone/>
             </a:pPr>
             <a:r>
-              <a:rPr lang="en-US" sz="2000" b="1" dirty="0">
-                <a:solidFill>
-                  <a:schemeClr val="accent1"/>
+              <a:rPr lang="en-US" sz="2000" b="1" spc="300" kern="0" dirty="0">
+                <a:solidFill>
+                  <a:schemeClr val="accent2"/>
                 </a:solidFill>
               </a:rPr>
               <a:t>회장</a:t>
@@ -7854,7 +8365,7 @@
             <a:r>
               <a:rPr lang="en-US" sz="2000" dirty="0">
                 <a:solidFill>
-                  <a:schemeClr val="accent2"/>
+                  <a:schemeClr val="bg1"/>
                 </a:solidFill>
               </a:rPr>
               <a:t>창립 30주년을 맞이하는 소회와 비전</a:t>
@@ -7865,60 +8376,14 @@
       </p:sp>
       <p:sp>
         <p:nvSpPr>
-          <p:cNvPr id="5" name="Top line L"/>
-          <p:cNvSpPr/>
-          <p:nvPr/>
-        </p:nvSpPr>
-        <p:spPr>
-          <a:xfrm>
-            <a:off x="4907128" y="2194560"/>
-            <a:ext cx="1042416" cy="0"/>
-          </a:xfrm>
-          <a:prstGeom prst="line">
-            <a:avLst/>
-          </a:prstGeom>
-          <a:noFill/>
-          <a:ln w="12700">
-            <a:solidFill>
-              <a:schemeClr val="accent1"/>
-            </a:solidFill>
-            <a:prstDash val="solid"/>
-          </a:ln>
-        </p:spPr>
-      </p:sp>
-      <p:sp>
-        <p:nvSpPr>
-          <p:cNvPr id="6" name="Top line R"/>
-          <p:cNvSpPr/>
-          <p:nvPr/>
-        </p:nvSpPr>
-        <p:spPr>
-          <a:xfrm>
-            <a:off x="6242152" y="2194560"/>
-            <a:ext cx="1042416" cy="0"/>
-          </a:xfrm>
-          <a:prstGeom prst="line">
-            <a:avLst/>
-          </a:prstGeom>
-          <a:noFill/>
-          <a:ln w="12700">
-            <a:solidFill>
-              <a:schemeClr val="accent1"/>
-            </a:solidFill>
-            <a:prstDash val="solid"/>
-          </a:ln>
-        </p:spPr>
-      </p:sp>
-      <p:sp>
-        <p:nvSpPr>
-          <p:cNvPr id="7" name="Top diamond"/>
-          <p:cNvSpPr/>
-          <p:nvPr/>
-        </p:nvSpPr>
-        <p:spPr>
-          <a:xfrm>
-            <a:off x="6040984" y="2139696"/>
-            <a:ext cx="109728" cy="109728"/>
+          <p:cNvPr id="5" name="Eyebrow diamond -1"/>
+          <p:cNvSpPr/>
+          <p:nvPr/>
+        </p:nvSpPr>
+        <p:spPr>
+          <a:xfrm>
+            <a:off x="3928720" y="2103120"/>
+            <a:ext cx="128016" cy="128016"/>
           </a:xfrm>
           <a:prstGeom prst="diamond">
             <a:avLst/>
@@ -7936,20 +8401,20 @@
       </p:sp>
       <p:sp>
         <p:nvSpPr>
-          <p:cNvPr id="8" name="Bottom line L"/>
-          <p:cNvSpPr/>
-          <p:nvPr/>
-        </p:nvSpPr>
-        <p:spPr>
-          <a:xfrm>
-            <a:off x="4907128" y="3931920"/>
-            <a:ext cx="1042416" cy="0"/>
+          <p:cNvPr id="6" name="Eyebrow line -1"/>
+          <p:cNvSpPr/>
+          <p:nvPr/>
+        </p:nvSpPr>
+        <p:spPr>
+          <a:xfrm>
+            <a:off x="4084168" y="2167128"/>
+            <a:ext cx="731520" cy="0"/>
           </a:xfrm>
           <a:prstGeom prst="line">
             <a:avLst/>
           </a:prstGeom>
           <a:noFill/>
-          <a:ln w="12700">
+          <a:ln w="9525">
             <a:solidFill>
               <a:schemeClr val="accent1"/>
             </a:solidFill>
@@ -7959,37 +8424,14 @@
       </p:sp>
       <p:sp>
         <p:nvSpPr>
-          <p:cNvPr id="9" name="Bottom line R"/>
-          <p:cNvSpPr/>
-          <p:nvPr/>
-        </p:nvSpPr>
-        <p:spPr>
-          <a:xfrm>
-            <a:off x="6242152" y="3931920"/>
-            <a:ext cx="1042416" cy="0"/>
-          </a:xfrm>
-          <a:prstGeom prst="line">
-            <a:avLst/>
-          </a:prstGeom>
-          <a:noFill/>
-          <a:ln w="12700">
-            <a:solidFill>
-              <a:schemeClr val="accent1"/>
-            </a:solidFill>
-            <a:prstDash val="solid"/>
-          </a:ln>
-        </p:spPr>
-      </p:sp>
-      <p:sp>
-        <p:nvSpPr>
-          <p:cNvPr id="10" name="Bottom diamond"/>
-          <p:cNvSpPr/>
-          <p:nvPr/>
-        </p:nvSpPr>
-        <p:spPr>
-          <a:xfrm>
-            <a:off x="6040984" y="3877056"/>
-            <a:ext cx="109728" cy="109728"/>
+          <p:cNvPr id="7" name="Eyebrow diamond 1"/>
+          <p:cNvSpPr/>
+          <p:nvPr/>
+        </p:nvSpPr>
+        <p:spPr>
+          <a:xfrm>
+            <a:off x="8134960" y="2103120"/>
+            <a:ext cx="128016" cy="128016"/>
           </a:xfrm>
           <a:prstGeom prst="diamond">
             <a:avLst/>
@@ -7998,6 +8440,29 @@
             <a:schemeClr val="accent1"/>
           </a:solidFill>
           <a:ln w="12700">
+            <a:solidFill>
+              <a:schemeClr val="accent1"/>
+            </a:solidFill>
+            <a:prstDash val="solid"/>
+          </a:ln>
+        </p:spPr>
+      </p:sp>
+      <p:sp>
+        <p:nvSpPr>
+          <p:cNvPr id="8" name="Eyebrow line 1"/>
+          <p:cNvSpPr/>
+          <p:nvPr/>
+        </p:nvSpPr>
+        <p:spPr>
+          <a:xfrm>
+            <a:off x="7376008" y="2167128"/>
+            <a:ext cx="731520" cy="0"/>
+          </a:xfrm>
+          <a:prstGeom prst="line">
+            <a:avLst/>
+          </a:prstGeom>
+          <a:noFill/>
+          <a:ln w="9525">
             <a:solidFill>
               <a:schemeClr val="accent1"/>
             </a:solidFill>
@@ -8040,8 +8505,8 @@
         </p:nvSpPr>
         <p:spPr>
           <a:xfrm>
-            <a:off x="914400" y="1600200"/>
-            <a:ext cx="10362895" cy="640080"/>
+            <a:off x="1371600" y="1938528"/>
+            <a:ext cx="9448495" cy="457200"/>
           </a:xfrm>
           <a:prstGeom prst="rect">
             <a:avLst/>
@@ -8057,14 +8522,14 @@
               <a:buNone/>
             </a:pPr>
             <a:r>
-              <a:rPr lang="en-US" sz="2200" spc="1000" kern="0" dirty="0">
-                <a:solidFill>
-                  <a:schemeClr val="accent1"/>
+              <a:rPr lang="en-US" sz="1800" spc="1200" kern="0" dirty="0">
+                <a:solidFill>
+                  <a:schemeClr val="accent2"/>
                 </a:solidFill>
               </a:rPr>
               <a:t>제 6 순서</a:t>
             </a:r>
-            <a:endParaRPr lang="en-US" sz="2200" dirty="0"/>
+            <a:endParaRPr lang="en-US" sz="1800" dirty="0"/>
           </a:p>
         </p:txBody>
       </p:sp>
@@ -8078,8 +8543,8 @@
         </p:nvSpPr>
         <p:spPr>
           <a:xfrm>
-            <a:off x="914400" y="2377440"/>
-            <a:ext cx="10362895" cy="1280160"/>
+            <a:off x="731520" y="2468880"/>
+            <a:ext cx="10728655" cy="1463040"/>
           </a:xfrm>
           <a:prstGeom prst="rect">
             <a:avLst/>
@@ -8095,14 +8560,21 @@
               <a:buNone/>
             </a:pPr>
             <a:r>
-              <a:rPr lang="en-US" sz="6000" b="1" spc="600" kern="0" dirty="0">
-                <a:solidFill>
-                  <a:schemeClr val="bg1"/>
-                </a:solidFill>
+              <a:rPr lang="en-US" sz="6600" b="1" spc="1000" kern="0" dirty="0">
+                <a:solidFill>
+                  <a:schemeClr val="accent2"/>
+                </a:solidFill>
+                <a:effectLst>
+                  <a:glow rad="63500">
+                    <a:srgbClr val="D4AF5F">
+                      <a:alpha val="35000"/>
+                    </a:srgbClr>
+                  </a:glow>
+                </a:effectLst>
               </a:rPr>
               <a:t>축사</a:t>
             </a:r>
-            <a:endParaRPr lang="en-US" sz="6000" dirty="0"/>
+            <a:endParaRPr lang="en-US" sz="6600" dirty="0"/>
           </a:p>
         </p:txBody>
       </p:sp>
@@ -8116,8 +8588,8 @@
         </p:nvSpPr>
         <p:spPr>
           <a:xfrm>
-            <a:off x="1645920" y="4160520"/>
-            <a:ext cx="8899855" cy="1005840"/>
+            <a:off x="1645920" y="4114800"/>
+            <a:ext cx="8899855" cy="1097280"/>
           </a:xfrm>
           <a:prstGeom prst="rect">
             <a:avLst/>
@@ -8136,9 +8608,9 @@
               <a:buNone/>
             </a:pPr>
             <a:r>
-              <a:rPr lang="en-US" sz="2000" b="1" dirty="0">
-                <a:solidFill>
-                  <a:schemeClr val="accent1"/>
+              <a:rPr lang="en-US" sz="2000" b="1" spc="300" kern="0" dirty="0">
+                <a:solidFill>
+                  <a:schemeClr val="accent2"/>
                 </a:solidFill>
               </a:rPr>
               <a:t>내빈 대표</a:t>
@@ -8155,7 +8627,7 @@
             <a:r>
               <a:rPr lang="en-US" sz="2000" dirty="0">
                 <a:solidFill>
-                  <a:schemeClr val="accent2"/>
+                  <a:schemeClr val="bg1"/>
                 </a:solidFill>
               </a:rPr>
               <a:t>축하의 말씀을 전해 주십니다.</a:t>
@@ -8166,60 +8638,14 @@
       </p:sp>
       <p:sp>
         <p:nvSpPr>
-          <p:cNvPr id="5" name="Top line L"/>
-          <p:cNvSpPr/>
-          <p:nvPr/>
-        </p:nvSpPr>
-        <p:spPr>
-          <a:xfrm>
-            <a:off x="4907128" y="2194560"/>
-            <a:ext cx="1042416" cy="0"/>
-          </a:xfrm>
-          <a:prstGeom prst="line">
-            <a:avLst/>
-          </a:prstGeom>
-          <a:noFill/>
-          <a:ln w="12700">
-            <a:solidFill>
-              <a:schemeClr val="accent1"/>
-            </a:solidFill>
-            <a:prstDash val="solid"/>
-          </a:ln>
-        </p:spPr>
-      </p:sp>
-      <p:sp>
-        <p:nvSpPr>
-          <p:cNvPr id="6" name="Top line R"/>
-          <p:cNvSpPr/>
-          <p:nvPr/>
-        </p:nvSpPr>
-        <p:spPr>
-          <a:xfrm>
-            <a:off x="6242152" y="2194560"/>
-            <a:ext cx="1042416" cy="0"/>
-          </a:xfrm>
-          <a:prstGeom prst="line">
-            <a:avLst/>
-          </a:prstGeom>
-          <a:noFill/>
-          <a:ln w="12700">
-            <a:solidFill>
-              <a:schemeClr val="accent1"/>
-            </a:solidFill>
-            <a:prstDash val="solid"/>
-          </a:ln>
-        </p:spPr>
-      </p:sp>
-      <p:sp>
-        <p:nvSpPr>
-          <p:cNvPr id="7" name="Top diamond"/>
-          <p:cNvSpPr/>
-          <p:nvPr/>
-        </p:nvSpPr>
-        <p:spPr>
-          <a:xfrm>
-            <a:off x="6040984" y="2139696"/>
-            <a:ext cx="109728" cy="109728"/>
+          <p:cNvPr id="5" name="Eyebrow diamond -1"/>
+          <p:cNvSpPr/>
+          <p:nvPr/>
+        </p:nvSpPr>
+        <p:spPr>
+          <a:xfrm>
+            <a:off x="3928720" y="2103120"/>
+            <a:ext cx="128016" cy="128016"/>
           </a:xfrm>
           <a:prstGeom prst="diamond">
             <a:avLst/>
@@ -8237,20 +8663,20 @@
       </p:sp>
       <p:sp>
         <p:nvSpPr>
-          <p:cNvPr id="8" name="Bottom line L"/>
-          <p:cNvSpPr/>
-          <p:nvPr/>
-        </p:nvSpPr>
-        <p:spPr>
-          <a:xfrm>
-            <a:off x="4907128" y="3931920"/>
-            <a:ext cx="1042416" cy="0"/>
+          <p:cNvPr id="6" name="Eyebrow line -1"/>
+          <p:cNvSpPr/>
+          <p:nvPr/>
+        </p:nvSpPr>
+        <p:spPr>
+          <a:xfrm>
+            <a:off x="4084168" y="2167128"/>
+            <a:ext cx="731520" cy="0"/>
           </a:xfrm>
           <a:prstGeom prst="line">
             <a:avLst/>
           </a:prstGeom>
           <a:noFill/>
-          <a:ln w="12700">
+          <a:ln w="9525">
             <a:solidFill>
               <a:schemeClr val="accent1"/>
             </a:solidFill>
@@ -8260,37 +8686,14 @@
       </p:sp>
       <p:sp>
         <p:nvSpPr>
-          <p:cNvPr id="9" name="Bottom line R"/>
-          <p:cNvSpPr/>
-          <p:nvPr/>
-        </p:nvSpPr>
-        <p:spPr>
-          <a:xfrm>
-            <a:off x="6242152" y="3931920"/>
-            <a:ext cx="1042416" cy="0"/>
-          </a:xfrm>
-          <a:prstGeom prst="line">
-            <a:avLst/>
-          </a:prstGeom>
-          <a:noFill/>
-          <a:ln w="12700">
-            <a:solidFill>
-              <a:schemeClr val="accent1"/>
-            </a:solidFill>
-            <a:prstDash val="solid"/>
-          </a:ln>
-        </p:spPr>
-      </p:sp>
-      <p:sp>
-        <p:nvSpPr>
-          <p:cNvPr id="10" name="Bottom diamond"/>
-          <p:cNvSpPr/>
-          <p:nvPr/>
-        </p:nvSpPr>
-        <p:spPr>
-          <a:xfrm>
-            <a:off x="6040984" y="3877056"/>
-            <a:ext cx="109728" cy="109728"/>
+          <p:cNvPr id="7" name="Eyebrow diamond 1"/>
+          <p:cNvSpPr/>
+          <p:nvPr/>
+        </p:nvSpPr>
+        <p:spPr>
+          <a:xfrm>
+            <a:off x="8134960" y="2103120"/>
+            <a:ext cx="128016" cy="128016"/>
           </a:xfrm>
           <a:prstGeom prst="diamond">
             <a:avLst/>
@@ -8299,6 +8702,29 @@
             <a:schemeClr val="accent1"/>
           </a:solidFill>
           <a:ln w="12700">
+            <a:solidFill>
+              <a:schemeClr val="accent1"/>
+            </a:solidFill>
+            <a:prstDash val="solid"/>
+          </a:ln>
+        </p:spPr>
+      </p:sp>
+      <p:sp>
+        <p:nvSpPr>
+          <p:cNvPr id="8" name="Eyebrow line 1"/>
+          <p:cNvSpPr/>
+          <p:nvPr/>
+        </p:nvSpPr>
+        <p:spPr>
+          <a:xfrm>
+            <a:off x="7376008" y="2167128"/>
+            <a:ext cx="731520" cy="0"/>
+          </a:xfrm>
+          <a:prstGeom prst="line">
+            <a:avLst/>
+          </a:prstGeom>
+          <a:noFill/>
+          <a:ln w="9525">
             <a:solidFill>
               <a:schemeClr val="accent1"/>
             </a:solidFill>
@@ -8315,47 +8741,47 @@
 </file>
 
 <file path=ppt/theme/theme1.xml><?xml version="1.0" encoding="utf-8"?>
-<a:theme xmlns:a="http://schemas.openxmlformats.org/drawingml/2006/main" name="Royal Navy Gala">
+<a:theme xmlns:a="http://schemas.openxmlformats.org/drawingml/2006/main" name="Gala Deco">
   <a:themeElements>
-    <a:clrScheme name="Royal Navy Gala">
+    <a:clrScheme name="Gala Deco">
       <a:dk1>
-        <a:srgbClr val="0B1222"/>
+        <a:srgbClr val="070B18"/>
       </a:dk1>
       <a:lt1>
         <a:srgbClr val="FFFFFF"/>
       </a:lt1>
       <a:dk2>
-        <a:srgbClr val="1A2848"/>
+        <a:srgbClr val="16224A"/>
       </a:dk2>
       <a:lt2>
-        <a:srgbClr val="EFE8D6"/>
+        <a:srgbClr val="F5EEDC"/>
       </a:lt2>
       <a:accent1>
-        <a:srgbClr val="C9A961"/>
+        <a:srgbClr val="D4AF5F"/>
       </a:accent1>
       <a:accent2>
-        <a:srgbClr val="E8D9A8"/>
+        <a:srgbClr val="F0D696"/>
       </a:accent2>
       <a:accent3>
-        <a:srgbClr val="8C98B5"/>
+        <a:srgbClr val="9AA6C4"/>
       </a:accent3>
       <a:accent4>
-        <a:srgbClr val="D9B96A"/>
+        <a:srgbClr val="B8933F"/>
       </a:accent4>
       <a:accent5>
-        <a:srgbClr val="5B6B8F"/>
+        <a:srgbClr val="2A3A6E"/>
       </a:accent5>
       <a:accent6>
-        <a:srgbClr val="F3EBD3"/>
+        <a:srgbClr val="FFF4D6"/>
       </a:accent6>
       <a:hlink>
-        <a:srgbClr val="C9A961"/>
+        <a:srgbClr val="D4AF5F"/>
       </a:hlink>
       <a:folHlink>
-        <a:srgbClr val="E8D9A8"/>
+        <a:srgbClr val="F0D696"/>
       </a:folHlink>
     </a:clrScheme>
-    <a:fontScheme name="Royal Navy Gala">
+    <a:fontScheme name="Gala Deco">
       <a:majorFont>
         <a:latin typeface="나눔명조"/>
         <a:ea typeface=""/>
